--- a/docs/midterm_presentation_v2.pptx
+++ b/docs/midterm_presentation_v2.pptx
@@ -2,18 +2,18 @@
 <file path=ppt/presentation.xml><?xml version="1.0" encoding="utf-8"?>
 <p:presentation xmlns:a="http://schemas.openxmlformats.org/drawingml/2006/main" xmlns:r="http://schemas.openxmlformats.org/officeDocument/2006/relationships" xmlns:p="http://schemas.openxmlformats.org/presentationml/2006/main" saveSubsetFonts="1" autoCompressPictures="0">
   <p:sldMasterIdLst>
-    <p:sldMasterId id="2147483648" r:id="rId1"/>
+    <p:sldMasterId id="2147483672" r:id="rId1"/>
   </p:sldMasterIdLst>
   <p:sldIdLst>
-    <p:sldId id="256" r:id="rId7"/>
-    <p:sldId id="257" r:id="rId8"/>
-    <p:sldId id="258" r:id="rId9"/>
-    <p:sldId id="259" r:id="rId10"/>
-    <p:sldId id="260" r:id="rId11"/>
-    <p:sldId id="261" r:id="rId12"/>
-    <p:sldId id="262" r:id="rId13"/>
+    <p:sldId id="281" r:id="rId2"/>
+    <p:sldId id="288" r:id="rId3"/>
+    <p:sldId id="289" r:id="rId4"/>
+    <p:sldId id="294" r:id="rId5"/>
+    <p:sldId id="285" r:id="rId6"/>
+    <p:sldId id="295" r:id="rId7"/>
+    <p:sldId id="287" r:id="rId8"/>
   </p:sldIdLst>
-  <p:sldSz cx="12191695" cy="6858000" type="screen4x3"/>
+  <p:sldSz cx="12192000" cy="6858000"/>
   <p:notesSz cx="6858000" cy="9144000"/>
   <p:defaultTextStyle>
     <a:defPPr>
@@ -110,11 +110,27 @@
       </a:defRPr>
     </a:lvl9pPr>
   </p:defaultTextStyle>
+  <p:extLst>
+    <p:ext uri="{EFAFB233-063F-42B5-8137-9DF3F51BA10A}">
+      <p15:sldGuideLst xmlns:p15="http://schemas.microsoft.com/office/powerpoint/2012/main">
+        <p15:guide id="1" orient="horz" pos="2160">
+          <p15:clr>
+            <a:srgbClr val="A4A3A4"/>
+          </p15:clr>
+        </p15:guide>
+        <p15:guide id="2" pos="2880">
+          <p15:clr>
+            <a:srgbClr val="A4A3A4"/>
+          </p15:clr>
+        </p15:guide>
+      </p15:sldGuideLst>
+    </p:ext>
+  </p:extLst>
 </p:presentation>
 </file>
 
 <file path=ppt/slideLayouts/slideLayout1.xml><?xml version="1.0" encoding="utf-8"?>
-<p:sldLayout xmlns:a="http://schemas.openxmlformats.org/drawingml/2006/main" xmlns:r="http://schemas.openxmlformats.org/officeDocument/2006/relationships" xmlns:p="http://schemas.openxmlformats.org/presentationml/2006/main" type="title" preserve="1">
+<p:sldLayout xmlns:a="http://schemas.openxmlformats.org/drawingml/2006/main" xmlns:r="http://schemas.openxmlformats.org/officeDocument/2006/relationships" xmlns:p="http://schemas.openxmlformats.org/presentationml/2006/main" type="title">
   <p:cSld name="Title Slide">
     <p:spTree>
       <p:nvGrpSpPr>
@@ -151,10 +167,9 @@
           <a:lstStyle/>
           <a:p>
             <a:r>
-              <a:rPr lang="en-US" smtClean="0"/>
+              <a:rPr lang="en-US"/>
               <a:t>Click to edit Master title style</a:t>
             </a:r>
-            <a:endParaRPr lang="en-US"/>
           </a:p>
         </p:txBody>
       </p:sp>
@@ -270,10 +285,9 @@
           </a:lstStyle>
           <a:p>
             <a:r>
-              <a:rPr lang="en-US" smtClean="0"/>
+              <a:rPr lang="en-US"/>
               <a:t>Click to edit Master subtitle style</a:t>
             </a:r>
-            <a:endParaRPr lang="en-US"/>
           </a:p>
         </p:txBody>
       </p:sp>
@@ -294,7 +308,7 @@
           <a:p>
             <a:fld id="{5BCAD085-E8A6-8845-BD4E-CB4CCA059FC4}" type="datetimeFigureOut">
               <a:rPr lang="en-US" smtClean="0"/>
-              <a:t>1/27/13</a:t>
+              <a:t>10/19/26</a:t>
             </a:fld>
             <a:endParaRPr lang="en-US"/>
           </a:p>
@@ -356,7 +370,7 @@
 </file>
 
 <file path=ppt/slideLayouts/slideLayout10.xml><?xml version="1.0" encoding="utf-8"?>
-<p:sldLayout xmlns:a="http://schemas.openxmlformats.org/drawingml/2006/main" xmlns:r="http://schemas.openxmlformats.org/officeDocument/2006/relationships" xmlns:p="http://schemas.openxmlformats.org/presentationml/2006/main" type="vertTx" preserve="1">
+<p:sldLayout xmlns:a="http://schemas.openxmlformats.org/drawingml/2006/main" xmlns:r="http://schemas.openxmlformats.org/officeDocument/2006/relationships" xmlns:p="http://schemas.openxmlformats.org/presentationml/2006/main" type="vertTx">
   <p:cSld name="Title and Vertical Text">
     <p:spTree>
       <p:nvGrpSpPr>
@@ -388,10 +402,9 @@
           <a:lstStyle/>
           <a:p>
             <a:r>
-              <a:rPr lang="en-US" smtClean="0"/>
+              <a:rPr lang="en-US"/>
               <a:t>Click to edit Master title style</a:t>
             </a:r>
-            <a:endParaRPr lang="en-US"/>
           </a:p>
         </p:txBody>
       </p:sp>
@@ -412,38 +425,37 @@
           <a:p>
             <a:pPr lvl="0"/>
             <a:r>
-              <a:rPr lang="en-US" smtClean="0"/>
+              <a:rPr lang="en-US"/>
               <a:t>Click to edit Master text styles</a:t>
             </a:r>
           </a:p>
           <a:p>
             <a:pPr lvl="1"/>
             <a:r>
-              <a:rPr lang="en-US" smtClean="0"/>
+              <a:rPr lang="en-US"/>
               <a:t>Second level</a:t>
             </a:r>
           </a:p>
           <a:p>
             <a:pPr lvl="2"/>
             <a:r>
-              <a:rPr lang="en-US" smtClean="0"/>
+              <a:rPr lang="en-US"/>
               <a:t>Third level</a:t>
             </a:r>
           </a:p>
           <a:p>
             <a:pPr lvl="3"/>
             <a:r>
-              <a:rPr lang="en-US" smtClean="0"/>
+              <a:rPr lang="en-US"/>
               <a:t>Fourth level</a:t>
             </a:r>
           </a:p>
           <a:p>
             <a:pPr lvl="4"/>
             <a:r>
-              <a:rPr lang="en-US" smtClean="0"/>
+              <a:rPr lang="en-US"/>
               <a:t>Fifth level</a:t>
             </a:r>
-            <a:endParaRPr lang="en-US"/>
           </a:p>
         </p:txBody>
       </p:sp>
@@ -464,7 +476,7 @@
           <a:p>
             <a:fld id="{5BCAD085-E8A6-8845-BD4E-CB4CCA059FC4}" type="datetimeFigureOut">
               <a:rPr lang="en-US" smtClean="0"/>
-              <a:t>1/27/13</a:t>
+              <a:t>10/19/26</a:t>
             </a:fld>
             <a:endParaRPr lang="en-US"/>
           </a:p>
@@ -526,7 +538,7 @@
 </file>
 
 <file path=ppt/slideLayouts/slideLayout11.xml><?xml version="1.0" encoding="utf-8"?>
-<p:sldLayout xmlns:a="http://schemas.openxmlformats.org/drawingml/2006/main" xmlns:r="http://schemas.openxmlformats.org/officeDocument/2006/relationships" xmlns:p="http://schemas.openxmlformats.org/presentationml/2006/main" type="vertTitleAndTx" preserve="1">
+<p:sldLayout xmlns:a="http://schemas.openxmlformats.org/drawingml/2006/main" xmlns:r="http://schemas.openxmlformats.org/officeDocument/2006/relationships" xmlns:p="http://schemas.openxmlformats.org/presentationml/2006/main" type="vertTitleAndTx">
   <p:cSld name="Vertical Title and Text">
     <p:spTree>
       <p:nvGrpSpPr>
@@ -563,10 +575,9 @@
           <a:lstStyle/>
           <a:p>
             <a:r>
-              <a:rPr lang="en-US" smtClean="0"/>
+              <a:rPr lang="en-US"/>
               <a:t>Click to edit Master title style</a:t>
             </a:r>
-            <a:endParaRPr lang="en-US"/>
           </a:p>
         </p:txBody>
       </p:sp>
@@ -592,38 +603,37 @@
           <a:p>
             <a:pPr lvl="0"/>
             <a:r>
-              <a:rPr lang="en-US" smtClean="0"/>
+              <a:rPr lang="en-US"/>
               <a:t>Click to edit Master text styles</a:t>
             </a:r>
           </a:p>
           <a:p>
             <a:pPr lvl="1"/>
             <a:r>
-              <a:rPr lang="en-US" smtClean="0"/>
+              <a:rPr lang="en-US"/>
               <a:t>Second level</a:t>
             </a:r>
           </a:p>
           <a:p>
             <a:pPr lvl="2"/>
             <a:r>
-              <a:rPr lang="en-US" smtClean="0"/>
+              <a:rPr lang="en-US"/>
               <a:t>Third level</a:t>
             </a:r>
           </a:p>
           <a:p>
             <a:pPr lvl="3"/>
             <a:r>
-              <a:rPr lang="en-US" smtClean="0"/>
+              <a:rPr lang="en-US"/>
               <a:t>Fourth level</a:t>
             </a:r>
           </a:p>
           <a:p>
             <a:pPr lvl="4"/>
             <a:r>
-              <a:rPr lang="en-US" smtClean="0"/>
+              <a:rPr lang="en-US"/>
               <a:t>Fifth level</a:t>
             </a:r>
-            <a:endParaRPr lang="en-US"/>
           </a:p>
         </p:txBody>
       </p:sp>
@@ -644,7 +654,7 @@
           <a:p>
             <a:fld id="{5BCAD085-E8A6-8845-BD4E-CB4CCA059FC4}" type="datetimeFigureOut">
               <a:rPr lang="en-US" smtClean="0"/>
-              <a:t>1/27/13</a:t>
+              <a:t>10/19/26</a:t>
             </a:fld>
             <a:endParaRPr lang="en-US"/>
           </a:p>
@@ -706,7 +716,7 @@
 </file>
 
 <file path=ppt/slideLayouts/slideLayout2.xml><?xml version="1.0" encoding="utf-8"?>
-<p:sldLayout xmlns:a="http://schemas.openxmlformats.org/drawingml/2006/main" xmlns:r="http://schemas.openxmlformats.org/officeDocument/2006/relationships" xmlns:p="http://schemas.openxmlformats.org/presentationml/2006/main" type="obj" preserve="1">
+<p:sldLayout xmlns:a="http://schemas.openxmlformats.org/drawingml/2006/main" xmlns:r="http://schemas.openxmlformats.org/officeDocument/2006/relationships" xmlns:p="http://schemas.openxmlformats.org/presentationml/2006/main" type="obj">
   <p:cSld name="Title and Content">
     <p:spTree>
       <p:nvGrpSpPr>
@@ -738,10 +748,9 @@
           <a:lstStyle/>
           <a:p>
             <a:r>
-              <a:rPr lang="en-US" smtClean="0"/>
+              <a:rPr lang="en-US"/>
               <a:t>Click to edit Master title style</a:t>
             </a:r>
-            <a:endParaRPr lang="en-US"/>
           </a:p>
         </p:txBody>
       </p:sp>
@@ -762,38 +771,37 @@
           <a:p>
             <a:pPr lvl="0"/>
             <a:r>
-              <a:rPr lang="en-US" smtClean="0"/>
+              <a:rPr lang="en-US"/>
               <a:t>Click to edit Master text styles</a:t>
             </a:r>
           </a:p>
           <a:p>
             <a:pPr lvl="1"/>
             <a:r>
-              <a:rPr lang="en-US" smtClean="0"/>
+              <a:rPr lang="en-US"/>
               <a:t>Second level</a:t>
             </a:r>
           </a:p>
           <a:p>
             <a:pPr lvl="2"/>
             <a:r>
-              <a:rPr lang="en-US" smtClean="0"/>
+              <a:rPr lang="en-US"/>
               <a:t>Third level</a:t>
             </a:r>
           </a:p>
           <a:p>
             <a:pPr lvl="3"/>
             <a:r>
-              <a:rPr lang="en-US" smtClean="0"/>
+              <a:rPr lang="en-US"/>
               <a:t>Fourth level</a:t>
             </a:r>
           </a:p>
           <a:p>
             <a:pPr lvl="4"/>
             <a:r>
-              <a:rPr lang="en-US" smtClean="0"/>
+              <a:rPr lang="en-US"/>
               <a:t>Fifth level</a:t>
             </a:r>
-            <a:endParaRPr lang="en-US"/>
           </a:p>
         </p:txBody>
       </p:sp>
@@ -814,7 +822,7 @@
           <a:p>
             <a:fld id="{5BCAD085-E8A6-8845-BD4E-CB4CCA059FC4}" type="datetimeFigureOut">
               <a:rPr lang="en-US" smtClean="0"/>
-              <a:t>1/27/13</a:t>
+              <a:t>10/19/26</a:t>
             </a:fld>
             <a:endParaRPr lang="en-US"/>
           </a:p>
@@ -876,7 +884,7 @@
 </file>
 
 <file path=ppt/slideLayouts/slideLayout3.xml><?xml version="1.0" encoding="utf-8"?>
-<p:sldLayout xmlns:a="http://schemas.openxmlformats.org/drawingml/2006/main" xmlns:r="http://schemas.openxmlformats.org/officeDocument/2006/relationships" xmlns:p="http://schemas.openxmlformats.org/presentationml/2006/main" type="secHead" preserve="1">
+<p:sldLayout xmlns:a="http://schemas.openxmlformats.org/drawingml/2006/main" xmlns:r="http://schemas.openxmlformats.org/officeDocument/2006/relationships" xmlns:p="http://schemas.openxmlformats.org/presentationml/2006/main" type="secHead">
   <p:cSld name="Section Header">
     <p:spTree>
       <p:nvGrpSpPr>
@@ -917,10 +925,9 @@
           </a:lstStyle>
           <a:p>
             <a:r>
-              <a:rPr lang="en-US" smtClean="0"/>
+              <a:rPr lang="en-US"/>
               <a:t>Click to edit Master title style</a:t>
             </a:r>
-            <a:endParaRPr lang="en-US"/>
           </a:p>
         </p:txBody>
       </p:sp>
@@ -1037,7 +1044,7 @@
           <a:p>
             <a:pPr lvl="0"/>
             <a:r>
-              <a:rPr lang="en-US" smtClean="0"/>
+              <a:rPr lang="en-US"/>
               <a:t>Click to edit Master text styles</a:t>
             </a:r>
           </a:p>
@@ -1060,7 +1067,7 @@
           <a:p>
             <a:fld id="{5BCAD085-E8A6-8845-BD4E-CB4CCA059FC4}" type="datetimeFigureOut">
               <a:rPr lang="en-US" smtClean="0"/>
-              <a:t>1/27/13</a:t>
+              <a:t>10/19/26</a:t>
             </a:fld>
             <a:endParaRPr lang="en-US"/>
           </a:p>
@@ -1122,7 +1129,7 @@
 </file>
 
 <file path=ppt/slideLayouts/slideLayout4.xml><?xml version="1.0" encoding="utf-8"?>
-<p:sldLayout xmlns:a="http://schemas.openxmlformats.org/drawingml/2006/main" xmlns:r="http://schemas.openxmlformats.org/officeDocument/2006/relationships" xmlns:p="http://schemas.openxmlformats.org/presentationml/2006/main" type="twoObj" preserve="1">
+<p:sldLayout xmlns:a="http://schemas.openxmlformats.org/drawingml/2006/main" xmlns:r="http://schemas.openxmlformats.org/officeDocument/2006/relationships" xmlns:p="http://schemas.openxmlformats.org/presentationml/2006/main" type="twoObj">
   <p:cSld name="Two Content">
     <p:spTree>
       <p:nvGrpSpPr>
@@ -1154,10 +1161,9 @@
           <a:lstStyle/>
           <a:p>
             <a:r>
-              <a:rPr lang="en-US" smtClean="0"/>
+              <a:rPr lang="en-US"/>
               <a:t>Click to edit Master title style</a:t>
             </a:r>
-            <a:endParaRPr lang="en-US"/>
           </a:p>
         </p:txBody>
       </p:sp>
@@ -1211,38 +1217,37 @@
           <a:p>
             <a:pPr lvl="0"/>
             <a:r>
-              <a:rPr lang="en-US" smtClean="0"/>
+              <a:rPr lang="en-US"/>
               <a:t>Click to edit Master text styles</a:t>
             </a:r>
           </a:p>
           <a:p>
             <a:pPr lvl="1"/>
             <a:r>
-              <a:rPr lang="en-US" smtClean="0"/>
+              <a:rPr lang="en-US"/>
               <a:t>Second level</a:t>
             </a:r>
           </a:p>
           <a:p>
             <a:pPr lvl="2"/>
             <a:r>
-              <a:rPr lang="en-US" smtClean="0"/>
+              <a:rPr lang="en-US"/>
               <a:t>Third level</a:t>
             </a:r>
           </a:p>
           <a:p>
             <a:pPr lvl="3"/>
             <a:r>
-              <a:rPr lang="en-US" smtClean="0"/>
+              <a:rPr lang="en-US"/>
               <a:t>Fourth level</a:t>
             </a:r>
           </a:p>
           <a:p>
             <a:pPr lvl="4"/>
             <a:r>
-              <a:rPr lang="en-US" smtClean="0"/>
+              <a:rPr lang="en-US"/>
               <a:t>Fifth level</a:t>
             </a:r>
-            <a:endParaRPr lang="en-US"/>
           </a:p>
         </p:txBody>
       </p:sp>
@@ -1296,38 +1301,37 @@
           <a:p>
             <a:pPr lvl="0"/>
             <a:r>
-              <a:rPr lang="en-US" smtClean="0"/>
+              <a:rPr lang="en-US"/>
               <a:t>Click to edit Master text styles</a:t>
             </a:r>
           </a:p>
           <a:p>
             <a:pPr lvl="1"/>
             <a:r>
-              <a:rPr lang="en-US" smtClean="0"/>
+              <a:rPr lang="en-US"/>
               <a:t>Second level</a:t>
             </a:r>
           </a:p>
           <a:p>
             <a:pPr lvl="2"/>
             <a:r>
-              <a:rPr lang="en-US" smtClean="0"/>
+              <a:rPr lang="en-US"/>
               <a:t>Third level</a:t>
             </a:r>
           </a:p>
           <a:p>
             <a:pPr lvl="3"/>
             <a:r>
-              <a:rPr lang="en-US" smtClean="0"/>
+              <a:rPr lang="en-US"/>
               <a:t>Fourth level</a:t>
             </a:r>
           </a:p>
           <a:p>
             <a:pPr lvl="4"/>
             <a:r>
-              <a:rPr lang="en-US" smtClean="0"/>
+              <a:rPr lang="en-US"/>
               <a:t>Fifth level</a:t>
             </a:r>
-            <a:endParaRPr lang="en-US"/>
           </a:p>
         </p:txBody>
       </p:sp>
@@ -1348,7 +1352,7 @@
           <a:p>
             <a:fld id="{5BCAD085-E8A6-8845-BD4E-CB4CCA059FC4}" type="datetimeFigureOut">
               <a:rPr lang="en-US" smtClean="0"/>
-              <a:t>1/27/13</a:t>
+              <a:t>10/19/26</a:t>
             </a:fld>
             <a:endParaRPr lang="en-US"/>
           </a:p>
@@ -1410,7 +1414,7 @@
 </file>
 
 <file path=ppt/slideLayouts/slideLayout5.xml><?xml version="1.0" encoding="utf-8"?>
-<p:sldLayout xmlns:a="http://schemas.openxmlformats.org/drawingml/2006/main" xmlns:r="http://schemas.openxmlformats.org/officeDocument/2006/relationships" xmlns:p="http://schemas.openxmlformats.org/presentationml/2006/main" type="twoTxTwoObj" preserve="1">
+<p:sldLayout xmlns:a="http://schemas.openxmlformats.org/drawingml/2006/main" xmlns:r="http://schemas.openxmlformats.org/officeDocument/2006/relationships" xmlns:p="http://schemas.openxmlformats.org/presentationml/2006/main" type="twoTxTwoObj">
   <p:cSld name="Comparison">
     <p:spTree>
       <p:nvGrpSpPr>
@@ -1446,10 +1450,9 @@
           </a:lstStyle>
           <a:p>
             <a:r>
-              <a:rPr lang="en-US" smtClean="0"/>
+              <a:rPr lang="en-US"/>
               <a:t>Click to edit Master title style</a:t>
             </a:r>
-            <a:endParaRPr lang="en-US"/>
           </a:p>
         </p:txBody>
       </p:sp>
@@ -1512,7 +1515,7 @@
           <a:p>
             <a:pPr lvl="0"/>
             <a:r>
-              <a:rPr lang="en-US" smtClean="0"/>
+              <a:rPr lang="en-US"/>
               <a:t>Click to edit Master text styles</a:t>
             </a:r>
           </a:p>
@@ -1568,38 +1571,37 @@
           <a:p>
             <a:pPr lvl="0"/>
             <a:r>
-              <a:rPr lang="en-US" smtClean="0"/>
+              <a:rPr lang="en-US"/>
               <a:t>Click to edit Master text styles</a:t>
             </a:r>
           </a:p>
           <a:p>
             <a:pPr lvl="1"/>
             <a:r>
-              <a:rPr lang="en-US" smtClean="0"/>
+              <a:rPr lang="en-US"/>
               <a:t>Second level</a:t>
             </a:r>
           </a:p>
           <a:p>
             <a:pPr lvl="2"/>
             <a:r>
-              <a:rPr lang="en-US" smtClean="0"/>
+              <a:rPr lang="en-US"/>
               <a:t>Third level</a:t>
             </a:r>
           </a:p>
           <a:p>
             <a:pPr lvl="3"/>
             <a:r>
-              <a:rPr lang="en-US" smtClean="0"/>
+              <a:rPr lang="en-US"/>
               <a:t>Fourth level</a:t>
             </a:r>
           </a:p>
           <a:p>
             <a:pPr lvl="4"/>
             <a:r>
-              <a:rPr lang="en-US" smtClean="0"/>
+              <a:rPr lang="en-US"/>
               <a:t>Fifth level</a:t>
             </a:r>
-            <a:endParaRPr lang="en-US"/>
           </a:p>
         </p:txBody>
       </p:sp>
@@ -1662,7 +1664,7 @@
           <a:p>
             <a:pPr lvl="0"/>
             <a:r>
-              <a:rPr lang="en-US" smtClean="0"/>
+              <a:rPr lang="en-US"/>
               <a:t>Click to edit Master text styles</a:t>
             </a:r>
           </a:p>
@@ -1718,38 +1720,37 @@
           <a:p>
             <a:pPr lvl="0"/>
             <a:r>
-              <a:rPr lang="en-US" smtClean="0"/>
+              <a:rPr lang="en-US"/>
               <a:t>Click to edit Master text styles</a:t>
             </a:r>
           </a:p>
           <a:p>
             <a:pPr lvl="1"/>
             <a:r>
-              <a:rPr lang="en-US" smtClean="0"/>
+              <a:rPr lang="en-US"/>
               <a:t>Second level</a:t>
             </a:r>
           </a:p>
           <a:p>
             <a:pPr lvl="2"/>
             <a:r>
-              <a:rPr lang="en-US" smtClean="0"/>
+              <a:rPr lang="en-US"/>
               <a:t>Third level</a:t>
             </a:r>
           </a:p>
           <a:p>
             <a:pPr lvl="3"/>
             <a:r>
-              <a:rPr lang="en-US" smtClean="0"/>
+              <a:rPr lang="en-US"/>
               <a:t>Fourth level</a:t>
             </a:r>
           </a:p>
           <a:p>
             <a:pPr lvl="4"/>
             <a:r>
-              <a:rPr lang="en-US" smtClean="0"/>
+              <a:rPr lang="en-US"/>
               <a:t>Fifth level</a:t>
             </a:r>
-            <a:endParaRPr lang="en-US"/>
           </a:p>
         </p:txBody>
       </p:sp>
@@ -1770,7 +1771,7 @@
           <a:p>
             <a:fld id="{5BCAD085-E8A6-8845-BD4E-CB4CCA059FC4}" type="datetimeFigureOut">
               <a:rPr lang="en-US" smtClean="0"/>
-              <a:t>1/27/13</a:t>
+              <a:t>10/19/26</a:t>
             </a:fld>
             <a:endParaRPr lang="en-US"/>
           </a:p>
@@ -1832,7 +1833,7 @@
 </file>
 
 <file path=ppt/slideLayouts/slideLayout6.xml><?xml version="1.0" encoding="utf-8"?>
-<p:sldLayout xmlns:a="http://schemas.openxmlformats.org/drawingml/2006/main" xmlns:r="http://schemas.openxmlformats.org/officeDocument/2006/relationships" xmlns:p="http://schemas.openxmlformats.org/presentationml/2006/main" type="titleOnly" preserve="1">
+<p:sldLayout xmlns:a="http://schemas.openxmlformats.org/drawingml/2006/main" xmlns:r="http://schemas.openxmlformats.org/officeDocument/2006/relationships" xmlns:p="http://schemas.openxmlformats.org/presentationml/2006/main" type="titleOnly">
   <p:cSld name="Title Only">
     <p:spTree>
       <p:nvGrpSpPr>
@@ -1864,10 +1865,9 @@
           <a:lstStyle/>
           <a:p>
             <a:r>
-              <a:rPr lang="en-US" smtClean="0"/>
+              <a:rPr lang="en-US"/>
               <a:t>Click to edit Master title style</a:t>
             </a:r>
-            <a:endParaRPr lang="en-US"/>
           </a:p>
         </p:txBody>
       </p:sp>
@@ -1888,7 +1888,7 @@
           <a:p>
             <a:fld id="{5BCAD085-E8A6-8845-BD4E-CB4CCA059FC4}" type="datetimeFigureOut">
               <a:rPr lang="en-US" smtClean="0"/>
-              <a:t>1/27/13</a:t>
+              <a:t>10/19/26</a:t>
             </a:fld>
             <a:endParaRPr lang="en-US"/>
           </a:p>
@@ -1950,7 +1950,7 @@
 </file>
 
 <file path=ppt/slideLayouts/slideLayout7.xml><?xml version="1.0" encoding="utf-8"?>
-<p:sldLayout xmlns:a="http://schemas.openxmlformats.org/drawingml/2006/main" xmlns:r="http://schemas.openxmlformats.org/officeDocument/2006/relationships" xmlns:p="http://schemas.openxmlformats.org/presentationml/2006/main" type="blank" preserve="1">
+<p:sldLayout xmlns:a="http://schemas.openxmlformats.org/drawingml/2006/main" xmlns:r="http://schemas.openxmlformats.org/officeDocument/2006/relationships" xmlns:p="http://schemas.openxmlformats.org/presentationml/2006/main" type="blank">
   <p:cSld name="Blank">
     <p:spTree>
       <p:nvGrpSpPr>
@@ -1983,7 +1983,7 @@
           <a:p>
             <a:fld id="{5BCAD085-E8A6-8845-BD4E-CB4CCA059FC4}" type="datetimeFigureOut">
               <a:rPr lang="en-US" smtClean="0"/>
-              <a:t>1/27/13</a:t>
+              <a:t>10/19/26</a:t>
             </a:fld>
             <a:endParaRPr lang="en-US"/>
           </a:p>
@@ -2045,7 +2045,7 @@
 </file>
 
 <file path=ppt/slideLayouts/slideLayout8.xml><?xml version="1.0" encoding="utf-8"?>
-<p:sldLayout xmlns:a="http://schemas.openxmlformats.org/drawingml/2006/main" xmlns:r="http://schemas.openxmlformats.org/officeDocument/2006/relationships" xmlns:p="http://schemas.openxmlformats.org/presentationml/2006/main" type="objTx" preserve="1">
+<p:sldLayout xmlns:a="http://schemas.openxmlformats.org/drawingml/2006/main" xmlns:r="http://schemas.openxmlformats.org/officeDocument/2006/relationships" xmlns:p="http://schemas.openxmlformats.org/presentationml/2006/main" type="objTx">
   <p:cSld name="Content with Caption">
     <p:spTree>
       <p:nvGrpSpPr>
@@ -2086,10 +2086,9 @@
           </a:lstStyle>
           <a:p>
             <a:r>
-              <a:rPr lang="en-US" smtClean="0"/>
+              <a:rPr lang="en-US"/>
               <a:t>Click to edit Master title style</a:t>
             </a:r>
-            <a:endParaRPr lang="en-US"/>
           </a:p>
         </p:txBody>
       </p:sp>
@@ -2143,38 +2142,37 @@
           <a:p>
             <a:pPr lvl="0"/>
             <a:r>
-              <a:rPr lang="en-US" smtClean="0"/>
+              <a:rPr lang="en-US"/>
               <a:t>Click to edit Master text styles</a:t>
             </a:r>
           </a:p>
           <a:p>
             <a:pPr lvl="1"/>
             <a:r>
-              <a:rPr lang="en-US" smtClean="0"/>
+              <a:rPr lang="en-US"/>
               <a:t>Second level</a:t>
             </a:r>
           </a:p>
           <a:p>
             <a:pPr lvl="2"/>
             <a:r>
-              <a:rPr lang="en-US" smtClean="0"/>
+              <a:rPr lang="en-US"/>
               <a:t>Third level</a:t>
             </a:r>
           </a:p>
           <a:p>
             <a:pPr lvl="3"/>
             <a:r>
-              <a:rPr lang="en-US" smtClean="0"/>
+              <a:rPr lang="en-US"/>
               <a:t>Fourth level</a:t>
             </a:r>
           </a:p>
           <a:p>
             <a:pPr lvl="4"/>
             <a:r>
-              <a:rPr lang="en-US" smtClean="0"/>
+              <a:rPr lang="en-US"/>
               <a:t>Fifth level</a:t>
             </a:r>
-            <a:endParaRPr lang="en-US"/>
           </a:p>
         </p:txBody>
       </p:sp>
@@ -2237,7 +2235,7 @@
           <a:p>
             <a:pPr lvl="0"/>
             <a:r>
-              <a:rPr lang="en-US" smtClean="0"/>
+              <a:rPr lang="en-US"/>
               <a:t>Click to edit Master text styles</a:t>
             </a:r>
           </a:p>
@@ -2260,7 +2258,7 @@
           <a:p>
             <a:fld id="{5BCAD085-E8A6-8845-BD4E-CB4CCA059FC4}" type="datetimeFigureOut">
               <a:rPr lang="en-US" smtClean="0"/>
-              <a:t>1/27/13</a:t>
+              <a:t>10/19/26</a:t>
             </a:fld>
             <a:endParaRPr lang="en-US"/>
           </a:p>
@@ -2322,7 +2320,7 @@
 </file>
 
 <file path=ppt/slideLayouts/slideLayout9.xml><?xml version="1.0" encoding="utf-8"?>
-<p:sldLayout xmlns:a="http://schemas.openxmlformats.org/drawingml/2006/main" xmlns:r="http://schemas.openxmlformats.org/officeDocument/2006/relationships" xmlns:p="http://schemas.openxmlformats.org/presentationml/2006/main" type="picTx" preserve="1">
+<p:sldLayout xmlns:a="http://schemas.openxmlformats.org/drawingml/2006/main" xmlns:r="http://schemas.openxmlformats.org/officeDocument/2006/relationships" xmlns:p="http://schemas.openxmlformats.org/presentationml/2006/main" type="picTx">
   <p:cSld name="Picture with Caption">
     <p:spTree>
       <p:nvGrpSpPr>
@@ -2363,10 +2361,9 @@
           </a:lstStyle>
           <a:p>
             <a:r>
-              <a:rPr lang="en-US" smtClean="0"/>
+              <a:rPr lang="en-US"/>
               <a:t>Click to edit Master title style</a:t>
             </a:r>
-            <a:endParaRPr lang="en-US"/>
           </a:p>
         </p:txBody>
       </p:sp>
@@ -2490,7 +2487,7 @@
           <a:p>
             <a:pPr lvl="0"/>
             <a:r>
-              <a:rPr lang="en-US" smtClean="0"/>
+              <a:rPr lang="en-US"/>
               <a:t>Click to edit Master text styles</a:t>
             </a:r>
           </a:p>
@@ -2513,7 +2510,7 @@
           <a:p>
             <a:fld id="{5BCAD085-E8A6-8845-BD4E-CB4CCA059FC4}" type="datetimeFigureOut">
               <a:rPr lang="en-US" smtClean="0"/>
-              <a:t>1/27/13</a:t>
+              <a:t>10/19/26</a:t>
             </a:fld>
             <a:endParaRPr lang="en-US"/>
           </a:p>
@@ -2622,10 +2619,9 @@
           <a:lstStyle/>
           <a:p>
             <a:r>
-              <a:rPr lang="en-US" smtClean="0"/>
+              <a:rPr lang="en-US"/>
               <a:t>Click to edit Master title style</a:t>
             </a:r>
-            <a:endParaRPr lang="en-US"/>
           </a:p>
         </p:txBody>
       </p:sp>
@@ -2656,38 +2652,37 @@
           <a:p>
             <a:pPr lvl="0"/>
             <a:r>
-              <a:rPr lang="en-US" smtClean="0"/>
+              <a:rPr lang="en-US"/>
               <a:t>Click to edit Master text styles</a:t>
             </a:r>
           </a:p>
           <a:p>
             <a:pPr lvl="1"/>
             <a:r>
-              <a:rPr lang="en-US" smtClean="0"/>
+              <a:rPr lang="en-US"/>
               <a:t>Second level</a:t>
             </a:r>
           </a:p>
           <a:p>
             <a:pPr lvl="2"/>
             <a:r>
-              <a:rPr lang="en-US" smtClean="0"/>
+              <a:rPr lang="en-US"/>
               <a:t>Third level</a:t>
             </a:r>
           </a:p>
           <a:p>
             <a:pPr lvl="3"/>
             <a:r>
-              <a:rPr lang="en-US" smtClean="0"/>
+              <a:rPr lang="en-US"/>
               <a:t>Fourth level</a:t>
             </a:r>
           </a:p>
           <a:p>
             <a:pPr lvl="4"/>
             <a:r>
-              <a:rPr lang="en-US" smtClean="0"/>
+              <a:rPr lang="en-US"/>
               <a:t>Fifth level</a:t>
             </a:r>
-            <a:endParaRPr lang="en-US"/>
           </a:p>
         </p:txBody>
       </p:sp>
@@ -2726,7 +2721,7 @@
           <a:p>
             <a:fld id="{5BCAD085-E8A6-8845-BD4E-CB4CCA059FC4}" type="datetimeFigureOut">
               <a:rPr lang="en-US" smtClean="0"/>
-              <a:t>1/27/13</a:t>
+              <a:t>10/19/26</a:t>
             </a:fld>
             <a:endParaRPr lang="en-US"/>
           </a:p>
@@ -2819,17 +2814,17 @@
   </p:cSld>
   <p:clrMap bg1="lt1" tx1="dk1" bg2="lt2" tx2="dk2" accent1="accent1" accent2="accent2" accent3="accent3" accent4="accent4" accent5="accent5" accent6="accent6" hlink="hlink" folHlink="folHlink"/>
   <p:sldLayoutIdLst>
-    <p:sldLayoutId id="2147483649" r:id="rId1"/>
-    <p:sldLayoutId id="2147483650" r:id="rId2"/>
-    <p:sldLayoutId id="2147483651" r:id="rId3"/>
-    <p:sldLayoutId id="2147483652" r:id="rId4"/>
-    <p:sldLayoutId id="2147483653" r:id="rId5"/>
-    <p:sldLayoutId id="2147483654" r:id="rId6"/>
-    <p:sldLayoutId id="2147483655" r:id="rId7"/>
-    <p:sldLayoutId id="2147483656" r:id="rId8"/>
-    <p:sldLayoutId id="2147483657" r:id="rId9"/>
-    <p:sldLayoutId id="2147483658" r:id="rId10"/>
-    <p:sldLayoutId id="2147483659" r:id="rId11"/>
+    <p:sldLayoutId id="2147483673" r:id="rId1"/>
+    <p:sldLayoutId id="2147483674" r:id="rId2"/>
+    <p:sldLayoutId id="2147483675" r:id="rId3"/>
+    <p:sldLayoutId id="2147483676" r:id="rId4"/>
+    <p:sldLayoutId id="2147483677" r:id="rId5"/>
+    <p:sldLayoutId id="2147483678" r:id="rId6"/>
+    <p:sldLayoutId id="2147483679" r:id="rId7"/>
+    <p:sldLayoutId id="2147483680" r:id="rId8"/>
+    <p:sldLayoutId id="2147483681" r:id="rId9"/>
+    <p:sldLayoutId id="2147483682" r:id="rId10"/>
+    <p:sldLayoutId id="2147483683" r:id="rId11"/>
   </p:sldLayoutIdLst>
   <p:txStyles>
     <p:titleStyle>
@@ -3085,7 +3080,7 @@
 </file>
 
 <file path=ppt/slides/slide1.xml><?xml version="1.0" encoding="utf-8"?>
-<p:sld xmlns:a="http://schemas.openxmlformats.org/drawingml/2006/main" xmlns:p="http://schemas.openxmlformats.org/presentationml/2006/main" xmlns:r="http://schemas.openxmlformats.org/officeDocument/2006/relationships">
+<p:sld xmlns:a="http://schemas.openxmlformats.org/drawingml/2006/main" xmlns:r="http://schemas.openxmlformats.org/officeDocument/2006/relationships" xmlns:p="http://schemas.openxmlformats.org/presentationml/2006/main">
   <p:cSld>
     <p:bg>
       <p:bgPr>
@@ -3101,7 +3096,14 @@
         <p:cNvGrpSpPr/>
         <p:nvPr/>
       </p:nvGrpSpPr>
-      <p:grpSpPr/>
+      <p:grpSpPr>
+        <a:xfrm>
+          <a:off x="0" y="0"/>
+          <a:ext cx="0" cy="0"/>
+          <a:chOff x="0" y="0"/>
+          <a:chExt cx="0" cy="0"/>
+        </a:xfrm>
+      </p:grpSpPr>
       <p:sp>
         <p:nvSpPr>
           <p:cNvPr id="2" name="TextBox 1"/>
@@ -3110,8 +3112,8 @@
         </p:nvSpPr>
         <p:spPr>
           <a:xfrm>
-            <a:off x="914400" y="1463040"/>
-            <a:ext cx="5486400" cy="365760"/>
+            <a:off x="914400" y="1320800"/>
+            <a:ext cx="5486400" cy="368300"/>
           </a:xfrm>
           <a:prstGeom prst="rect">
             <a:avLst/>
@@ -3119,20 +3121,27 @@
           <a:noFill/>
         </p:spPr>
         <p:txBody>
-          <a:bodyPr wrap="square">
+          <a:bodyPr wrap="square" lIns="0" rIns="0">
             <a:spAutoFit/>
           </a:bodyPr>
           <a:lstStyle/>
           <a:p>
             <a:pPr algn="l">
-              <a:defRPr sz="1300" b="0">
+              <a:defRPr sz="1300" b="0" spc="-13">
                 <a:solidFill>
                   <a:srgbClr val="666666"/>
                 </a:solidFill>
-                <a:latin typeface="Arial"/>
-              </a:defRPr>
-            </a:pPr>
-            <a:r>
+                <a:latin typeface="Pretendard"/>
+                <a:ea typeface="Pretendard"/>
+                <a:cs typeface="Pretendard"/>
+              </a:defRPr>
+            </a:pPr>
+            <a:r>
+              <a:rPr lang="ko-KR" spc="-13" dirty="0">
+                <a:latin typeface="Pretendard"/>
+                <a:ea typeface="Pretendard"/>
+                <a:cs typeface="Pretendard"/>
+              </a:rPr>
               <a:t>KAIST IMMS  ·  2026 Fall  ·  AI Business Strategy</a:t>
             </a:r>
           </a:p>
@@ -3146,8 +3155,8 @@
         </p:nvSpPr>
         <p:spPr>
           <a:xfrm>
-            <a:off x="914400" y="2103120"/>
-            <a:ext cx="9144000" cy="1097280"/>
+            <a:off x="914400" y="1854200"/>
+            <a:ext cx="9144000" cy="1778000"/>
           </a:xfrm>
           <a:prstGeom prst="rect">
             <a:avLst/>
@@ -3155,24 +3164,39 @@
           <a:noFill/>
         </p:spPr>
         <p:txBody>
-          <a:bodyPr wrap="square">
+          <a:bodyPr wrap="square" lIns="0" rIns="0">
             <a:spAutoFit/>
           </a:bodyPr>
           <a:lstStyle/>
           <a:p>
             <a:pPr algn="l">
-              <a:defRPr sz="5400" b="1">
+              <a:lnSpc>
+                <a:spcPct val="102000"/>
+              </a:lnSpc>
+              <a:defRPr sz="5400" b="1" spc="-135">
                 <a:solidFill>
                   <a:srgbClr val="F5F5F5"/>
                 </a:solidFill>
-                <a:latin typeface="Arial"/>
-              </a:defRPr>
-            </a:pPr>
-            <a:r>
+                <a:latin typeface="Pretendard"/>
+                <a:ea typeface="Pretendard"/>
+                <a:cs typeface="Pretendard"/>
+              </a:defRPr>
+            </a:pPr>
+            <a:r>
+              <a:rPr lang="ko-KR" spc="-135" dirty="0">
+                <a:latin typeface="Pretendard"/>
+                <a:ea typeface="Pretendard"/>
+                <a:cs typeface="Pretendard"/>
+              </a:rPr>
               <a:t>회의 이후를</a:t>
             </a:r>
             <a:br/>
             <a:r>
+              <a:rPr lang="ko-KR" spc="-135" dirty="0">
+                <a:latin typeface="Pretendard"/>
+                <a:ea typeface="Pretendard"/>
+                <a:cs typeface="Pretendard"/>
+              </a:rPr>
               <a:t>책임지는 AI</a:t>
             </a:r>
           </a:p>
@@ -3186,7 +3210,7 @@
         </p:nvSpPr>
         <p:spPr>
           <a:xfrm>
-            <a:off x="914400" y="4114800"/>
+            <a:off x="914400" y="3886200"/>
             <a:ext cx="7315200" cy="457200"/>
           </a:xfrm>
           <a:prstGeom prst="rect">
@@ -3195,20 +3219,27 @@
           <a:noFill/>
         </p:spPr>
         <p:txBody>
-          <a:bodyPr wrap="square">
+          <a:bodyPr wrap="square" lIns="0" rIns="0">
             <a:spAutoFit/>
           </a:bodyPr>
           <a:lstStyle/>
           <a:p>
             <a:pPr algn="l">
-              <a:defRPr sz="2400" b="1">
+              <a:defRPr sz="2400" b="1" spc="-60">
                 <a:solidFill>
                   <a:srgbClr val="4ADE80"/>
                 </a:solidFill>
-                <a:latin typeface="Arial"/>
-              </a:defRPr>
-            </a:pPr>
-            <a:r>
+                <a:latin typeface="Pretendard"/>
+                <a:ea typeface="Pretendard"/>
+                <a:cs typeface="Pretendard"/>
+              </a:defRPr>
+            </a:pPr>
+            <a:r>
+              <a:rPr lang="ko-KR" spc="-60" dirty="0">
+                <a:latin typeface="Pretendard"/>
+                <a:ea typeface="Pretendard"/>
+                <a:cs typeface="Pretendard"/>
+              </a:rPr>
               <a:t>FollowIt  ·  팔로잇</a:t>
             </a:r>
           </a:p>
@@ -3222,7 +3253,7 @@
         </p:nvSpPr>
         <p:spPr>
           <a:xfrm>
-            <a:off x="914400" y="4846320"/>
+            <a:off x="914400" y="4622800"/>
             <a:ext cx="2743200" cy="12700"/>
           </a:xfrm>
           <a:prstGeom prst="rect">
@@ -3255,6 +3286,11 @@
           <a:lstStyle/>
           <a:p>
             <a:pPr algn="ctr"/>
+            <a:endParaRPr spc="-27">
+              <a:latin typeface="Pretendard"/>
+              <a:ea typeface="Pretendard"/>
+              <a:cs typeface="Pretendard"/>
+            </a:endParaRPr>
           </a:p>
         </p:txBody>
       </p:sp>
@@ -3266,8 +3302,8 @@
         </p:nvSpPr>
         <p:spPr>
           <a:xfrm>
-            <a:off x="914400" y="5120640"/>
-            <a:ext cx="9601200" cy="548640"/>
+            <a:off x="914400" y="4876800"/>
+            <a:ext cx="9601200" cy="338554"/>
           </a:xfrm>
           <a:prstGeom prst="rect">
             <a:avLst/>
@@ -3275,21 +3311,76 @@
           <a:noFill/>
         </p:spPr>
         <p:txBody>
-          <a:bodyPr wrap="square">
+          <a:bodyPr wrap="square" lIns="0" rIns="0">
             <a:spAutoFit/>
           </a:bodyPr>
           <a:lstStyle/>
           <a:p>
             <a:pPr algn="l">
-              <a:defRPr sz="1600" b="0">
+              <a:defRPr sz="1600" b="0" spc="-24">
                 <a:solidFill>
                   <a:srgbClr val="999999"/>
                 </a:solidFill>
-                <a:latin typeface="Arial"/>
-              </a:defRPr>
-            </a:pPr>
-            <a:r>
-              <a:t>회의의 맥락을 기억하고, 다음 액션을 끝까지 챙기는 AI 비서 (follow + it)</a:t>
+                <a:latin typeface="Pretendard"/>
+                <a:ea typeface="Pretendard"/>
+                <a:cs typeface="Pretendard"/>
+              </a:defRPr>
+            </a:pPr>
+            <a:r>
+              <a:rPr lang="ko-KR" spc="-24" dirty="0">
+                <a:latin typeface="Pretendard"/>
+                <a:ea typeface="Pretendard"/>
+                <a:cs typeface="Pretendard"/>
+              </a:rPr>
+              <a:t>회의의 맥락을 기억하고, 다음 액션을 끝까지 챙기는 AI 비서 (</a:t>
+            </a:r>
+            <a:r>
+              <a:rPr lang="en-US" altLang="ko-KR" spc="-24" dirty="0">
+                <a:latin typeface="Pretendard"/>
+                <a:ea typeface="Pretendard"/>
+                <a:cs typeface="Pretendard"/>
+              </a:rPr>
+              <a:t>F</a:t>
+            </a:r>
+            <a:r>
+              <a:rPr lang="ko-KR" spc="-24" dirty="0" err="1">
+                <a:latin typeface="Pretendard"/>
+                <a:ea typeface="Pretendard"/>
+                <a:cs typeface="Pretendard"/>
+              </a:rPr>
+              <a:t>ollow</a:t>
+            </a:r>
+            <a:r>
+              <a:rPr lang="ko-KR" spc="-24" dirty="0">
+                <a:latin typeface="Pretendard"/>
+                <a:ea typeface="Pretendard"/>
+                <a:cs typeface="Pretendard"/>
+              </a:rPr>
+              <a:t> + </a:t>
+            </a:r>
+            <a:r>
+              <a:rPr lang="en-US" altLang="ko-KR" spc="-24" dirty="0">
+                <a:latin typeface="Pretendard"/>
+                <a:ea typeface="Pretendard"/>
+                <a:cs typeface="Pretendard"/>
+              </a:rPr>
+              <a:t>I</a:t>
+            </a:r>
+            <a:r>
+              <a:rPr lang="ko-KR" spc="-24" dirty="0" err="1">
+                <a:latin typeface="Pretendard"/>
+                <a:ea typeface="Pretendard"/>
+                <a:cs typeface="Pretendard"/>
+              </a:rPr>
+              <a:t>t</a:t>
+            </a:r>
+            <a:r>
+              <a:rPr lang="ko-KR" spc="-24" dirty="0">
+                <a:latin typeface="Pretendard"/>
+                <a:ea typeface="Pretendard"/>
+                <a:cs typeface="Pretendard"/>
+              </a:rPr>
+              <a:t>)</a:t>
             </a:r>
           </a:p>
         </p:txBody>
@@ -3302,8 +3393,8 @@
         </p:nvSpPr>
         <p:spPr>
           <a:xfrm>
-            <a:off x="914400" y="5943600"/>
-            <a:ext cx="9144000" cy="274320"/>
+            <a:off x="914400" y="5664200"/>
+            <a:ext cx="9144000" cy="279400"/>
           </a:xfrm>
           <a:prstGeom prst="rect">
             <a:avLst/>
@@ -3311,20 +3402,27 @@
           <a:noFill/>
         </p:spPr>
         <p:txBody>
-          <a:bodyPr wrap="square">
+          <a:bodyPr wrap="square" lIns="0" rIns="0">
             <a:spAutoFit/>
           </a:bodyPr>
           <a:lstStyle/>
           <a:p>
             <a:pPr algn="l">
-              <a:defRPr sz="1300" b="0">
+              <a:defRPr sz="1300" b="0" spc="-13">
                 <a:solidFill>
                   <a:srgbClr val="666666"/>
                 </a:solidFill>
-                <a:latin typeface="Arial"/>
-              </a:defRPr>
-            </a:pPr>
-            <a:r>
+                <a:latin typeface="Pretendard"/>
+                <a:ea typeface="Pretendard"/>
+                <a:cs typeface="Pretendard"/>
+              </a:defRPr>
+            </a:pPr>
+            <a:r>
+              <a:rPr lang="ko-KR" spc="-13" dirty="0">
+                <a:latin typeface="Pretendard"/>
+                <a:ea typeface="Pretendard"/>
+                <a:cs typeface="Pretendard"/>
+              </a:rPr>
               <a:t>TEAM_2 : 김신애 · 박승찬 · 신지엽 · 윤경혜</a:t>
             </a:r>
           </a:p>
@@ -3338,8 +3436,8 @@
         </p:nvSpPr>
         <p:spPr>
           <a:xfrm>
-            <a:off x="11430000" y="6446520"/>
-            <a:ext cx="548640" cy="274320"/>
+            <a:off x="10706100" y="6350000"/>
+            <a:ext cx="546100" cy="274320"/>
           </a:xfrm>
           <a:prstGeom prst="rect">
             <a:avLst/>
@@ -3347,26 +3445,38 @@
           <a:noFill/>
         </p:spPr>
         <p:txBody>
-          <a:bodyPr wrap="square">
+          <a:bodyPr wrap="square" lIns="0" rIns="0">
             <a:spAutoFit/>
           </a:bodyPr>
           <a:lstStyle/>
           <a:p>
             <a:pPr algn="r">
-              <a:defRPr sz="1000" b="0">
+              <a:defRPr sz="1000" b="0" spc="-10">
                 <a:solidFill>
                   <a:srgbClr val="666666"/>
                 </a:solidFill>
-                <a:latin typeface="Arial"/>
-              </a:defRPr>
-            </a:pPr>
-            <a:r>
+                <a:latin typeface="Pretendard"/>
+                <a:ea typeface="Pretendard"/>
+                <a:cs typeface="Pretendard"/>
+              </a:defRPr>
+            </a:pPr>
+            <a:r>
+              <a:rPr lang="ko-KR" spc="-10" dirty="0">
+                <a:latin typeface="Pretendard"/>
+                <a:ea typeface="Pretendard"/>
+                <a:cs typeface="Pretendard"/>
+              </a:rPr>
               <a:t>1</a:t>
             </a:r>
           </a:p>
         </p:txBody>
       </p:sp>
     </p:spTree>
+    <p:extLst>
+      <p:ext uri="{BB962C8B-B14F-4D97-AF65-F5344CB8AC3E}">
+        <p14:creationId xmlns:p14="http://schemas.microsoft.com/office/powerpoint/2010/main" val="3999305468"/>
+      </p:ext>
+    </p:extLst>
   </p:cSld>
   <p:clrMapOvr>
     <a:masterClrMapping/>
@@ -3375,7 +3485,7 @@
 </file>
 
 <file path=ppt/slides/slide2.xml><?xml version="1.0" encoding="utf-8"?>
-<p:sld xmlns:a="http://schemas.openxmlformats.org/drawingml/2006/main" xmlns:p="http://schemas.openxmlformats.org/presentationml/2006/main" xmlns:r="http://schemas.openxmlformats.org/officeDocument/2006/relationships">
+<p:sld xmlns:a="http://schemas.openxmlformats.org/drawingml/2006/main" xmlns:r="http://schemas.openxmlformats.org/officeDocument/2006/relationships" xmlns:p="http://schemas.openxmlformats.org/presentationml/2006/main">
   <p:cSld>
     <p:bg>
       <p:bgPr>
@@ -3391,7 +3501,14 @@
         <p:cNvGrpSpPr/>
         <p:nvPr/>
       </p:nvGrpSpPr>
-      <p:grpSpPr/>
+      <p:grpSpPr>
+        <a:xfrm>
+          <a:off x="0" y="0"/>
+          <a:ext cx="0" cy="0"/>
+          <a:chOff x="0" y="0"/>
+          <a:chExt cx="0" cy="0"/>
+        </a:xfrm>
+      </p:grpSpPr>
       <p:sp>
         <p:nvSpPr>
           <p:cNvPr id="2" name="Rounded Rectangle 1"/>
@@ -3403,7 +3520,7 @@
             <a:off x="914400" y="640080"/>
             <a:ext cx="736600" cy="355600"/>
           </a:xfrm>
-          <a:prstGeom prst="roundRect">
+          <a:prstGeom prst="rect">
             <a:avLst/>
           </a:prstGeom>
           <a:solidFill>
@@ -3429,18 +3546,25 @@
           </a:fontRef>
         </p:style>
         <p:txBody>
-          <a:bodyPr rtlCol="0" anchor="ctr" wrap="none" lIns="127000" rIns="127000" tIns="25400" bIns="25400"/>
+          <a:bodyPr wrap="none" lIns="127000" tIns="25400" rIns="127000" bIns="25400" rtlCol="0" anchor="ctr"/>
           <a:lstStyle/>
           <a:p>
             <a:pPr algn="ctr">
-              <a:defRPr sz="1100" b="1">
+              <a:defRPr sz="1100" b="1" spc="-11">
                 <a:solidFill>
                   <a:srgbClr val="0F0F0F"/>
                 </a:solidFill>
-                <a:latin typeface="Arial"/>
-              </a:defRPr>
-            </a:pPr>
-            <a:r>
+                <a:latin typeface="Pretendard"/>
+                <a:ea typeface="Pretendard"/>
+                <a:cs typeface="Pretendard"/>
+              </a:defRPr>
+            </a:pPr>
+            <a:r>
+              <a:rPr lang="ko-KR" spc="-11" dirty="0">
+                <a:latin typeface="Pretendard"/>
+                <a:ea typeface="Pretendard"/>
+                <a:cs typeface="Pretendard"/>
+              </a:rPr>
               <a:t>문제</a:t>
             </a:r>
           </a:p>
@@ -3463,20 +3587,27 @@
           <a:noFill/>
         </p:spPr>
         <p:txBody>
-          <a:bodyPr wrap="square">
+          <a:bodyPr wrap="square" lIns="0" rIns="0">
             <a:spAutoFit/>
           </a:bodyPr>
           <a:lstStyle/>
           <a:p>
             <a:pPr algn="l">
-              <a:defRPr sz="4000" b="1">
+              <a:defRPr sz="4000" b="1" spc="-100">
                 <a:solidFill>
                   <a:srgbClr val="F5F5F5"/>
                 </a:solidFill>
-                <a:latin typeface="Arial"/>
-              </a:defRPr>
-            </a:pPr>
-            <a:r>
+                <a:latin typeface="Pretendard"/>
+                <a:ea typeface="Pretendard"/>
+                <a:cs typeface="Pretendard"/>
+              </a:defRPr>
+            </a:pPr>
+            <a:r>
+              <a:rPr lang="ko-KR" spc="-100" dirty="0">
+                <a:latin typeface="Pretendard"/>
+                <a:ea typeface="Pretendard"/>
+                <a:cs typeface="Pretendard"/>
+              </a:rPr>
               <a:t>회의는 끝났는데, 일은 시작되지 않는다</a:t>
             </a:r>
           </a:p>
@@ -3490,10 +3621,10 @@
         </p:nvSpPr>
         <p:spPr>
           <a:xfrm>
-            <a:off x="914400" y="2560320"/>
-            <a:ext cx="4114800" cy="2194560"/>
-          </a:xfrm>
-          <a:prstGeom prst="roundRect">
+            <a:off x="914400" y="2565400"/>
+            <a:ext cx="4114800" cy="2197100"/>
+          </a:xfrm>
+          <a:prstGeom prst="rect">
             <a:avLst/>
           </a:prstGeom>
           <a:solidFill>
@@ -3523,6 +3654,11 @@
           <a:lstStyle/>
           <a:p>
             <a:pPr algn="ctr"/>
+            <a:endParaRPr spc="-27">
+              <a:latin typeface="Pretendard"/>
+              <a:ea typeface="Pretendard"/>
+              <a:cs typeface="Pretendard"/>
+            </a:endParaRPr>
           </a:p>
         </p:txBody>
       </p:sp>
@@ -3534,8 +3670,8 @@
         </p:nvSpPr>
         <p:spPr>
           <a:xfrm>
-            <a:off x="1371600" y="2743200"/>
-            <a:ext cx="3200400" cy="1097280"/>
+            <a:off x="1371600" y="2794000"/>
+            <a:ext cx="3302000" cy="1092200"/>
           </a:xfrm>
           <a:prstGeom prst="rect">
             <a:avLst/>
@@ -3543,20 +3679,27 @@
           <a:noFill/>
         </p:spPr>
         <p:txBody>
-          <a:bodyPr wrap="square">
-            <a:spAutoFit/>
+          <a:bodyPr wrap="square" lIns="0" tIns="0" rIns="0" bIns="0" anchor="b">
+            <a:noAutofit/>
           </a:bodyPr>
           <a:lstStyle/>
           <a:p>
             <a:pPr algn="l">
-              <a:defRPr sz="7200" b="1">
+              <a:defRPr sz="7200" b="1" spc="-180">
                 <a:solidFill>
                   <a:srgbClr val="FF6B4A"/>
                 </a:solidFill>
-                <a:latin typeface="Arial"/>
-              </a:defRPr>
-            </a:pPr>
-            <a:r>
+                <a:latin typeface="Pretendard"/>
+                <a:ea typeface="Pretendard"/>
+                <a:cs typeface="Pretendard"/>
+              </a:defRPr>
+            </a:pPr>
+            <a:r>
+              <a:rPr spc="-180" dirty="0">
+                <a:latin typeface="Pretendard"/>
+                <a:ea typeface="Pretendard"/>
+                <a:cs typeface="Pretendard"/>
+              </a:rPr>
               <a:t>54%</a:t>
             </a:r>
           </a:p>
@@ -3570,8 +3713,8 @@
         </p:nvSpPr>
         <p:spPr>
           <a:xfrm>
-            <a:off x="1371600" y="3931920"/>
-            <a:ext cx="3291840" cy="731520"/>
+            <a:off x="1371600" y="3962400"/>
+            <a:ext cx="3302000" cy="558800"/>
           </a:xfrm>
           <a:prstGeom prst="rect">
             <a:avLst/>
@@ -3579,24 +3722,39 @@
           <a:noFill/>
         </p:spPr>
         <p:txBody>
-          <a:bodyPr wrap="square">
-            <a:spAutoFit/>
+          <a:bodyPr wrap="square" lIns="0" tIns="0" rIns="0" bIns="0" anchor="t">
+            <a:noAutofit/>
           </a:bodyPr>
           <a:lstStyle/>
           <a:p>
             <a:pPr algn="l">
-              <a:defRPr sz="1400" b="0">
+              <a:lnSpc>
+                <a:spcPct val="140000"/>
+              </a:lnSpc>
+              <a:defRPr sz="1400" b="0" spc="-21">
                 <a:solidFill>
                   <a:srgbClr val="999999"/>
                 </a:solidFill>
-                <a:latin typeface="Arial"/>
-              </a:defRPr>
-            </a:pPr>
-            <a:r>
+                <a:latin typeface="Pretendard"/>
+                <a:ea typeface="Pretendard"/>
+                <a:cs typeface="Pretendard"/>
+              </a:defRPr>
+            </a:pPr>
+            <a:r>
+              <a:rPr lang="ko-KR" spc="-21" dirty="0">
+                <a:latin typeface="Pretendard"/>
+                <a:ea typeface="Pretendard"/>
+                <a:cs typeface="Pretendard"/>
+              </a:rPr>
               <a:t>회의 후 다음 할 일·담당자를 모른 채</a:t>
             </a:r>
             <a:br/>
             <a:r>
+              <a:rPr lang="ko-KR" spc="-21" dirty="0">
+                <a:latin typeface="Pretendard"/>
+                <a:ea typeface="Pretendard"/>
+                <a:cs typeface="Pretendard"/>
+              </a:rPr>
               <a:t>자리를 뜨는 직장인 비율¹</a:t>
             </a:r>
           </a:p>
@@ -3610,10 +3768,10 @@
         </p:nvSpPr>
         <p:spPr>
           <a:xfrm>
-            <a:off x="5669280" y="2560320"/>
-            <a:ext cx="5577840" cy="594360"/>
-          </a:xfrm>
-          <a:prstGeom prst="roundRect">
+            <a:off x="5664200" y="2565400"/>
+            <a:ext cx="5575300" cy="596900"/>
+          </a:xfrm>
+          <a:prstGeom prst="rect">
             <a:avLst/>
           </a:prstGeom>
           <a:solidFill>
@@ -3643,6 +3801,11 @@
           <a:lstStyle/>
           <a:p>
             <a:pPr algn="ctr"/>
+            <a:endParaRPr spc="-27">
+              <a:latin typeface="Pretendard"/>
+              <a:ea typeface="Pretendard"/>
+              <a:cs typeface="Pretendard"/>
+            </a:endParaRPr>
           </a:p>
         </p:txBody>
       </p:sp>
@@ -3654,8 +3817,8 @@
         </p:nvSpPr>
         <p:spPr>
           <a:xfrm>
-            <a:off x="6035040" y="2606040"/>
-            <a:ext cx="731520" cy="457200"/>
+            <a:off x="5969000" y="2565400"/>
+            <a:ext cx="304800" cy="596900"/>
           </a:xfrm>
           <a:prstGeom prst="rect">
             <a:avLst/>
@@ -3663,20 +3826,27 @@
           <a:noFill/>
         </p:spPr>
         <p:txBody>
-          <a:bodyPr wrap="square">
-            <a:spAutoFit/>
+          <a:bodyPr wrap="square" lIns="0" tIns="0" rIns="0" bIns="0" anchor="ctr">
+            <a:noAutofit/>
           </a:bodyPr>
           <a:lstStyle/>
           <a:p>
-            <a:pPr algn="l">
-              <a:defRPr sz="1800" b="1">
+            <a:pPr algn="ctr">
+              <a:defRPr sz="1800" b="1" spc="-27">
                 <a:solidFill>
                   <a:srgbClr val="FF6B4A"/>
                 </a:solidFill>
-                <a:latin typeface="Arial"/>
-              </a:defRPr>
-            </a:pPr>
-            <a:r>
+                <a:latin typeface="Pretendard"/>
+                <a:ea typeface="Pretendard"/>
+                <a:cs typeface="Pretendard"/>
+              </a:defRPr>
+            </a:pPr>
+            <a:r>
+              <a:rPr lang="ko-KR" spc="-27" dirty="0">
+                <a:latin typeface="Pretendard"/>
+                <a:ea typeface="Pretendard"/>
+                <a:cs typeface="Pretendard"/>
+              </a:rPr>
               <a:t>①</a:t>
             </a:r>
           </a:p>
@@ -3690,8 +3860,8 @@
         </p:nvSpPr>
         <p:spPr>
           <a:xfrm>
-            <a:off x="6583680" y="2606040"/>
-            <a:ext cx="4572000" cy="457200"/>
+            <a:off x="6451600" y="2565400"/>
+            <a:ext cx="4635500" cy="596900"/>
           </a:xfrm>
           <a:prstGeom prst="rect">
             <a:avLst/>
@@ -3699,21 +3869,124 @@
           <a:noFill/>
         </p:spPr>
         <p:txBody>
-          <a:bodyPr wrap="square">
-            <a:spAutoFit/>
+          <a:bodyPr wrap="square" lIns="0" tIns="0" rIns="0" bIns="0" anchor="ctr">
+            <a:noAutofit/>
           </a:bodyPr>
           <a:lstStyle/>
           <a:p>
             <a:pPr algn="l">
-              <a:defRPr sz="1500" b="0">
+              <a:defRPr sz="1500" b="0" spc="-23">
                 <a:solidFill>
                   <a:srgbClr val="F5F5F5"/>
                 </a:solidFill>
-                <a:latin typeface="Arial"/>
-              </a:defRPr>
-            </a:pPr>
-            <a:r>
-              <a:t>주인 불명확 — "그거 누가 하기로 했죠?"</a:t>
+                <a:latin typeface="Pretendard"/>
+                <a:ea typeface="Pretendard"/>
+                <a:cs typeface="Pretendard"/>
+              </a:defRPr>
+            </a:pPr>
+            <a:r>
+              <a:rPr lang="en-US" altLang="ko-KR" b="1" spc="-23" dirty="0">
+                <a:latin typeface="Pretendard"/>
+                <a:ea typeface="Pretendard"/>
+                <a:cs typeface="Pretendard"/>
+              </a:rPr>
+              <a:t>R&amp;R</a:t>
+            </a:r>
+            <a:r>
+              <a:rPr b="1" spc="-23" dirty="0">
+                <a:latin typeface="Pretendard"/>
+                <a:ea typeface="Pretendard"/>
+                <a:cs typeface="Pretendard"/>
+              </a:rPr>
+              <a:t> </a:t>
+            </a:r>
+            <a:r>
+              <a:rPr b="1" spc="-23" dirty="0" err="1">
+                <a:latin typeface="Pretendard"/>
+                <a:ea typeface="Pretendard"/>
+                <a:cs typeface="Pretendard"/>
+              </a:rPr>
+              <a:t>불명확</a:t>
+            </a:r>
+            <a:r>
+              <a:rPr b="1" spc="-23" dirty="0">
+                <a:latin typeface="Pretendard"/>
+                <a:ea typeface="Pretendard"/>
+                <a:cs typeface="Pretendard"/>
+              </a:rPr>
+              <a:t> </a:t>
+            </a:r>
+            <a:r>
+              <a:rPr spc="-23" dirty="0">
+                <a:latin typeface="Pretendard"/>
+                <a:ea typeface="Pretendard"/>
+                <a:cs typeface="Pretendard"/>
+              </a:rPr>
+              <a:t>— "</a:t>
+            </a:r>
+            <a:r>
+              <a:rPr spc="-23" dirty="0" err="1">
+                <a:latin typeface="Pretendard"/>
+                <a:ea typeface="Pretendard"/>
+                <a:cs typeface="Pretendard"/>
+              </a:rPr>
+              <a:t>그거</a:t>
+            </a:r>
+            <a:r>
+              <a:rPr spc="-23" dirty="0">
+                <a:latin typeface="Pretendard"/>
+                <a:ea typeface="Pretendard"/>
+                <a:cs typeface="Pretendard"/>
+              </a:rPr>
+              <a:t> </a:t>
+            </a:r>
+            <a:r>
+              <a:rPr spc="-23" dirty="0" err="1">
+                <a:latin typeface="Pretendard"/>
+                <a:ea typeface="Pretendard"/>
+                <a:cs typeface="Pretendard"/>
+              </a:rPr>
+              <a:t>누가</a:t>
+            </a:r>
+            <a:r>
+              <a:rPr spc="-23" dirty="0">
+                <a:latin typeface="Pretendard"/>
+                <a:ea typeface="Pretendard"/>
+                <a:cs typeface="Pretendard"/>
+              </a:rPr>
+              <a:t> </a:t>
+            </a:r>
+            <a:r>
+              <a:rPr spc="-23" dirty="0" err="1">
+                <a:latin typeface="Pretendard"/>
+                <a:ea typeface="Pretendard"/>
+                <a:cs typeface="Pretendard"/>
+              </a:rPr>
+              <a:t>하기로</a:t>
+            </a:r>
+            <a:r>
+              <a:rPr spc="-23" dirty="0">
+                <a:latin typeface="Pretendard"/>
+                <a:ea typeface="Pretendard"/>
+                <a:cs typeface="Pretendard"/>
+              </a:rPr>
+              <a:t> </a:t>
+            </a:r>
+            <a:r>
+              <a:rPr spc="-23" dirty="0" err="1">
+                <a:latin typeface="Pretendard"/>
+                <a:ea typeface="Pretendard"/>
+                <a:cs typeface="Pretendard"/>
+              </a:rPr>
+              <a:t>했죠</a:t>
+            </a:r>
+            <a:r>
+              <a:rPr spc="-23" dirty="0">
+                <a:latin typeface="Pretendard"/>
+                <a:ea typeface="Pretendard"/>
+                <a:cs typeface="Pretendard"/>
+              </a:rPr>
+              <a:t>?"</a:t>
             </a:r>
           </a:p>
         </p:txBody>
@@ -3726,10 +3999,10 @@
         </p:nvSpPr>
         <p:spPr>
           <a:xfrm>
-            <a:off x="5669280" y="3337560"/>
-            <a:ext cx="5577840" cy="594360"/>
-          </a:xfrm>
-          <a:prstGeom prst="roundRect">
+            <a:off x="5664200" y="3365500"/>
+            <a:ext cx="5575300" cy="596900"/>
+          </a:xfrm>
+          <a:prstGeom prst="rect">
             <a:avLst/>
           </a:prstGeom>
           <a:solidFill>
@@ -3759,6 +4032,11 @@
           <a:lstStyle/>
           <a:p>
             <a:pPr algn="ctr"/>
+            <a:endParaRPr spc="-27">
+              <a:latin typeface="Pretendard"/>
+              <a:ea typeface="Pretendard"/>
+              <a:cs typeface="Pretendard"/>
+            </a:endParaRPr>
           </a:p>
         </p:txBody>
       </p:sp>
@@ -3770,8 +4048,8 @@
         </p:nvSpPr>
         <p:spPr>
           <a:xfrm>
-            <a:off x="6035040" y="3383280"/>
-            <a:ext cx="731520" cy="457200"/>
+            <a:off x="5969000" y="3365500"/>
+            <a:ext cx="304800" cy="596900"/>
           </a:xfrm>
           <a:prstGeom prst="rect">
             <a:avLst/>
@@ -3779,20 +4057,27 @@
           <a:noFill/>
         </p:spPr>
         <p:txBody>
-          <a:bodyPr wrap="square">
-            <a:spAutoFit/>
+          <a:bodyPr wrap="square" lIns="0" tIns="0" rIns="0" bIns="0" anchor="ctr">
+            <a:noAutofit/>
           </a:bodyPr>
           <a:lstStyle/>
           <a:p>
-            <a:pPr algn="l">
-              <a:defRPr sz="1800" b="1">
+            <a:pPr algn="ctr">
+              <a:defRPr sz="1800" b="1" spc="-27">
                 <a:solidFill>
                   <a:srgbClr val="FF6B4A"/>
                 </a:solidFill>
-                <a:latin typeface="Arial"/>
-              </a:defRPr>
-            </a:pPr>
-            <a:r>
+                <a:latin typeface="Pretendard"/>
+                <a:ea typeface="Pretendard"/>
+                <a:cs typeface="Pretendard"/>
+              </a:defRPr>
+            </a:pPr>
+            <a:r>
+              <a:rPr lang="ko-KR" spc="-27" dirty="0">
+                <a:latin typeface="Pretendard"/>
+                <a:ea typeface="Pretendard"/>
+                <a:cs typeface="Pretendard"/>
+              </a:rPr>
               <a:t>②</a:t>
             </a:r>
           </a:p>
@@ -3806,8 +4091,8 @@
         </p:nvSpPr>
         <p:spPr>
           <a:xfrm>
-            <a:off x="6583680" y="3383280"/>
-            <a:ext cx="4572000" cy="457200"/>
+            <a:off x="6451600" y="3365500"/>
+            <a:ext cx="4635500" cy="596900"/>
           </a:xfrm>
           <a:prstGeom prst="rect">
             <a:avLst/>
@@ -3815,21 +4100,124 @@
           <a:noFill/>
         </p:spPr>
         <p:txBody>
-          <a:bodyPr wrap="square">
-            <a:spAutoFit/>
+          <a:bodyPr wrap="square" lIns="0" tIns="0" rIns="0" bIns="0" anchor="ctr">
+            <a:noAutofit/>
           </a:bodyPr>
           <a:lstStyle/>
           <a:p>
             <a:pPr algn="l">
-              <a:defRPr sz="1500" b="0">
+              <a:defRPr sz="1500" b="0" spc="-23">
                 <a:solidFill>
                   <a:srgbClr val="F5F5F5"/>
                 </a:solidFill>
-                <a:latin typeface="Arial"/>
-              </a:defRPr>
-            </a:pPr>
-            <a:r>
-              <a:t>기한 모호 — "다음 주쯤", "가능한 빨리"</a:t>
+                <a:latin typeface="Pretendard"/>
+                <a:ea typeface="Pretendard"/>
+                <a:cs typeface="Pretendard"/>
+              </a:defRPr>
+            </a:pPr>
+            <a:r>
+              <a:rPr b="1" spc="-23" dirty="0" err="1">
+                <a:latin typeface="Pretendard"/>
+                <a:ea typeface="Pretendard"/>
+                <a:cs typeface="Pretendard"/>
+              </a:rPr>
+              <a:t>기한</a:t>
+            </a:r>
+            <a:r>
+              <a:rPr b="1" spc="-23" dirty="0">
+                <a:latin typeface="Pretendard"/>
+                <a:ea typeface="Pretendard"/>
+                <a:cs typeface="Pretendard"/>
+              </a:rPr>
+              <a:t> </a:t>
+            </a:r>
+            <a:r>
+              <a:rPr b="1" spc="-23" dirty="0" err="1">
+                <a:latin typeface="Pretendard"/>
+                <a:ea typeface="Pretendard"/>
+                <a:cs typeface="Pretendard"/>
+              </a:rPr>
+              <a:t>모호</a:t>
+            </a:r>
+            <a:r>
+              <a:rPr b="1" spc="-23" dirty="0">
+                <a:latin typeface="Pretendard"/>
+                <a:ea typeface="Pretendard"/>
+                <a:cs typeface="Pretendard"/>
+              </a:rPr>
+              <a:t> </a:t>
+            </a:r>
+            <a:r>
+              <a:rPr spc="-23" dirty="0">
+                <a:latin typeface="Pretendard"/>
+                <a:ea typeface="Pretendard"/>
+                <a:cs typeface="Pretendard"/>
+              </a:rPr>
+              <a:t>— "</a:t>
+            </a:r>
+            <a:r>
+              <a:rPr spc="-23" dirty="0" err="1">
+                <a:latin typeface="Pretendard"/>
+                <a:ea typeface="Pretendard"/>
+                <a:cs typeface="Pretendard"/>
+              </a:rPr>
+              <a:t>다음</a:t>
+            </a:r>
+            <a:r>
+              <a:rPr spc="-23" dirty="0">
+                <a:latin typeface="Pretendard"/>
+                <a:ea typeface="Pretendard"/>
+                <a:cs typeface="Pretendard"/>
+              </a:rPr>
+              <a:t> </a:t>
+            </a:r>
+            <a:r>
+              <a:rPr spc="-23" dirty="0" err="1">
+                <a:latin typeface="Pretendard"/>
+                <a:ea typeface="Pretendard"/>
+                <a:cs typeface="Pretendard"/>
+              </a:rPr>
+              <a:t>주쯤</a:t>
+            </a:r>
+            <a:r>
+              <a:rPr spc="-23" dirty="0">
+                <a:latin typeface="Pretendard"/>
+                <a:ea typeface="Pretendard"/>
+                <a:cs typeface="Pretendard"/>
+              </a:rPr>
+              <a:t>", "</a:t>
+            </a:r>
+            <a:r>
+              <a:rPr spc="-23" dirty="0" err="1">
+                <a:latin typeface="Pretendard"/>
+                <a:ea typeface="Pretendard"/>
+                <a:cs typeface="Pretendard"/>
+              </a:rPr>
+              <a:t>가능한</a:t>
+            </a:r>
+            <a:r>
+              <a:rPr spc="-23" dirty="0">
+                <a:latin typeface="Pretendard"/>
+                <a:ea typeface="Pretendard"/>
+                <a:cs typeface="Pretendard"/>
+              </a:rPr>
+              <a:t> </a:t>
+            </a:r>
+            <a:r>
+              <a:rPr spc="-23" dirty="0" err="1">
+                <a:latin typeface="Pretendard"/>
+                <a:ea typeface="Pretendard"/>
+                <a:cs typeface="Pretendard"/>
+              </a:rPr>
+              <a:t>빨리</a:t>
+            </a:r>
+            <a:r>
+              <a:rPr spc="-23" dirty="0">
+                <a:latin typeface="Pretendard"/>
+                <a:ea typeface="Pretendard"/>
+                <a:cs typeface="Pretendard"/>
+              </a:rPr>
+              <a:t>"</a:t>
             </a:r>
           </a:p>
         </p:txBody>
@@ -3842,10 +4230,10 @@
         </p:nvSpPr>
         <p:spPr>
           <a:xfrm>
-            <a:off x="5669280" y="4114800"/>
-            <a:ext cx="5577840" cy="594360"/>
-          </a:xfrm>
-          <a:prstGeom prst="roundRect">
+            <a:off x="5664200" y="4165600"/>
+            <a:ext cx="5575300" cy="596900"/>
+          </a:xfrm>
+          <a:prstGeom prst="rect">
             <a:avLst/>
           </a:prstGeom>
           <a:solidFill>
@@ -3875,6 +4263,11 @@
           <a:lstStyle/>
           <a:p>
             <a:pPr algn="ctr"/>
+            <a:endParaRPr spc="-27">
+              <a:latin typeface="Pretendard"/>
+              <a:ea typeface="Pretendard"/>
+              <a:cs typeface="Pretendard"/>
+            </a:endParaRPr>
           </a:p>
         </p:txBody>
       </p:sp>
@@ -3886,8 +4279,8 @@
         </p:nvSpPr>
         <p:spPr>
           <a:xfrm>
-            <a:off x="6035040" y="4160520"/>
-            <a:ext cx="731520" cy="457200"/>
+            <a:off x="5969000" y="4165600"/>
+            <a:ext cx="304800" cy="596900"/>
           </a:xfrm>
           <a:prstGeom prst="rect">
             <a:avLst/>
@@ -3895,20 +4288,27 @@
           <a:noFill/>
         </p:spPr>
         <p:txBody>
-          <a:bodyPr wrap="square">
-            <a:spAutoFit/>
+          <a:bodyPr wrap="square" lIns="0" tIns="0" rIns="0" bIns="0" anchor="ctr">
+            <a:noAutofit/>
           </a:bodyPr>
           <a:lstStyle/>
           <a:p>
-            <a:pPr algn="l">
-              <a:defRPr sz="1800" b="1">
+            <a:pPr algn="ctr">
+              <a:defRPr sz="1800" b="1" spc="-27">
                 <a:solidFill>
                   <a:srgbClr val="FF6B4A"/>
                 </a:solidFill>
-                <a:latin typeface="Arial"/>
-              </a:defRPr>
-            </a:pPr>
-            <a:r>
+                <a:latin typeface="Pretendard"/>
+                <a:ea typeface="Pretendard"/>
+                <a:cs typeface="Pretendard"/>
+              </a:defRPr>
+            </a:pPr>
+            <a:r>
+              <a:rPr lang="ko-KR" spc="-27" dirty="0">
+                <a:latin typeface="Pretendard"/>
+                <a:ea typeface="Pretendard"/>
+                <a:cs typeface="Pretendard"/>
+              </a:rPr>
               <a:t>③</a:t>
             </a:r>
           </a:p>
@@ -3922,8 +4322,8 @@
         </p:nvSpPr>
         <p:spPr>
           <a:xfrm>
-            <a:off x="6583680" y="4160520"/>
-            <a:ext cx="4572000" cy="457200"/>
+            <a:off x="6451600" y="4165600"/>
+            <a:ext cx="4635500" cy="596900"/>
           </a:xfrm>
           <a:prstGeom prst="rect">
             <a:avLst/>
@@ -3931,22 +4331,130 @@
           <a:noFill/>
         </p:spPr>
         <p:txBody>
-          <a:bodyPr wrap="square">
-            <a:spAutoFit/>
+          <a:bodyPr wrap="square" lIns="0" tIns="0" rIns="0" bIns="0" anchor="ctr">
+            <a:noAutofit/>
           </a:bodyPr>
           <a:lstStyle/>
           <a:p>
             <a:pPr algn="l">
-              <a:defRPr sz="1500" b="0">
+              <a:defRPr sz="1500" b="0" spc="-23">
                 <a:solidFill>
                   <a:srgbClr val="F5F5F5"/>
                 </a:solidFill>
-                <a:latin typeface="Arial"/>
-              </a:defRPr>
-            </a:pPr>
-            <a:r>
-              <a:t>팔로업 부재 — 다음 회의에서 확인 없이 넘어감</a:t>
-            </a:r>
+                <a:latin typeface="Pretendard"/>
+                <a:ea typeface="Pretendard"/>
+                <a:cs typeface="Pretendard"/>
+              </a:defRPr>
+            </a:pPr>
+            <a:r>
+              <a:rPr lang="en-US" b="1" spc="-23" dirty="0">
+                <a:latin typeface="Pretendard"/>
+                <a:ea typeface="Pretendard"/>
+                <a:cs typeface="Pretendard"/>
+              </a:rPr>
+              <a:t>F/U</a:t>
+            </a:r>
+            <a:r>
+              <a:rPr b="1" spc="-23" dirty="0">
+                <a:latin typeface="Pretendard"/>
+                <a:ea typeface="Pretendard"/>
+                <a:cs typeface="Pretendard"/>
+              </a:rPr>
+              <a:t> </a:t>
+            </a:r>
+            <a:r>
+              <a:rPr b="1" spc="-23" dirty="0" err="1">
+                <a:latin typeface="Pretendard"/>
+                <a:ea typeface="Pretendard"/>
+                <a:cs typeface="Pretendard"/>
+              </a:rPr>
+              <a:t>부재</a:t>
+            </a:r>
+            <a:r>
+              <a:rPr spc="-23" dirty="0">
+                <a:latin typeface="Pretendard"/>
+                <a:ea typeface="Pretendard"/>
+                <a:cs typeface="Pretendard"/>
+              </a:rPr>
+              <a:t> — </a:t>
+            </a:r>
+            <a:r>
+              <a:rPr spc="-23" dirty="0" err="1">
+                <a:latin typeface="Pretendard"/>
+                <a:ea typeface="Pretendard"/>
+                <a:cs typeface="Pretendard"/>
+              </a:rPr>
+              <a:t>다음</a:t>
+            </a:r>
+            <a:r>
+              <a:rPr spc="-23" dirty="0">
+                <a:latin typeface="Pretendard"/>
+                <a:ea typeface="Pretendard"/>
+                <a:cs typeface="Pretendard"/>
+              </a:rPr>
+              <a:t> </a:t>
+            </a:r>
+            <a:r>
+              <a:rPr spc="-23" dirty="0" err="1">
+                <a:latin typeface="Pretendard"/>
+                <a:ea typeface="Pretendard"/>
+                <a:cs typeface="Pretendard"/>
+              </a:rPr>
+              <a:t>회의에서</a:t>
+            </a:r>
+            <a:r>
+              <a:rPr spc="-23" dirty="0">
+                <a:latin typeface="Pretendard"/>
+                <a:ea typeface="Pretendard"/>
+                <a:cs typeface="Pretendard"/>
+              </a:rPr>
+              <a:t> </a:t>
+            </a:r>
+            <a:r>
+              <a:rPr spc="-23" dirty="0" err="1">
+                <a:latin typeface="Pretendard"/>
+                <a:ea typeface="Pretendard"/>
+                <a:cs typeface="Pretendard"/>
+              </a:rPr>
+              <a:t>확인</a:t>
+            </a:r>
+            <a:r>
+              <a:rPr spc="-23" dirty="0">
+                <a:latin typeface="Pretendard"/>
+                <a:ea typeface="Pretendard"/>
+                <a:cs typeface="Pretendard"/>
+              </a:rPr>
+              <a:t> </a:t>
+            </a:r>
+            <a:r>
+              <a:rPr spc="-23" dirty="0" err="1">
+                <a:latin typeface="Pretendard"/>
+                <a:ea typeface="Pretendard"/>
+                <a:cs typeface="Pretendard"/>
+              </a:rPr>
+              <a:t>없이</a:t>
+            </a:r>
+            <a:r>
+              <a:rPr spc="-23" dirty="0">
+                <a:latin typeface="Pretendard"/>
+                <a:ea typeface="Pretendard"/>
+                <a:cs typeface="Pretendard"/>
+              </a:rPr>
+              <a:t> </a:t>
+            </a:r>
+            <a:r>
+              <a:rPr spc="-23" dirty="0" err="1">
+                <a:latin typeface="Pretendard"/>
+                <a:ea typeface="Pretendard"/>
+                <a:cs typeface="Pretendard"/>
+              </a:rPr>
+              <a:t>넘어감</a:t>
+            </a:r>
+            <a:endParaRPr spc="-23" dirty="0">
+              <a:latin typeface="Pretendard"/>
+              <a:ea typeface="Pretendard"/>
+              <a:cs typeface="Pretendard"/>
+            </a:endParaRPr>
           </a:p>
         </p:txBody>
       </p:sp>
@@ -3958,7 +4466,7 @@
         </p:nvSpPr>
         <p:spPr>
           <a:xfrm>
-            <a:off x="914400" y="5303520"/>
+            <a:off x="914400" y="5156200"/>
             <a:ext cx="10332720" cy="12700"/>
           </a:xfrm>
           <a:prstGeom prst="rect">
@@ -3991,6 +4499,11 @@
           <a:lstStyle/>
           <a:p>
             <a:pPr algn="ctr"/>
+            <a:endParaRPr spc="-27">
+              <a:latin typeface="Pretendard"/>
+              <a:ea typeface="Pretendard"/>
+              <a:cs typeface="Pretendard"/>
+            </a:endParaRPr>
           </a:p>
         </p:txBody>
       </p:sp>
@@ -4002,8 +4515,8 @@
         </p:nvSpPr>
         <p:spPr>
           <a:xfrm>
-            <a:off x="914400" y="5532120"/>
-            <a:ext cx="10058400" cy="548640"/>
+            <a:off x="914400" y="5359400"/>
+            <a:ext cx="10058400" cy="609600"/>
           </a:xfrm>
           <a:prstGeom prst="rect">
             <a:avLst/>
@@ -4011,24 +4524,39 @@
           <a:noFill/>
         </p:spPr>
         <p:txBody>
-          <a:bodyPr wrap="square">
+          <a:bodyPr wrap="square" lIns="0" rIns="0">
             <a:spAutoFit/>
           </a:bodyPr>
           <a:lstStyle/>
           <a:p>
             <a:pPr algn="l">
-              <a:defRPr sz="1500" b="0">
+              <a:lnSpc>
+                <a:spcPct val="135000"/>
+              </a:lnSpc>
+              <a:defRPr sz="1500" b="0" spc="-23">
                 <a:solidFill>
                   <a:srgbClr val="999999"/>
                 </a:solidFill>
-                <a:latin typeface="Arial"/>
-              </a:defRPr>
-            </a:pPr>
-            <a:r>
+                <a:latin typeface="Pretendard"/>
+                <a:ea typeface="Pretendard"/>
+                <a:cs typeface="Pretendard"/>
+              </a:defRPr>
+            </a:pPr>
+            <a:r>
+              <a:rPr lang="ko-KR" spc="-23" dirty="0">
+                <a:latin typeface="Pretendard"/>
+                <a:ea typeface="Pretendard"/>
+                <a:cs typeface="Pretendard"/>
+              </a:rPr>
               <a:t>PM이 회의록 정리 → 태스크 등록 → 진행 확인을 수작업으로 하고 있습니다.</a:t>
             </a:r>
             <a:br/>
             <a:r>
+              <a:rPr lang="ko-KR" spc="-23" dirty="0">
+                <a:latin typeface="Pretendard"/>
+                <a:ea typeface="Pretendard"/>
+                <a:cs typeface="Pretendard"/>
+              </a:rPr>
               <a:t>이 일이 누락되는 순간, 결정사항은 사라집니다.</a:t>
             </a:r>
           </a:p>
@@ -4042,8 +4570,8 @@
         </p:nvSpPr>
         <p:spPr>
           <a:xfrm>
-            <a:off x="914400" y="6263640"/>
-            <a:ext cx="7315200" cy="274320"/>
+            <a:off x="914400" y="6197600"/>
+            <a:ext cx="7315200" cy="254000"/>
           </a:xfrm>
           <a:prstGeom prst="rect">
             <a:avLst/>
@@ -4051,20 +4579,27 @@
           <a:noFill/>
         </p:spPr>
         <p:txBody>
-          <a:bodyPr wrap="square">
+          <a:bodyPr wrap="square" lIns="0" rIns="0">
             <a:spAutoFit/>
           </a:bodyPr>
           <a:lstStyle/>
           <a:p>
             <a:pPr algn="l">
-              <a:defRPr sz="1000" b="0">
+              <a:defRPr sz="1000" b="0" spc="-10">
                 <a:solidFill>
                   <a:srgbClr val="666666"/>
                 </a:solidFill>
-                <a:latin typeface="Arial"/>
-              </a:defRPr>
-            </a:pPr>
-            <a:r>
+                <a:latin typeface="Pretendard"/>
+                <a:ea typeface="Pretendard"/>
+                <a:cs typeface="Pretendard"/>
+              </a:defRPr>
+            </a:pPr>
+            <a:r>
+              <a:rPr lang="ko-KR" spc="-10" dirty="0">
+                <a:latin typeface="Pretendard"/>
+                <a:ea typeface="Pretendard"/>
+                <a:cs typeface="Pretendard"/>
+              </a:rPr>
               <a:t>1. Source: Atlassian, 지식근로자 5,000명 대상 설문 (2024)</a:t>
             </a:r>
           </a:p>
@@ -4078,8 +4613,8 @@
         </p:nvSpPr>
         <p:spPr>
           <a:xfrm>
-            <a:off x="11430000" y="6446520"/>
-            <a:ext cx="548640" cy="274320"/>
+            <a:off x="10706100" y="6350000"/>
+            <a:ext cx="546100" cy="274320"/>
           </a:xfrm>
           <a:prstGeom prst="rect">
             <a:avLst/>
@@ -4087,26 +4622,38 @@
           <a:noFill/>
         </p:spPr>
         <p:txBody>
-          <a:bodyPr wrap="square">
+          <a:bodyPr wrap="square" lIns="0" rIns="0">
             <a:spAutoFit/>
           </a:bodyPr>
           <a:lstStyle/>
           <a:p>
             <a:pPr algn="r">
-              <a:defRPr sz="1000" b="0">
+              <a:defRPr sz="1000" b="0" spc="-10">
                 <a:solidFill>
                   <a:srgbClr val="666666"/>
                 </a:solidFill>
-                <a:latin typeface="Arial"/>
-              </a:defRPr>
-            </a:pPr>
-            <a:r>
+                <a:latin typeface="Pretendard"/>
+                <a:ea typeface="Pretendard"/>
+                <a:cs typeface="Pretendard"/>
+              </a:defRPr>
+            </a:pPr>
+            <a:r>
+              <a:rPr lang="ko-KR" spc="-10" dirty="0">
+                <a:latin typeface="Pretendard"/>
+                <a:ea typeface="Pretendard"/>
+                <a:cs typeface="Pretendard"/>
+              </a:rPr>
               <a:t>2</a:t>
             </a:r>
           </a:p>
         </p:txBody>
       </p:sp>
     </p:spTree>
+    <p:extLst>
+      <p:ext uri="{BB962C8B-B14F-4D97-AF65-F5344CB8AC3E}">
+        <p14:creationId xmlns:p14="http://schemas.microsoft.com/office/powerpoint/2010/main" val="2783102520"/>
+      </p:ext>
+    </p:extLst>
   </p:cSld>
   <p:clrMapOvr>
     <a:masterClrMapping/>
@@ -4115,7 +4662,7 @@
 </file>
 
 <file path=ppt/slides/slide3.xml><?xml version="1.0" encoding="utf-8"?>
-<p:sld xmlns:a="http://schemas.openxmlformats.org/drawingml/2006/main" xmlns:p="http://schemas.openxmlformats.org/presentationml/2006/main" xmlns:r="http://schemas.openxmlformats.org/officeDocument/2006/relationships">
+<p:sld xmlns:a="http://schemas.openxmlformats.org/drawingml/2006/main" xmlns:r="http://schemas.openxmlformats.org/officeDocument/2006/relationships" xmlns:p="http://schemas.openxmlformats.org/presentationml/2006/main">
   <p:cSld>
     <p:bg>
       <p:bgPr>
@@ -4131,7 +4678,14 @@
         <p:cNvGrpSpPr/>
         <p:nvPr/>
       </p:nvGrpSpPr>
-      <p:grpSpPr/>
+      <p:grpSpPr>
+        <a:xfrm>
+          <a:off x="0" y="0"/>
+          <a:ext cx="0" cy="0"/>
+          <a:chOff x="0" y="0"/>
+          <a:chExt cx="0" cy="0"/>
+        </a:xfrm>
+      </p:grpSpPr>
       <p:sp>
         <p:nvSpPr>
           <p:cNvPr id="2" name="Rounded Rectangle 1"/>
@@ -4143,7 +4697,7 @@
             <a:off x="914400" y="640080"/>
             <a:ext cx="736600" cy="355600"/>
           </a:xfrm>
-          <a:prstGeom prst="roundRect">
+          <a:prstGeom prst="rect">
             <a:avLst/>
           </a:prstGeom>
           <a:solidFill>
@@ -4169,18 +4723,25 @@
           </a:fontRef>
         </p:style>
         <p:txBody>
-          <a:bodyPr rtlCol="0" anchor="ctr" wrap="none" lIns="127000" rIns="127000" tIns="25400" bIns="25400"/>
+          <a:bodyPr wrap="none" lIns="127000" tIns="25400" rIns="127000" bIns="25400" rtlCol="0" anchor="ctr"/>
           <a:lstStyle/>
           <a:p>
             <a:pPr algn="ctr">
-              <a:defRPr sz="1100" b="1">
+              <a:defRPr sz="1100" b="1" spc="-11">
                 <a:solidFill>
                   <a:srgbClr val="0F0F0F"/>
                 </a:solidFill>
-                <a:latin typeface="Arial"/>
-              </a:defRPr>
-            </a:pPr>
-            <a:r>
+                <a:latin typeface="Pretendard"/>
+                <a:ea typeface="Pretendard"/>
+                <a:cs typeface="Pretendard"/>
+              </a:defRPr>
+            </a:pPr>
+            <a:r>
+              <a:rPr lang="ko-KR" spc="-11" dirty="0">
+                <a:latin typeface="Pretendard"/>
+                <a:ea typeface="Pretendard"/>
+                <a:cs typeface="Pretendard"/>
+              </a:rPr>
               <a:t>문제</a:t>
             </a:r>
           </a:p>
@@ -4203,20 +4764,27 @@
           <a:noFill/>
         </p:spPr>
         <p:txBody>
-          <a:bodyPr wrap="square">
+          <a:bodyPr wrap="square" lIns="0" rIns="0">
             <a:spAutoFit/>
           </a:bodyPr>
           <a:lstStyle/>
           <a:p>
             <a:pPr algn="l">
-              <a:defRPr sz="4000" b="1">
+              <a:defRPr sz="4000" b="1" spc="-100">
                 <a:solidFill>
                   <a:srgbClr val="F5F5F5"/>
                 </a:solidFill>
-                <a:latin typeface="Arial"/>
-              </a:defRPr>
-            </a:pPr>
-            <a:r>
+                <a:latin typeface="Pretendard"/>
+                <a:ea typeface="Pretendard"/>
+                <a:cs typeface="Pretendard"/>
+              </a:defRPr>
+            </a:pPr>
+            <a:r>
+              <a:rPr lang="ko-KR" spc="-100" dirty="0">
+                <a:latin typeface="Pretendard"/>
+                <a:ea typeface="Pretendard"/>
+                <a:cs typeface="Pretendard"/>
+              </a:rPr>
               <a:t>기존 회의 AI는 '등록'에서 멈춘다</a:t>
             </a:r>
           </a:p>
@@ -4233,7 +4801,7 @@
             <a:off x="914400" y="2286000"/>
             <a:ext cx="5029200" cy="3108960"/>
           </a:xfrm>
-          <a:prstGeom prst="roundRect">
+          <a:prstGeom prst="rect">
             <a:avLst/>
           </a:prstGeom>
           <a:solidFill>
@@ -4263,6 +4831,11 @@
           <a:lstStyle/>
           <a:p>
             <a:pPr algn="ctr"/>
+            <a:endParaRPr spc="-27">
+              <a:latin typeface="Pretendard"/>
+              <a:ea typeface="Pretendard"/>
+              <a:cs typeface="Pretendard"/>
+            </a:endParaRPr>
           </a:p>
         </p:txBody>
       </p:sp>
@@ -4274,7 +4847,7 @@
         </p:nvSpPr>
         <p:spPr>
           <a:xfrm>
-            <a:off x="1280160" y="2423160"/>
+            <a:off x="1280160" y="2480310"/>
             <a:ext cx="4114800" cy="365760"/>
           </a:xfrm>
           <a:prstGeom prst="rect">
@@ -4283,20 +4856,27 @@
           <a:noFill/>
         </p:spPr>
         <p:txBody>
-          <a:bodyPr wrap="square">
+          <a:bodyPr wrap="square" lIns="0" rIns="0">
             <a:spAutoFit/>
           </a:bodyPr>
           <a:lstStyle/>
           <a:p>
             <a:pPr algn="l">
-              <a:defRPr sz="1400" b="0">
+              <a:defRPr sz="1400" b="1" spc="-21">
                 <a:solidFill>
                   <a:srgbClr val="FF6B4A"/>
                 </a:solidFill>
-                <a:latin typeface="Arial"/>
-              </a:defRPr>
-            </a:pPr>
-            <a:r>
+                <a:latin typeface="Pretendard"/>
+                <a:ea typeface="Pretendard"/>
+                <a:cs typeface="Pretendard"/>
+              </a:defRPr>
+            </a:pPr>
+            <a:r>
+              <a:rPr lang="ko-KR" b="1" spc="-21" dirty="0">
+                <a:latin typeface="Pretendard"/>
+                <a:ea typeface="Pretendard"/>
+                <a:cs typeface="Pretendard"/>
+              </a:rPr>
               <a:t>Circleback · Otter · 클로바노트 등</a:t>
             </a:r>
           </a:p>
@@ -4343,6 +4923,11 @@
           <a:lstStyle/>
           <a:p>
             <a:pPr algn="ctr"/>
+            <a:endParaRPr spc="-27">
+              <a:latin typeface="Pretendard"/>
+              <a:ea typeface="Pretendard"/>
+              <a:cs typeface="Pretendard"/>
+            </a:endParaRPr>
           </a:p>
         </p:txBody>
       </p:sp>
@@ -4354,8 +4939,8 @@
         </p:nvSpPr>
         <p:spPr>
           <a:xfrm>
-            <a:off x="1371600" y="3127248"/>
-            <a:ext cx="3200400" cy="320040"/>
+            <a:off x="1282700" y="3086100"/>
+            <a:ext cx="3810000" cy="320040"/>
           </a:xfrm>
           <a:prstGeom prst="rect">
             <a:avLst/>
@@ -4363,35 +4948,47 @@
           <a:noFill/>
         </p:spPr>
         <p:txBody>
-          <a:bodyPr wrap="square">
+          <a:bodyPr wrap="square" lIns="0" rIns="0">
             <a:spAutoFit/>
           </a:bodyPr>
           <a:lstStyle/>
           <a:p>
             <a:pPr algn="l">
-              <a:defRPr sz="1400" b="0">
+              <a:defRPr sz="1400" b="0" spc="-21">
                 <a:solidFill>
                   <a:srgbClr val="F5F5F5"/>
                 </a:solidFill>
-                <a:latin typeface="Arial"/>
-              </a:defRPr>
-            </a:pPr>
-            <a:r>
-              <a:t>녹음 → 전사</a:t>
-            </a:r>
-          </a:p>
-        </p:txBody>
-      </p:sp>
-      <p:sp>
-        <p:nvSpPr>
-          <p:cNvPr id="8" name="TextBox 7"/>
+                <a:latin typeface="Pretendard"/>
+                <a:ea typeface="Pretendard"/>
+                <a:cs typeface="Pretendard"/>
+              </a:defRPr>
+            </a:pPr>
+            <a:r>
+              <a:rPr spc="-21" dirty="0" err="1">
+                <a:latin typeface="Pretendard"/>
+                <a:ea typeface="Pretendard"/>
+                <a:cs typeface="Pretendard"/>
+              </a:rPr>
+              <a:t>녹음</a:t>
+            </a:r>
+            <a:endParaRPr spc="-21" dirty="0">
+              <a:latin typeface="Pretendard"/>
+              <a:ea typeface="Pretendard"/>
+              <a:cs typeface="Pretendard"/>
+            </a:endParaRPr>
+          </a:p>
+        </p:txBody>
+      </p:sp>
+      <p:sp>
+        <p:nvSpPr>
+          <p:cNvPr id="9" name="TextBox 8"/>
           <p:cNvSpPr txBox="1"/>
           <p:nvPr/>
         </p:nvSpPr>
         <p:spPr>
           <a:xfrm>
-            <a:off x="4754880" y="3127248"/>
-            <a:ext cx="731520" cy="320040"/>
+            <a:off x="1282700" y="3467100"/>
+            <a:ext cx="3810000" cy="320040"/>
           </a:xfrm>
           <a:prstGeom prst="rect">
             <a:avLst/>
@@ -4399,35 +4996,42 @@
           <a:noFill/>
         </p:spPr>
         <p:txBody>
-          <a:bodyPr wrap="square">
+          <a:bodyPr wrap="square" lIns="0" rIns="0">
             <a:spAutoFit/>
           </a:bodyPr>
           <a:lstStyle/>
           <a:p>
             <a:pPr algn="l">
-              <a:defRPr sz="1400" b="0">
-                <a:solidFill>
-                  <a:srgbClr val="4ADE80"/>
-                </a:solidFill>
-                <a:latin typeface="Arial"/>
-              </a:defRPr>
-            </a:pPr>
-            <a:r>
-              <a:t>✅</a:t>
-            </a:r>
-          </a:p>
-        </p:txBody>
-      </p:sp>
-      <p:sp>
-        <p:nvSpPr>
-          <p:cNvPr id="9" name="TextBox 8"/>
+              <a:defRPr sz="1400" b="0" spc="-21">
+                <a:solidFill>
+                  <a:srgbClr val="F5F5F5"/>
+                </a:solidFill>
+                <a:latin typeface="Pretendard"/>
+                <a:ea typeface="Pretendard"/>
+                <a:cs typeface="Pretendard"/>
+              </a:defRPr>
+            </a:pPr>
+            <a:r>
+              <a:rPr lang="ko-KR" spc="-21" dirty="0">
+                <a:latin typeface="Pretendard"/>
+                <a:ea typeface="Pretendard"/>
+                <a:cs typeface="Pretendard"/>
+              </a:rPr>
+              <a:t>AI 요약</a:t>
+            </a:r>
+          </a:p>
+        </p:txBody>
+      </p:sp>
+      <p:sp>
+        <p:nvSpPr>
+          <p:cNvPr id="11" name="TextBox 10"/>
           <p:cNvSpPr txBox="1"/>
           <p:nvPr/>
         </p:nvSpPr>
         <p:spPr>
           <a:xfrm>
-            <a:off x="1371600" y="3511296"/>
-            <a:ext cx="3200400" cy="320040"/>
+            <a:off x="1282700" y="3835400"/>
+            <a:ext cx="3810000" cy="320040"/>
           </a:xfrm>
           <a:prstGeom prst="rect">
             <a:avLst/>
@@ -4435,35 +5039,42 @@
           <a:noFill/>
         </p:spPr>
         <p:txBody>
-          <a:bodyPr wrap="square">
+          <a:bodyPr wrap="square" lIns="0" rIns="0">
             <a:spAutoFit/>
           </a:bodyPr>
           <a:lstStyle/>
           <a:p>
             <a:pPr algn="l">
-              <a:defRPr sz="1400" b="0">
+              <a:defRPr sz="1400" b="0" spc="-21">
                 <a:solidFill>
                   <a:srgbClr val="F5F5F5"/>
                 </a:solidFill>
-                <a:latin typeface="Arial"/>
-              </a:defRPr>
-            </a:pPr>
-            <a:r>
-              <a:t>AI 요약</a:t>
-            </a:r>
-          </a:p>
-        </p:txBody>
-      </p:sp>
-      <p:sp>
-        <p:nvSpPr>
-          <p:cNvPr id="10" name="TextBox 9"/>
+                <a:latin typeface="Pretendard"/>
+                <a:ea typeface="Pretendard"/>
+                <a:cs typeface="Pretendard"/>
+              </a:defRPr>
+            </a:pPr>
+            <a:r>
+              <a:rPr lang="ko-KR" spc="-21" dirty="0">
+                <a:latin typeface="Pretendard"/>
+                <a:ea typeface="Pretendard"/>
+                <a:cs typeface="Pretendard"/>
+              </a:rPr>
+              <a:t>액션아이템 추출</a:t>
+            </a:r>
+          </a:p>
+        </p:txBody>
+      </p:sp>
+      <p:sp>
+        <p:nvSpPr>
+          <p:cNvPr id="13" name="TextBox 12"/>
           <p:cNvSpPr txBox="1"/>
           <p:nvPr/>
         </p:nvSpPr>
         <p:spPr>
           <a:xfrm>
-            <a:off x="4754880" y="3511296"/>
-            <a:ext cx="731520" cy="320040"/>
+            <a:off x="1282700" y="4216400"/>
+            <a:ext cx="3810000" cy="320040"/>
           </a:xfrm>
           <a:prstGeom prst="rect">
             <a:avLst/>
@@ -4471,35 +5082,42 @@
           <a:noFill/>
         </p:spPr>
         <p:txBody>
-          <a:bodyPr wrap="square">
+          <a:bodyPr wrap="square" lIns="0" rIns="0">
             <a:spAutoFit/>
           </a:bodyPr>
           <a:lstStyle/>
           <a:p>
             <a:pPr algn="l">
-              <a:defRPr sz="1400" b="0">
-                <a:solidFill>
-                  <a:srgbClr val="4ADE80"/>
-                </a:solidFill>
-                <a:latin typeface="Arial"/>
-              </a:defRPr>
-            </a:pPr>
-            <a:r>
-              <a:t>✅</a:t>
-            </a:r>
-          </a:p>
-        </p:txBody>
-      </p:sp>
-      <p:sp>
-        <p:nvSpPr>
-          <p:cNvPr id="11" name="TextBox 10"/>
+              <a:defRPr sz="1400" b="0" spc="-21">
+                <a:solidFill>
+                  <a:srgbClr val="F5F5F5"/>
+                </a:solidFill>
+                <a:latin typeface="Pretendard"/>
+                <a:ea typeface="Pretendard"/>
+                <a:cs typeface="Pretendard"/>
+              </a:defRPr>
+            </a:pPr>
+            <a:r>
+              <a:rPr lang="ko-KR" spc="-21" dirty="0">
+                <a:latin typeface="Pretendard"/>
+                <a:ea typeface="Pretendard"/>
+                <a:cs typeface="Pretendard"/>
+              </a:rPr>
+              <a:t>태스크 등록</a:t>
+            </a:r>
+          </a:p>
+        </p:txBody>
+      </p:sp>
+      <p:sp>
+        <p:nvSpPr>
+          <p:cNvPr id="15" name="TextBox 14"/>
           <p:cNvSpPr txBox="1"/>
           <p:nvPr/>
         </p:nvSpPr>
         <p:spPr>
           <a:xfrm>
-            <a:off x="1371600" y="3895344"/>
-            <a:ext cx="3200400" cy="320040"/>
+            <a:off x="1600200" y="4724762"/>
+            <a:ext cx="3657600" cy="320040"/>
           </a:xfrm>
           <a:prstGeom prst="rect">
             <a:avLst/>
@@ -4507,165 +5125,60 @@
           <a:noFill/>
         </p:spPr>
         <p:txBody>
-          <a:bodyPr wrap="square">
+          <a:bodyPr wrap="square" lIns="0" rIns="0">
             <a:spAutoFit/>
           </a:bodyPr>
           <a:lstStyle/>
           <a:p>
-            <a:pPr algn="l">
-              <a:defRPr sz="1400" b="0">
-                <a:solidFill>
-                  <a:srgbClr val="F5F5F5"/>
-                </a:solidFill>
-                <a:latin typeface="Arial"/>
-              </a:defRPr>
-            </a:pPr>
-            <a:r>
-              <a:t>액션아이템 추출</a:t>
-            </a:r>
-          </a:p>
-        </p:txBody>
-      </p:sp>
-      <p:sp>
-        <p:nvSpPr>
-          <p:cNvPr id="12" name="TextBox 11"/>
-          <p:cNvSpPr txBox="1"/>
-          <p:nvPr/>
-        </p:nvSpPr>
-        <p:spPr>
-          <a:xfrm>
-            <a:off x="4754880" y="3895344"/>
-            <a:ext cx="731520" cy="320040"/>
-          </a:xfrm>
-          <a:prstGeom prst="rect">
-            <a:avLst/>
-          </a:prstGeom>
-          <a:noFill/>
-        </p:spPr>
-        <p:txBody>
-          <a:bodyPr wrap="square">
-            <a:spAutoFit/>
-          </a:bodyPr>
-          <a:lstStyle/>
-          <a:p>
-            <a:pPr algn="l">
-              <a:defRPr sz="1400" b="0">
-                <a:solidFill>
-                  <a:srgbClr val="4ADE80"/>
-                </a:solidFill>
-                <a:latin typeface="Arial"/>
-              </a:defRPr>
-            </a:pPr>
-            <a:r>
-              <a:t>✅</a:t>
-            </a:r>
-          </a:p>
-        </p:txBody>
-      </p:sp>
-      <p:sp>
-        <p:nvSpPr>
-          <p:cNvPr id="13" name="TextBox 12"/>
-          <p:cNvSpPr txBox="1"/>
-          <p:nvPr/>
-        </p:nvSpPr>
-        <p:spPr>
-          <a:xfrm>
-            <a:off x="1371600" y="4279392"/>
-            <a:ext cx="3200400" cy="320040"/>
-          </a:xfrm>
-          <a:prstGeom prst="rect">
-            <a:avLst/>
-          </a:prstGeom>
-          <a:noFill/>
-        </p:spPr>
-        <p:txBody>
-          <a:bodyPr wrap="square">
-            <a:spAutoFit/>
-          </a:bodyPr>
-          <a:lstStyle/>
-          <a:p>
-            <a:pPr algn="l">
-              <a:defRPr sz="1400" b="0">
-                <a:solidFill>
-                  <a:srgbClr val="F5F5F5"/>
-                </a:solidFill>
-                <a:latin typeface="Arial"/>
-              </a:defRPr>
-            </a:pPr>
-            <a:r>
-              <a:t>태스크 등록</a:t>
-            </a:r>
-          </a:p>
-        </p:txBody>
-      </p:sp>
-      <p:sp>
-        <p:nvSpPr>
-          <p:cNvPr id="14" name="TextBox 13"/>
-          <p:cNvSpPr txBox="1"/>
-          <p:nvPr/>
-        </p:nvSpPr>
-        <p:spPr>
-          <a:xfrm>
-            <a:off x="4754880" y="4279392"/>
-            <a:ext cx="731520" cy="320040"/>
-          </a:xfrm>
-          <a:prstGeom prst="rect">
-            <a:avLst/>
-          </a:prstGeom>
-          <a:noFill/>
-        </p:spPr>
-        <p:txBody>
-          <a:bodyPr wrap="square">
-            <a:spAutoFit/>
-          </a:bodyPr>
-          <a:lstStyle/>
-          <a:p>
-            <a:pPr algn="l">
-              <a:defRPr sz="1400" b="0">
-                <a:solidFill>
-                  <a:srgbClr val="4ADE80"/>
-                </a:solidFill>
-                <a:latin typeface="Arial"/>
-              </a:defRPr>
-            </a:pPr>
-            <a:r>
-              <a:t>✅</a:t>
-            </a:r>
-          </a:p>
-        </p:txBody>
-      </p:sp>
-      <p:sp>
-        <p:nvSpPr>
-          <p:cNvPr id="15" name="TextBox 14"/>
-          <p:cNvSpPr txBox="1"/>
-          <p:nvPr/>
-        </p:nvSpPr>
-        <p:spPr>
-          <a:xfrm>
-            <a:off x="1371600" y="4663440"/>
-            <a:ext cx="3657600" cy="320040"/>
-          </a:xfrm>
-          <a:prstGeom prst="rect">
-            <a:avLst/>
-          </a:prstGeom>
-          <a:noFill/>
-        </p:spPr>
-        <p:txBody>
-          <a:bodyPr wrap="square">
-            <a:spAutoFit/>
-          </a:bodyPr>
-          <a:lstStyle/>
-          <a:p>
             <a:pPr algn="ctr">
-              <a:defRPr sz="1300" b="0">
+              <a:defRPr sz="1300" b="0" spc="-13">
                 <a:solidFill>
                   <a:srgbClr val="666666"/>
                 </a:solidFill>
-                <a:latin typeface="Arial"/>
-              </a:defRPr>
-            </a:pPr>
-            <a:r>
-              <a:t>─── 여기서 끝 ───</a:t>
+                <a:latin typeface="Pretendard"/>
+                <a:ea typeface="Pretendard"/>
+                <a:cs typeface="Pretendard"/>
+              </a:defRPr>
+            </a:pPr>
+            <a:r>
+              <a:rPr spc="-13" dirty="0">
+                <a:latin typeface="Pretendard"/>
+                <a:ea typeface="Pretendard"/>
+                <a:cs typeface="Pretendard"/>
+              </a:rPr>
+              <a:t>─── </a:t>
+            </a:r>
+            <a:r>
+              <a:rPr spc="-13" dirty="0" err="1">
+                <a:latin typeface="Pretendard"/>
+                <a:ea typeface="Pretendard"/>
+                <a:cs typeface="Pretendard"/>
+              </a:rPr>
+              <a:t>여기서</a:t>
+            </a:r>
+            <a:r>
+              <a:rPr spc="-13" dirty="0">
+                <a:latin typeface="Pretendard"/>
+                <a:ea typeface="Pretendard"/>
+                <a:cs typeface="Pretendard"/>
+              </a:rPr>
+              <a:t> </a:t>
+            </a:r>
+            <a:r>
+              <a:rPr spc="-13" dirty="0" err="1">
+                <a:latin typeface="Pretendard"/>
+                <a:ea typeface="Pretendard"/>
+                <a:cs typeface="Pretendard"/>
+              </a:rPr>
+              <a:t>끝</a:t>
+            </a:r>
+            <a:r>
+              <a:rPr spc="-13" dirty="0">
+                <a:latin typeface="Pretendard"/>
+                <a:ea typeface="Pretendard"/>
+                <a:cs typeface="Pretendard"/>
+              </a:rPr>
+              <a:t> ───</a:t>
             </a:r>
           </a:p>
         </p:txBody>
@@ -4681,7 +5194,7 @@
             <a:off x="6217920" y="2286000"/>
             <a:ext cx="5029200" cy="3108960"/>
           </a:xfrm>
-          <a:prstGeom prst="roundRect">
+          <a:prstGeom prst="rect">
             <a:avLst/>
           </a:prstGeom>
           <a:solidFill>
@@ -4711,6 +5224,11 @@
           <a:lstStyle/>
           <a:p>
             <a:pPr algn="ctr"/>
+            <a:endParaRPr spc="-27" dirty="0">
+              <a:latin typeface="Pretendard"/>
+              <a:ea typeface="Pretendard"/>
+              <a:cs typeface="Pretendard"/>
+            </a:endParaRPr>
           </a:p>
         </p:txBody>
       </p:sp>
@@ -4722,7 +5240,7 @@
         </p:nvSpPr>
         <p:spPr>
           <a:xfrm>
-            <a:off x="6583680" y="2423160"/>
+            <a:off x="6583680" y="2480310"/>
             <a:ext cx="4114800" cy="365760"/>
           </a:xfrm>
           <a:prstGeom prst="rect">
@@ -4731,20 +5249,27 @@
           <a:noFill/>
         </p:spPr>
         <p:txBody>
-          <a:bodyPr wrap="square">
+          <a:bodyPr wrap="square" lIns="0" rIns="0">
             <a:spAutoFit/>
           </a:bodyPr>
           <a:lstStyle/>
           <a:p>
             <a:pPr algn="l">
-              <a:defRPr sz="1400" b="1">
+              <a:defRPr sz="1400" b="1" spc="-21">
                 <a:solidFill>
                   <a:srgbClr val="4ADE80"/>
                 </a:solidFill>
-                <a:latin typeface="Arial"/>
-              </a:defRPr>
-            </a:pPr>
-            <a:r>
+                <a:latin typeface="Pretendard"/>
+                <a:ea typeface="Pretendard"/>
+                <a:cs typeface="Pretendard"/>
+              </a:defRPr>
+            </a:pPr>
+            <a:r>
+              <a:rPr lang="ko-KR" spc="-21" dirty="0">
+                <a:latin typeface="Pretendard"/>
+                <a:ea typeface="Pretendard"/>
+                <a:cs typeface="Pretendard"/>
+              </a:rPr>
               <a:t>FollowIt (팔로잇)</a:t>
             </a:r>
           </a:p>
@@ -4791,6 +5316,11 @@
           <a:lstStyle/>
           <a:p>
             <a:pPr algn="ctr"/>
+            <a:endParaRPr spc="-27">
+              <a:latin typeface="Pretendard"/>
+              <a:ea typeface="Pretendard"/>
+              <a:cs typeface="Pretendard"/>
+            </a:endParaRPr>
           </a:p>
         </p:txBody>
       </p:sp>
@@ -4802,8 +5332,8 @@
         </p:nvSpPr>
         <p:spPr>
           <a:xfrm>
-            <a:off x="6675120" y="3090672"/>
-            <a:ext cx="3566160" cy="320040"/>
+            <a:off x="6578600" y="3086100"/>
+            <a:ext cx="3429000" cy="300082"/>
           </a:xfrm>
           <a:prstGeom prst="rect">
             <a:avLst/>
@@ -4811,22 +5341,82 @@
           <a:noFill/>
         </p:spPr>
         <p:txBody>
-          <a:bodyPr wrap="square">
+          <a:bodyPr wrap="square" lIns="0" rIns="0">
             <a:spAutoFit/>
           </a:bodyPr>
           <a:lstStyle/>
           <a:p>
             <a:pPr algn="l">
-              <a:defRPr sz="1350" b="0">
+              <a:defRPr sz="1350" b="0" spc="-14">
                 <a:solidFill>
                   <a:srgbClr val="F5F5F5"/>
                 </a:solidFill>
-                <a:latin typeface="Arial"/>
-              </a:defRPr>
-            </a:pPr>
-            <a:r>
-              <a:t>기존 녹음앱 연결 (MCP/API)</a:t>
-            </a:r>
+                <a:latin typeface="Pretendard"/>
+                <a:ea typeface="Pretendard"/>
+                <a:cs typeface="Pretendard"/>
+              </a:defRPr>
+            </a:pPr>
+            <a:r>
+              <a:rPr lang="ko-KR" altLang="en-US" spc="-14" dirty="0">
+                <a:latin typeface="Pretendard"/>
+                <a:ea typeface="Pretendard"/>
+                <a:cs typeface="Pretendard"/>
+              </a:rPr>
+              <a:t>녹음 </a:t>
+            </a:r>
+            <a:r>
+              <a:rPr lang="en-US" altLang="ko-KR" spc="-14" dirty="0">
+                <a:latin typeface="Pretendard"/>
+                <a:ea typeface="Pretendard"/>
+                <a:cs typeface="Pretendard"/>
+              </a:rPr>
+              <a:t>&gt;</a:t>
+            </a:r>
+            <a:r>
+              <a:rPr lang="ko-KR" altLang="en-US" spc="-14" dirty="0">
+                <a:latin typeface="Pretendard"/>
+                <a:ea typeface="Pretendard"/>
+                <a:cs typeface="Pretendard"/>
+              </a:rPr>
+              <a:t> 요약 </a:t>
+            </a:r>
+            <a:r>
+              <a:rPr lang="en-US" altLang="ko-KR" spc="-14" dirty="0">
+                <a:latin typeface="Pretendard"/>
+                <a:ea typeface="Pretendard"/>
+                <a:cs typeface="Pretendard"/>
+              </a:rPr>
+              <a:t>&gt;</a:t>
+            </a:r>
+            <a:r>
+              <a:rPr lang="ko-KR" altLang="en-US" spc="-14" dirty="0">
+                <a:latin typeface="Pretendard"/>
+                <a:ea typeface="Pretendard"/>
+                <a:cs typeface="Pretendard"/>
+              </a:rPr>
+              <a:t> 추출 </a:t>
+            </a:r>
+            <a:r>
+              <a:rPr lang="en-US" altLang="ko-KR" spc="-14" dirty="0">
+                <a:latin typeface="Pretendard"/>
+                <a:ea typeface="Pretendard"/>
+                <a:cs typeface="Pretendard"/>
+              </a:rPr>
+              <a:t>&gt;</a:t>
+            </a:r>
+            <a:r>
+              <a:rPr lang="ko-KR" altLang="en-US" spc="-14" dirty="0">
+                <a:latin typeface="Pretendard"/>
+                <a:ea typeface="Pretendard"/>
+                <a:cs typeface="Pretendard"/>
+              </a:rPr>
+              <a:t> 등록</a:t>
+            </a:r>
+            <a:endParaRPr lang="ko-KR" spc="-14" dirty="0">
+              <a:latin typeface="Pretendard"/>
+              <a:ea typeface="Pretendard"/>
+              <a:cs typeface="Pretendard"/>
+            </a:endParaRPr>
           </a:p>
         </p:txBody>
       </p:sp>
@@ -4838,8 +5428,8 @@
         </p:nvSpPr>
         <p:spPr>
           <a:xfrm>
-            <a:off x="10332720" y="3090672"/>
-            <a:ext cx="731520" cy="320040"/>
+            <a:off x="10134600" y="3086100"/>
+            <a:ext cx="736600" cy="261610"/>
           </a:xfrm>
           <a:prstGeom prst="rect">
             <a:avLst/>
@@ -4847,22 +5437,34 @@
           <a:noFill/>
         </p:spPr>
         <p:txBody>
-          <a:bodyPr wrap="square">
+          <a:bodyPr wrap="square" lIns="0" rIns="0">
             <a:spAutoFit/>
           </a:bodyPr>
           <a:lstStyle/>
           <a:p>
-            <a:pPr algn="l">
-              <a:defRPr sz="1100" b="0">
+            <a:pPr algn="r">
+              <a:defRPr sz="1100" b="0" spc="-11">
                 <a:solidFill>
                   <a:srgbClr val="999999"/>
                 </a:solidFill>
-                <a:latin typeface="Arial"/>
-              </a:defRPr>
-            </a:pPr>
-            <a:r>
-              <a:t>연동</a:t>
-            </a:r>
+                <a:latin typeface="Pretendard"/>
+                <a:ea typeface="Pretendard"/>
+                <a:cs typeface="Pretendard"/>
+              </a:defRPr>
+            </a:pPr>
+            <a:r>
+              <a:rPr lang="ko-KR" altLang="en-US" spc="-11" dirty="0">
+                <a:latin typeface="Pretendard"/>
+                <a:ea typeface="Pretendard"/>
+                <a:cs typeface="Pretendard"/>
+              </a:rPr>
+              <a:t>기존</a:t>
+            </a:r>
+            <a:endParaRPr lang="ko-KR" spc="-11" dirty="0">
+              <a:latin typeface="Pretendard"/>
+              <a:ea typeface="Pretendard"/>
+              <a:cs typeface="Pretendard"/>
+            </a:endParaRPr>
           </a:p>
         </p:txBody>
       </p:sp>
@@ -4874,8 +5476,8 @@
         </p:nvSpPr>
         <p:spPr>
           <a:xfrm>
-            <a:off x="6675120" y="3465576"/>
-            <a:ext cx="3566160" cy="320040"/>
+            <a:off x="6578600" y="3467100"/>
+            <a:ext cx="3429000" cy="300082"/>
           </a:xfrm>
           <a:prstGeom prst="rect">
             <a:avLst/>
@@ -4883,21 +5485,52 @@
           <a:noFill/>
         </p:spPr>
         <p:txBody>
-          <a:bodyPr wrap="square">
+          <a:bodyPr wrap="square" lIns="0" rIns="0">
             <a:spAutoFit/>
           </a:bodyPr>
           <a:lstStyle/>
           <a:p>
-            <a:pPr algn="l">
-              <a:defRPr sz="1350" b="0">
+            <a:pPr>
+              <a:defRPr sz="1350" b="0" spc="-14">
                 <a:solidFill>
                   <a:srgbClr val="F5F5F5"/>
                 </a:solidFill>
-                <a:latin typeface="Arial"/>
-              </a:defRPr>
-            </a:pPr>
-            <a:r>
-              <a:t>회의 연결 · 맥락 관리</a:t>
+                <a:latin typeface="Pretendard"/>
+                <a:ea typeface="Pretendard"/>
+                <a:cs typeface="Pretendard"/>
+              </a:defRPr>
+            </a:pPr>
+            <a:r>
+              <a:rPr lang="ko-KR" altLang="ko-KR" spc="-14" dirty="0">
+                <a:latin typeface="Pretendard"/>
+                <a:ea typeface="Pretendard"/>
+                <a:cs typeface="Pretendard"/>
+              </a:rPr>
+              <a:t>기존 녹음</a:t>
+            </a:r>
+            <a:r>
+              <a:rPr lang="ko-KR" altLang="en-US" spc="-14" dirty="0">
+                <a:latin typeface="Pretendard"/>
+                <a:ea typeface="Pretendard"/>
+                <a:cs typeface="Pretendard"/>
+              </a:rPr>
+              <a:t> </a:t>
+            </a:r>
+            <a:r>
+              <a:rPr lang="en-US" altLang="ko-KR" spc="-14" dirty="0">
+                <a:latin typeface="Pretendard"/>
+                <a:ea typeface="Pretendard"/>
+                <a:cs typeface="Pretendard"/>
+              </a:rPr>
+              <a:t>APP</a:t>
+            </a:r>
+            <a:r>
+              <a:rPr lang="ko-KR" altLang="ko-KR" spc="-14" dirty="0">
+                <a:latin typeface="Pretendard"/>
+                <a:ea typeface="Pretendard"/>
+                <a:cs typeface="Pretendard"/>
+              </a:rPr>
+              <a:t> 연결 (MCP/API)</a:t>
             </a:r>
           </a:p>
         </p:txBody>
@@ -4910,8 +5543,8 @@
         </p:nvSpPr>
         <p:spPr>
           <a:xfrm>
-            <a:off x="10332720" y="3465576"/>
-            <a:ext cx="731520" cy="320040"/>
+            <a:off x="10134600" y="3467100"/>
+            <a:ext cx="736600" cy="320040"/>
           </a:xfrm>
           <a:prstGeom prst="rect">
             <a:avLst/>
@@ -4919,20 +5552,27 @@
           <a:noFill/>
         </p:spPr>
         <p:txBody>
-          <a:bodyPr wrap="square">
+          <a:bodyPr wrap="square" lIns="0" rIns="0">
             <a:spAutoFit/>
           </a:bodyPr>
           <a:lstStyle/>
           <a:p>
-            <a:pPr algn="l">
-              <a:defRPr sz="1100" b="1">
+            <a:pPr algn="r">
+              <a:defRPr sz="1100" b="1" spc="-11">
                 <a:solidFill>
                   <a:srgbClr val="4ADE80"/>
                 </a:solidFill>
-                <a:latin typeface="Arial"/>
-              </a:defRPr>
-            </a:pPr>
-            <a:r>
+                <a:latin typeface="Pretendard"/>
+                <a:ea typeface="Pretendard"/>
+                <a:cs typeface="Pretendard"/>
+              </a:defRPr>
+            </a:pPr>
+            <a:r>
+              <a:rPr lang="ko-KR" spc="-11" dirty="0">
+                <a:latin typeface="Pretendard"/>
+                <a:ea typeface="Pretendard"/>
+                <a:cs typeface="Pretendard"/>
+              </a:rPr>
               <a:t>NEW</a:t>
             </a:r>
           </a:p>
@@ -4946,8 +5586,8 @@
         </p:nvSpPr>
         <p:spPr>
           <a:xfrm>
-            <a:off x="6675120" y="3840480"/>
-            <a:ext cx="3566160" cy="320040"/>
+            <a:off x="6578600" y="3835400"/>
+            <a:ext cx="3429000" cy="300082"/>
           </a:xfrm>
           <a:prstGeom prst="rect">
             <a:avLst/>
@@ -4955,21 +5595,28 @@
           <a:noFill/>
         </p:spPr>
         <p:txBody>
-          <a:bodyPr wrap="square">
+          <a:bodyPr wrap="square" lIns="0" rIns="0">
             <a:spAutoFit/>
           </a:bodyPr>
           <a:lstStyle/>
           <a:p>
-            <a:pPr algn="l">
-              <a:defRPr sz="1350" b="0">
+            <a:pPr>
+              <a:defRPr sz="1350" b="0" spc="-14">
                 <a:solidFill>
                   <a:srgbClr val="F5F5F5"/>
                 </a:solidFill>
-                <a:latin typeface="Arial"/>
-              </a:defRPr>
-            </a:pPr>
-            <a:r>
-              <a:t>액션 추출 + R&amp;R 추천 + HITL 확인</a:t>
+                <a:latin typeface="Pretendard"/>
+                <a:ea typeface="Pretendard"/>
+                <a:cs typeface="Pretendard"/>
+              </a:defRPr>
+            </a:pPr>
+            <a:r>
+              <a:rPr lang="ko-KR" altLang="ko-KR" spc="-14" dirty="0">
+                <a:latin typeface="Pretendard"/>
+                <a:ea typeface="Pretendard"/>
+                <a:cs typeface="Pretendard"/>
+              </a:rPr>
+              <a:t>회의 연결 · 맥락 관리</a:t>
             </a:r>
           </a:p>
         </p:txBody>
@@ -4982,8 +5629,8 @@
         </p:nvSpPr>
         <p:spPr>
           <a:xfrm>
-            <a:off x="10332720" y="3840480"/>
-            <a:ext cx="731520" cy="320040"/>
+            <a:off x="10134600" y="3835400"/>
+            <a:ext cx="736600" cy="320040"/>
           </a:xfrm>
           <a:prstGeom prst="rect">
             <a:avLst/>
@@ -4991,20 +5638,27 @@
           <a:noFill/>
         </p:spPr>
         <p:txBody>
-          <a:bodyPr wrap="square">
+          <a:bodyPr wrap="square" lIns="0" rIns="0">
             <a:spAutoFit/>
           </a:bodyPr>
           <a:lstStyle/>
           <a:p>
-            <a:pPr algn="l">
-              <a:defRPr sz="1100" b="1">
+            <a:pPr algn="r">
+              <a:defRPr sz="1100" b="1" spc="-11">
                 <a:solidFill>
                   <a:srgbClr val="4ADE80"/>
                 </a:solidFill>
-                <a:latin typeface="Arial"/>
-              </a:defRPr>
-            </a:pPr>
-            <a:r>
+                <a:latin typeface="Pretendard"/>
+                <a:ea typeface="Pretendard"/>
+                <a:cs typeface="Pretendard"/>
+              </a:defRPr>
+            </a:pPr>
+            <a:r>
+              <a:rPr lang="ko-KR" spc="-11" dirty="0">
+                <a:latin typeface="Pretendard"/>
+                <a:ea typeface="Pretendard"/>
+                <a:cs typeface="Pretendard"/>
+              </a:rPr>
               <a:t>NEW</a:t>
             </a:r>
           </a:p>
@@ -5018,8 +5672,8 @@
         </p:nvSpPr>
         <p:spPr>
           <a:xfrm>
-            <a:off x="6675120" y="4215384"/>
-            <a:ext cx="3566160" cy="320040"/>
+            <a:off x="6578600" y="4216400"/>
+            <a:ext cx="3429000" cy="300082"/>
           </a:xfrm>
           <a:prstGeom prst="rect">
             <a:avLst/>
@@ -5027,21 +5681,28 @@
           <a:noFill/>
         </p:spPr>
         <p:txBody>
-          <a:bodyPr wrap="square">
+          <a:bodyPr wrap="square" lIns="0" rIns="0">
             <a:spAutoFit/>
           </a:bodyPr>
           <a:lstStyle/>
           <a:p>
-            <a:pPr algn="l">
-              <a:defRPr sz="1350" b="0">
+            <a:pPr>
+              <a:defRPr sz="1350" b="0" spc="-14">
                 <a:solidFill>
                   <a:srgbClr val="F5F5F5"/>
                 </a:solidFill>
-                <a:latin typeface="Arial"/>
-              </a:defRPr>
-            </a:pPr>
-            <a:r>
-              <a:t>선행관계 기반 타임라인 제안</a:t>
+                <a:latin typeface="Pretendard"/>
+                <a:ea typeface="Pretendard"/>
+                <a:cs typeface="Pretendard"/>
+              </a:defRPr>
+            </a:pPr>
+            <a:r>
+              <a:rPr lang="ko-KR" altLang="ko-KR" spc="-14" dirty="0">
+                <a:latin typeface="Pretendard"/>
+                <a:ea typeface="Pretendard"/>
+                <a:cs typeface="Pretendard"/>
+              </a:rPr>
+              <a:t>액션 추출 + R&amp;R 추천 + HITL 확인</a:t>
             </a:r>
           </a:p>
         </p:txBody>
@@ -5054,8 +5715,8 @@
         </p:nvSpPr>
         <p:spPr>
           <a:xfrm>
-            <a:off x="10332720" y="4215384"/>
-            <a:ext cx="731520" cy="320040"/>
+            <a:off x="10134600" y="4216400"/>
+            <a:ext cx="736600" cy="320040"/>
           </a:xfrm>
           <a:prstGeom prst="rect">
             <a:avLst/>
@@ -5063,20 +5724,27 @@
           <a:noFill/>
         </p:spPr>
         <p:txBody>
-          <a:bodyPr wrap="square">
+          <a:bodyPr wrap="square" lIns="0" rIns="0">
             <a:spAutoFit/>
           </a:bodyPr>
           <a:lstStyle/>
           <a:p>
-            <a:pPr algn="l">
-              <a:defRPr sz="1100" b="1">
+            <a:pPr algn="r">
+              <a:defRPr sz="1100" b="1" spc="-11">
                 <a:solidFill>
                   <a:srgbClr val="4ADE80"/>
                 </a:solidFill>
-                <a:latin typeface="Arial"/>
-              </a:defRPr>
-            </a:pPr>
-            <a:r>
+                <a:latin typeface="Pretendard"/>
+                <a:ea typeface="Pretendard"/>
+                <a:cs typeface="Pretendard"/>
+              </a:defRPr>
+            </a:pPr>
+            <a:r>
+              <a:rPr lang="ko-KR" spc="-11" dirty="0">
+                <a:latin typeface="Pretendard"/>
+                <a:ea typeface="Pretendard"/>
+                <a:cs typeface="Pretendard"/>
+              </a:rPr>
               <a:t>NEW</a:t>
             </a:r>
           </a:p>
@@ -5090,8 +5758,8 @@
         </p:nvSpPr>
         <p:spPr>
           <a:xfrm>
-            <a:off x="6675120" y="4590288"/>
-            <a:ext cx="3566160" cy="320040"/>
+            <a:off x="6578600" y="4584700"/>
+            <a:ext cx="3429000" cy="300082"/>
           </a:xfrm>
           <a:prstGeom prst="rect">
             <a:avLst/>
@@ -5099,21 +5767,28 @@
           <a:noFill/>
         </p:spPr>
         <p:txBody>
-          <a:bodyPr wrap="square">
+          <a:bodyPr wrap="square" lIns="0" rIns="0">
             <a:spAutoFit/>
           </a:bodyPr>
           <a:lstStyle/>
           <a:p>
-            <a:pPr algn="l">
-              <a:defRPr sz="1350" b="0">
+            <a:pPr>
+              <a:defRPr sz="1350" b="0" spc="-14">
                 <a:solidFill>
                   <a:srgbClr val="F5F5F5"/>
                 </a:solidFill>
-                <a:latin typeface="Arial"/>
-              </a:defRPr>
-            </a:pPr>
-            <a:r>
-              <a:t>팔로업 추적 + 답변 해석</a:t>
+                <a:latin typeface="Pretendard"/>
+                <a:ea typeface="Pretendard"/>
+                <a:cs typeface="Pretendard"/>
+              </a:defRPr>
+            </a:pPr>
+            <a:r>
+              <a:rPr lang="ko-KR" altLang="ko-KR" spc="-14" dirty="0">
+                <a:latin typeface="Pretendard"/>
+                <a:ea typeface="Pretendard"/>
+                <a:cs typeface="Pretendard"/>
+              </a:rPr>
+              <a:t>선행관계 기반 타임라인 제안</a:t>
             </a:r>
           </a:p>
         </p:txBody>
@@ -5126,8 +5801,8 @@
         </p:nvSpPr>
         <p:spPr>
           <a:xfrm>
-            <a:off x="10332720" y="4590288"/>
-            <a:ext cx="731520" cy="320040"/>
+            <a:off x="10134600" y="4584700"/>
+            <a:ext cx="736600" cy="320040"/>
           </a:xfrm>
           <a:prstGeom prst="rect">
             <a:avLst/>
@@ -5135,20 +5810,27 @@
           <a:noFill/>
         </p:spPr>
         <p:txBody>
-          <a:bodyPr wrap="square">
+          <a:bodyPr wrap="square" lIns="0" rIns="0">
             <a:spAutoFit/>
           </a:bodyPr>
           <a:lstStyle/>
           <a:p>
-            <a:pPr algn="l">
-              <a:defRPr sz="1100" b="1">
+            <a:pPr algn="r">
+              <a:defRPr sz="1100" b="1" spc="-11">
                 <a:solidFill>
                   <a:srgbClr val="4ADE80"/>
                 </a:solidFill>
-                <a:latin typeface="Arial"/>
-              </a:defRPr>
-            </a:pPr>
-            <a:r>
+                <a:latin typeface="Pretendard"/>
+                <a:ea typeface="Pretendard"/>
+                <a:cs typeface="Pretendard"/>
+              </a:defRPr>
+            </a:pPr>
+            <a:r>
+              <a:rPr lang="ko-KR" spc="-11" dirty="0">
+                <a:latin typeface="Pretendard"/>
+                <a:ea typeface="Pretendard"/>
+                <a:cs typeface="Pretendard"/>
+              </a:rPr>
               <a:t>NEW</a:t>
             </a:r>
           </a:p>
@@ -5156,14 +5838,14 @@
       </p:sp>
       <p:sp>
         <p:nvSpPr>
-          <p:cNvPr id="29" name="TextBox 28"/>
+          <p:cNvPr id="31" name="TextBox 30"/>
           <p:cNvSpPr txBox="1"/>
           <p:nvPr/>
         </p:nvSpPr>
         <p:spPr>
           <a:xfrm>
-            <a:off x="6675120" y="4965192"/>
-            <a:ext cx="3566160" cy="320040"/>
+            <a:off x="914400" y="5669280"/>
+            <a:ext cx="10515600" cy="457200"/>
           </a:xfrm>
           <a:prstGeom prst="rect">
             <a:avLst/>
@@ -5171,35 +5853,42 @@
           <a:noFill/>
         </p:spPr>
         <p:txBody>
-          <a:bodyPr wrap="square">
+          <a:bodyPr wrap="square" lIns="0" rIns="0">
             <a:spAutoFit/>
           </a:bodyPr>
           <a:lstStyle/>
           <a:p>
             <a:pPr algn="l">
-              <a:defRPr sz="1350" b="0">
-                <a:solidFill>
-                  <a:srgbClr val="F5F5F5"/>
-                </a:solidFill>
-                <a:latin typeface="Arial"/>
-              </a:defRPr>
-            </a:pPr>
-            <a:r>
-              <a:t>미완료 → 다음 회의 안건</a:t>
-            </a:r>
-          </a:p>
-        </p:txBody>
-      </p:sp>
-      <p:sp>
-        <p:nvSpPr>
-          <p:cNvPr id="30" name="TextBox 29"/>
+              <a:defRPr sz="2000" b="1" spc="-30">
+                <a:solidFill>
+                  <a:srgbClr val="4ADE80"/>
+                </a:solidFill>
+                <a:latin typeface="Pretendard"/>
+                <a:ea typeface="Pretendard"/>
+                <a:cs typeface="Pretendard"/>
+              </a:defRPr>
+            </a:pPr>
+            <a:r>
+              <a:rPr lang="ko-KR" spc="-30" dirty="0">
+                <a:latin typeface="Pretendard"/>
+                <a:ea typeface="Pretendard"/>
+                <a:cs typeface="Pretendard"/>
+              </a:rPr>
+              <a:t>“기존 도구는 회의를 기록합니다.  우리는 회의를 완결합니다.”</a:t>
+            </a:r>
+          </a:p>
+        </p:txBody>
+      </p:sp>
+      <p:sp>
+        <p:nvSpPr>
+          <p:cNvPr id="32" name="TextBox 31"/>
           <p:cNvSpPr txBox="1"/>
           <p:nvPr/>
         </p:nvSpPr>
         <p:spPr>
           <a:xfrm>
-            <a:off x="10332720" y="4965192"/>
-            <a:ext cx="731520" cy="320040"/>
+            <a:off x="914400" y="6126480"/>
+            <a:ext cx="10515600" cy="292388"/>
           </a:xfrm>
           <a:prstGeom prst="rect">
             <a:avLst/>
@@ -5207,35 +5896,58 @@
           <a:noFill/>
         </p:spPr>
         <p:txBody>
-          <a:bodyPr wrap="square">
+          <a:bodyPr wrap="square" lIns="0" rIns="0">
             <a:spAutoFit/>
           </a:bodyPr>
           <a:lstStyle/>
           <a:p>
             <a:pPr algn="l">
-              <a:defRPr sz="1100" b="1">
-                <a:solidFill>
-                  <a:srgbClr val="4ADE80"/>
-                </a:solidFill>
-                <a:latin typeface="Arial"/>
-              </a:defRPr>
-            </a:pPr>
-            <a:r>
-              <a:t>NEW</a:t>
-            </a:r>
-          </a:p>
-        </p:txBody>
-      </p:sp>
-      <p:sp>
-        <p:nvSpPr>
-          <p:cNvPr id="31" name="TextBox 30"/>
+              <a:defRPr sz="1300" b="0" spc="-13">
+                <a:solidFill>
+                  <a:srgbClr val="999999"/>
+                </a:solidFill>
+                <a:latin typeface="Pretendard"/>
+                <a:ea typeface="Pretendard"/>
+                <a:cs typeface="Pretendard"/>
+              </a:defRPr>
+            </a:pPr>
+            <a:r>
+              <a:rPr lang="ko-KR" spc="-13" dirty="0">
+                <a:latin typeface="Pretendard"/>
+                <a:ea typeface="Pretendard"/>
+                <a:cs typeface="Pretendard"/>
+              </a:rPr>
+              <a:t>녹음·전사·추출은 기존 앱 위에 올라타고, </a:t>
+            </a:r>
+            <a:r>
+              <a:rPr lang="ko-KR" u="sng" spc="-13" dirty="0">
+                <a:latin typeface="Pretendard"/>
+                <a:ea typeface="Pretendard"/>
+                <a:cs typeface="Pretendard"/>
+              </a:rPr>
+              <a:t>회의 연결 · 확인 · 추적 · 완결에 집중</a:t>
+            </a:r>
+            <a:r>
+              <a:rPr lang="ko-KR" spc="-13" dirty="0">
+                <a:latin typeface="Pretendard"/>
+                <a:ea typeface="Pretendard"/>
+                <a:cs typeface="Pretendard"/>
+              </a:rPr>
+              <a:t>합니다.</a:t>
+            </a:r>
+          </a:p>
+        </p:txBody>
+      </p:sp>
+      <p:sp>
+        <p:nvSpPr>
+          <p:cNvPr id="33" name="TextBox 32"/>
           <p:cNvSpPr txBox="1"/>
           <p:nvPr/>
         </p:nvSpPr>
         <p:spPr>
           <a:xfrm>
-            <a:off x="914400" y="5669280"/>
-            <a:ext cx="10515600" cy="457200"/>
+            <a:off x="10706100" y="6350000"/>
+            <a:ext cx="546100" cy="274320"/>
           </a:xfrm>
           <a:prstGeom prst="rect">
             <a:avLst/>
@@ -5243,35 +5955,48 @@
           <a:noFill/>
         </p:spPr>
         <p:txBody>
-          <a:bodyPr wrap="square">
+          <a:bodyPr wrap="square" lIns="0" rIns="0">
             <a:spAutoFit/>
           </a:bodyPr>
           <a:lstStyle/>
           <a:p>
-            <a:pPr algn="l">
-              <a:defRPr sz="2000" b="1">
-                <a:solidFill>
-                  <a:srgbClr val="4ADE80"/>
-                </a:solidFill>
-                <a:latin typeface="Arial"/>
-              </a:defRPr>
-            </a:pPr>
-            <a:r>
-              <a:t>“기존 도구는 회의를 기록합니다.  우리는 회의를 완결합니다.”</a:t>
-            </a:r>
-          </a:p>
-        </p:txBody>
-      </p:sp>
-      <p:sp>
-        <p:nvSpPr>
-          <p:cNvPr id="32" name="TextBox 31"/>
+            <a:pPr algn="r">
+              <a:defRPr sz="1000" b="0" spc="-10">
+                <a:solidFill>
+                  <a:srgbClr val="666666"/>
+                </a:solidFill>
+                <a:latin typeface="Pretendard"/>
+                <a:ea typeface="Pretendard"/>
+                <a:cs typeface="Pretendard"/>
+              </a:defRPr>
+            </a:pPr>
+            <a:r>
+              <a:rPr lang="ko-KR" spc="-10" dirty="0">
+                <a:latin typeface="Pretendard"/>
+                <a:ea typeface="Pretendard"/>
+                <a:cs typeface="Pretendard"/>
+              </a:rPr>
+              <a:t>3</a:t>
+            </a:r>
+          </a:p>
+        </p:txBody>
+      </p:sp>
+      <p:sp>
+        <p:nvSpPr>
+          <p:cNvPr id="38" name="TextBox 37">
+            <a:extLst>
+              <a:ext uri="{FF2B5EF4-FFF2-40B4-BE49-F238E27FC236}">
+                <a16:creationId xmlns:a16="http://schemas.microsoft.com/office/drawing/2014/main" id="{157F5745-3520-0DFF-EB6F-76BEFD947D64}"/>
+              </a:ext>
+            </a:extLst>
+          </p:cNvPr>
           <p:cNvSpPr txBox="1"/>
           <p:nvPr/>
         </p:nvSpPr>
         <p:spPr>
           <a:xfrm>
-            <a:off x="914400" y="6126480"/>
-            <a:ext cx="10515600" cy="274320"/>
+            <a:off x="6578600" y="4940300"/>
+            <a:ext cx="3429000" cy="300082"/>
           </a:xfrm>
           <a:prstGeom prst="rect">
             <a:avLst/>
@@ -5279,35 +6004,61 @@
           <a:noFill/>
         </p:spPr>
         <p:txBody>
-          <a:bodyPr wrap="square">
+          <a:bodyPr wrap="square" lIns="0" rIns="0">
             <a:spAutoFit/>
           </a:bodyPr>
           <a:lstStyle/>
           <a:p>
             <a:pPr algn="l">
-              <a:defRPr sz="1300" b="0">
-                <a:solidFill>
-                  <a:srgbClr val="999999"/>
-                </a:solidFill>
-                <a:latin typeface="Arial"/>
-              </a:defRPr>
-            </a:pPr>
-            <a:r>
-              <a:t>녹음·전사·추출은 기존 앱 위에 올라타고, 회의 연결 · 확인 · 추적 · 완결에 집중합니다.</a:t>
-            </a:r>
-          </a:p>
-        </p:txBody>
-      </p:sp>
-      <p:sp>
-        <p:nvSpPr>
-          <p:cNvPr id="33" name="TextBox 32"/>
+              <a:defRPr sz="1350" b="0" spc="-14">
+                <a:solidFill>
+                  <a:srgbClr val="F5F5F5"/>
+                </a:solidFill>
+                <a:latin typeface="Pretendard"/>
+                <a:ea typeface="Pretendard"/>
+                <a:cs typeface="Pretendard"/>
+              </a:defRPr>
+            </a:pPr>
+            <a:r>
+              <a:rPr lang="ko-KR" altLang="en-US" spc="-14" dirty="0">
+                <a:latin typeface="Pretendard"/>
+                <a:ea typeface="Pretendard"/>
+                <a:cs typeface="Pretendard"/>
+              </a:rPr>
+              <a:t>지속적인 후속관리</a:t>
+            </a:r>
+            <a:r>
+              <a:rPr lang="en-US" altLang="ko-KR" spc="-14" dirty="0">
+                <a:latin typeface="Pretendard"/>
+                <a:ea typeface="Pretendard"/>
+                <a:cs typeface="Pretendard"/>
+              </a:rPr>
+              <a:t>(F/U Tracking)</a:t>
+            </a:r>
+            <a:endParaRPr spc="-14" dirty="0">
+              <a:latin typeface="Pretendard"/>
+              <a:ea typeface="Pretendard"/>
+              <a:cs typeface="Pretendard"/>
+            </a:endParaRPr>
+          </a:p>
+        </p:txBody>
+      </p:sp>
+      <p:sp>
+        <p:nvSpPr>
+          <p:cNvPr id="39" name="TextBox 38">
+            <a:extLst>
+              <a:ext uri="{FF2B5EF4-FFF2-40B4-BE49-F238E27FC236}">
+                <a16:creationId xmlns:a16="http://schemas.microsoft.com/office/drawing/2014/main" id="{0DCD9F7C-6AB4-E69B-CC90-353D76F60A14}"/>
+              </a:ext>
+            </a:extLst>
+          </p:cNvPr>
           <p:cNvSpPr txBox="1"/>
           <p:nvPr/>
         </p:nvSpPr>
         <p:spPr>
           <a:xfrm>
-            <a:off x="11430000" y="6446520"/>
-            <a:ext cx="548640" cy="274320"/>
+            <a:off x="10134600" y="4940300"/>
+            <a:ext cx="736600" cy="320040"/>
           </a:xfrm>
           <a:prstGeom prst="rect">
             <a:avLst/>
@@ -5315,26 +6066,38 @@
           <a:noFill/>
         </p:spPr>
         <p:txBody>
-          <a:bodyPr wrap="square">
+          <a:bodyPr wrap="square" lIns="0" rIns="0">
             <a:spAutoFit/>
           </a:bodyPr>
           <a:lstStyle/>
           <a:p>
             <a:pPr algn="r">
-              <a:defRPr sz="1000" b="0">
-                <a:solidFill>
-                  <a:srgbClr val="666666"/>
-                </a:solidFill>
-                <a:latin typeface="Arial"/>
-              </a:defRPr>
-            </a:pPr>
-            <a:r>
-              <a:t>3</a:t>
+              <a:defRPr sz="1100" b="1" spc="-11">
+                <a:solidFill>
+                  <a:srgbClr val="4ADE80"/>
+                </a:solidFill>
+                <a:latin typeface="Pretendard"/>
+                <a:ea typeface="Pretendard"/>
+                <a:cs typeface="Pretendard"/>
+              </a:defRPr>
+            </a:pPr>
+            <a:r>
+              <a:rPr lang="ko-KR" spc="-11" dirty="0">
+                <a:latin typeface="Pretendard"/>
+                <a:ea typeface="Pretendard"/>
+                <a:cs typeface="Pretendard"/>
+              </a:rPr>
+              <a:t>NEW</a:t>
             </a:r>
           </a:p>
         </p:txBody>
       </p:sp>
     </p:spTree>
+    <p:extLst>
+      <p:ext uri="{BB962C8B-B14F-4D97-AF65-F5344CB8AC3E}">
+        <p14:creationId xmlns:p14="http://schemas.microsoft.com/office/powerpoint/2010/main" val="3535458230"/>
+      </p:ext>
+    </p:extLst>
   </p:cSld>
   <p:clrMapOvr>
     <a:masterClrMapping/>
@@ -5343,7 +6106,7 @@
 </file>
 
 <file path=ppt/slides/slide4.xml><?xml version="1.0" encoding="utf-8"?>
-<p:sld xmlns:a="http://schemas.openxmlformats.org/drawingml/2006/main" xmlns:p="http://schemas.openxmlformats.org/presentationml/2006/main" xmlns:r="http://schemas.openxmlformats.org/officeDocument/2006/relationships">
+<p:sld xmlns:a="http://schemas.openxmlformats.org/drawingml/2006/main" xmlns:r="http://schemas.openxmlformats.org/officeDocument/2006/relationships" xmlns:p="http://schemas.openxmlformats.org/presentationml/2006/main">
   <p:cSld>
     <p:bg>
       <p:bgPr>
@@ -5359,7 +6122,14 @@
         <p:cNvGrpSpPr/>
         <p:nvPr/>
       </p:nvGrpSpPr>
-      <p:grpSpPr/>
+      <p:grpSpPr>
+        <a:xfrm>
+          <a:off x="0" y="0"/>
+          <a:ext cx="0" cy="0"/>
+          <a:chOff x="0" y="0"/>
+          <a:chExt cx="0" cy="0"/>
+        </a:xfrm>
+      </p:grpSpPr>
       <p:sp>
         <p:nvSpPr>
           <p:cNvPr id="2" name="Rounded Rectangle 1"/>
@@ -5371,7 +6141,7 @@
             <a:off x="914400" y="640080"/>
             <a:ext cx="914400" cy="355600"/>
           </a:xfrm>
-          <a:prstGeom prst="roundRect">
+          <a:prstGeom prst="rect">
             <a:avLst/>
           </a:prstGeom>
           <a:solidFill>
@@ -5397,18 +6167,25 @@
           </a:fontRef>
         </p:style>
         <p:txBody>
-          <a:bodyPr rtlCol="0" anchor="ctr" wrap="none" lIns="127000" rIns="127000" tIns="25400" bIns="25400"/>
+          <a:bodyPr wrap="none" lIns="127000" tIns="25400" rIns="127000" bIns="25400" rtlCol="0" anchor="ctr"/>
           <a:lstStyle/>
           <a:p>
             <a:pPr algn="ctr">
-              <a:defRPr sz="1100" b="1">
+              <a:defRPr sz="1100" b="1" spc="-11">
                 <a:solidFill>
                   <a:srgbClr val="0F0F0F"/>
                 </a:solidFill>
-                <a:latin typeface="Arial"/>
-              </a:defRPr>
-            </a:pPr>
-            <a:r>
+                <a:latin typeface="Pretendard"/>
+                <a:ea typeface="Pretendard"/>
+                <a:cs typeface="Pretendard"/>
+              </a:defRPr>
+            </a:pPr>
+            <a:r>
+              <a:rPr lang="ko-KR" spc="-11" dirty="0">
+                <a:latin typeface="Pretendard"/>
+                <a:ea typeface="Pretendard"/>
+                <a:cs typeface="Pretendard"/>
+              </a:rPr>
               <a:t>솔루션</a:t>
             </a:r>
           </a:p>
@@ -5431,20 +6208,27 @@
           <a:noFill/>
         </p:spPr>
         <p:txBody>
-          <a:bodyPr wrap="square">
+          <a:bodyPr wrap="square" lIns="0" rIns="0">
             <a:spAutoFit/>
           </a:bodyPr>
           <a:lstStyle/>
           <a:p>
             <a:pPr algn="l">
-              <a:defRPr sz="4000" b="1">
+              <a:defRPr sz="4000" b="1" spc="-100">
                 <a:solidFill>
                   <a:srgbClr val="F5F5F5"/>
                 </a:solidFill>
-                <a:latin typeface="Arial"/>
-              </a:defRPr>
-            </a:pPr>
-            <a:r>
+                <a:latin typeface="Pretendard"/>
+                <a:ea typeface="Pretendard"/>
+                <a:cs typeface="Pretendard"/>
+              </a:defRPr>
+            </a:pPr>
+            <a:r>
+              <a:rPr lang="ko-KR" spc="-100" dirty="0">
+                <a:latin typeface="Pretendard"/>
+                <a:ea typeface="Pretendard"/>
+                <a:cs typeface="Pretendard"/>
+              </a:rPr>
               <a:t>회의를 기억하고, 연결하고, 끝까지 챙긴다</a:t>
             </a:r>
           </a:p>
@@ -5458,10 +6242,10 @@
         </p:nvSpPr>
         <p:spPr>
           <a:xfrm>
-            <a:off x="731520" y="2286000"/>
-            <a:ext cx="1874519" cy="1828800"/>
-          </a:xfrm>
-          <a:prstGeom prst="roundRect">
+            <a:off x="914400" y="2286000"/>
+            <a:ext cx="1823720" cy="1828800"/>
+          </a:xfrm>
+          <a:prstGeom prst="rect">
             <a:avLst/>
           </a:prstGeom>
           <a:solidFill>
@@ -5491,6 +6275,11 @@
           <a:lstStyle/>
           <a:p>
             <a:pPr algn="ctr"/>
+            <a:endParaRPr spc="-27">
+              <a:latin typeface="Pretendard"/>
+              <a:ea typeface="Pretendard"/>
+              <a:cs typeface="Pretendard"/>
+            </a:endParaRPr>
           </a:p>
         </p:txBody>
       </p:sp>
@@ -5502,8 +6291,8 @@
         </p:nvSpPr>
         <p:spPr>
           <a:xfrm>
-            <a:off x="909320" y="2377440"/>
-            <a:ext cx="457200" cy="365760"/>
+            <a:off x="1117600" y="2540000"/>
+            <a:ext cx="1417320" cy="381000"/>
           </a:xfrm>
           <a:prstGeom prst="rect">
             <a:avLst/>
@@ -5511,20 +6300,27 @@
           <a:noFill/>
         </p:spPr>
         <p:txBody>
-          <a:bodyPr wrap="square">
-            <a:spAutoFit/>
+          <a:bodyPr wrap="square" lIns="0" tIns="0" rIns="0" bIns="0" anchor="t">
+            <a:noAutofit/>
           </a:bodyPr>
           <a:lstStyle/>
           <a:p>
             <a:pPr algn="l">
-              <a:defRPr sz="2800" b="1">
+              <a:defRPr sz="2800" b="1" spc="-70">
                 <a:solidFill>
                   <a:srgbClr val="4ADE80"/>
                 </a:solidFill>
-                <a:latin typeface="Arial"/>
-              </a:defRPr>
-            </a:pPr>
-            <a:r>
+                <a:latin typeface="Pretendard"/>
+                <a:ea typeface="Pretendard"/>
+                <a:cs typeface="Pretendard"/>
+              </a:defRPr>
+            </a:pPr>
+            <a:r>
+              <a:rPr lang="ko-KR" spc="-70" dirty="0">
+                <a:latin typeface="Pretendard"/>
+                <a:ea typeface="Pretendard"/>
+                <a:cs typeface="Pretendard"/>
+              </a:rPr>
               <a:t>1</a:t>
             </a:r>
           </a:p>
@@ -5538,8 +6334,8 @@
         </p:nvSpPr>
         <p:spPr>
           <a:xfrm>
-            <a:off x="909320" y="2834640"/>
-            <a:ext cx="1518919" cy="365760"/>
+            <a:off x="1117600" y="2971800"/>
+            <a:ext cx="1417320" cy="355600"/>
           </a:xfrm>
           <a:prstGeom prst="rect">
             <a:avLst/>
@@ -5547,20 +6343,27 @@
           <a:noFill/>
         </p:spPr>
         <p:txBody>
-          <a:bodyPr wrap="square">
-            <a:spAutoFit/>
+          <a:bodyPr wrap="square" lIns="0" tIns="0" rIns="0" bIns="0" anchor="t">
+            <a:noAutofit/>
           </a:bodyPr>
           <a:lstStyle/>
           <a:p>
             <a:pPr algn="l">
-              <a:defRPr sz="1600" b="1">
+              <a:defRPr sz="1600" b="1" spc="-24">
                 <a:solidFill>
                   <a:srgbClr val="F5F5F5"/>
                 </a:solidFill>
-                <a:latin typeface="Arial"/>
-              </a:defRPr>
-            </a:pPr>
-            <a:r>
+                <a:latin typeface="Pretendard"/>
+                <a:ea typeface="Pretendard"/>
+                <a:cs typeface="Pretendard"/>
+              </a:defRPr>
+            </a:pPr>
+            <a:r>
+              <a:rPr lang="ko-KR" spc="-24" dirty="0">
+                <a:latin typeface="Pretendard"/>
+                <a:ea typeface="Pretendard"/>
+                <a:cs typeface="Pretendard"/>
+              </a:rPr>
               <a:t>연동</a:t>
             </a:r>
           </a:p>
@@ -5574,8 +6377,8 @@
         </p:nvSpPr>
         <p:spPr>
           <a:xfrm>
-            <a:off x="909320" y="3200400"/>
-            <a:ext cx="1518919" cy="822960"/>
+            <a:off x="1117600" y="3403600"/>
+            <a:ext cx="1417320" cy="609600"/>
           </a:xfrm>
           <a:prstGeom prst="rect">
             <a:avLst/>
@@ -5583,24 +6386,39 @@
           <a:noFill/>
         </p:spPr>
         <p:txBody>
-          <a:bodyPr wrap="square">
-            <a:spAutoFit/>
+          <a:bodyPr wrap="square" lIns="0" tIns="0" rIns="0" bIns="0" anchor="t">
+            <a:noAutofit/>
           </a:bodyPr>
           <a:lstStyle/>
           <a:p>
             <a:pPr algn="l">
-              <a:defRPr sz="1150" b="0">
+              <a:lnSpc>
+                <a:spcPct val="140000"/>
+              </a:lnSpc>
+              <a:defRPr sz="1400" b="0" spc="-21">
                 <a:solidFill>
                   <a:srgbClr val="999999"/>
                 </a:solidFill>
-                <a:latin typeface="Arial"/>
-              </a:defRPr>
-            </a:pPr>
-            <a:r>
+                <a:latin typeface="Pretendard"/>
+                <a:ea typeface="Pretendard"/>
+                <a:cs typeface="Pretendard"/>
+              </a:defRPr>
+            </a:pPr>
+            <a:r>
+              <a:rPr lang="ko-KR" sz="1400" spc="-21" dirty="0">
+                <a:latin typeface="Pretendard"/>
+                <a:ea typeface="Pretendard"/>
+                <a:cs typeface="Pretendard"/>
+              </a:rPr>
               <a:t>녹음앱 연결 (MCP)</a:t>
             </a:r>
             <a:br/>
             <a:r>
+              <a:rPr lang="ko-KR" sz="1400" spc="-21" dirty="0">
+                <a:latin typeface="Pretendard"/>
+                <a:ea typeface="Pretendard"/>
+                <a:cs typeface="Pretendard"/>
+              </a:rPr>
               <a:t>전사문 가져오기</a:t>
             </a:r>
           </a:p>
@@ -5614,8 +6432,8 @@
         </p:nvSpPr>
         <p:spPr>
           <a:xfrm>
-            <a:off x="2606039" y="2926080"/>
-            <a:ext cx="256032" cy="365760"/>
+            <a:off x="2738120" y="3022600"/>
+            <a:ext cx="304800" cy="355600"/>
           </a:xfrm>
           <a:prstGeom prst="rect">
             <a:avLst/>
@@ -5623,20 +6441,27 @@
           <a:noFill/>
         </p:spPr>
         <p:txBody>
-          <a:bodyPr wrap="square">
-            <a:spAutoFit/>
+          <a:bodyPr wrap="square" lIns="0" tIns="0" rIns="0" bIns="0" anchor="ctr">
+            <a:noAutofit/>
           </a:bodyPr>
           <a:lstStyle/>
           <a:p>
             <a:pPr algn="ctr">
-              <a:defRPr sz="2000" b="0">
+              <a:defRPr sz="2000" b="0" spc="-30">
                 <a:solidFill>
                   <a:srgbClr val="666666"/>
                 </a:solidFill>
-                <a:latin typeface="Arial"/>
-              </a:defRPr>
-            </a:pPr>
-            <a:r>
+                <a:latin typeface="Pretendard"/>
+                <a:ea typeface="Pretendard"/>
+                <a:cs typeface="Pretendard"/>
+              </a:defRPr>
+            </a:pPr>
+            <a:r>
+              <a:rPr lang="ko-KR" spc="-30" dirty="0">
+                <a:latin typeface="Pretendard"/>
+                <a:ea typeface="Pretendard"/>
+                <a:cs typeface="Pretendard"/>
+              </a:rPr>
               <a:t>→</a:t>
             </a:r>
           </a:p>
@@ -5650,10 +6475,10 @@
         </p:nvSpPr>
         <p:spPr>
           <a:xfrm>
-            <a:off x="2862071" y="2286000"/>
-            <a:ext cx="1874519" cy="1828800"/>
-          </a:xfrm>
-          <a:prstGeom prst="roundRect">
+            <a:off x="3042920" y="2286000"/>
+            <a:ext cx="1823720" cy="1828800"/>
+          </a:xfrm>
+          <a:prstGeom prst="rect">
             <a:avLst/>
           </a:prstGeom>
           <a:solidFill>
@@ -5683,6 +6508,11 @@
           <a:lstStyle/>
           <a:p>
             <a:pPr algn="ctr"/>
+            <a:endParaRPr spc="-27">
+              <a:latin typeface="Pretendard"/>
+              <a:ea typeface="Pretendard"/>
+              <a:cs typeface="Pretendard"/>
+            </a:endParaRPr>
           </a:p>
         </p:txBody>
       </p:sp>
@@ -5694,8 +6524,8 @@
         </p:nvSpPr>
         <p:spPr>
           <a:xfrm>
-            <a:off x="3039871" y="2377440"/>
-            <a:ext cx="457200" cy="365760"/>
+            <a:off x="3246120" y="2540000"/>
+            <a:ext cx="1417320" cy="381000"/>
           </a:xfrm>
           <a:prstGeom prst="rect">
             <a:avLst/>
@@ -5703,20 +6533,27 @@
           <a:noFill/>
         </p:spPr>
         <p:txBody>
-          <a:bodyPr wrap="square">
-            <a:spAutoFit/>
+          <a:bodyPr wrap="square" lIns="0" tIns="0" rIns="0" bIns="0" anchor="t">
+            <a:noAutofit/>
           </a:bodyPr>
           <a:lstStyle/>
           <a:p>
             <a:pPr algn="l">
-              <a:defRPr sz="2800" b="1">
+              <a:defRPr sz="2800" b="1" spc="-70">
                 <a:solidFill>
                   <a:srgbClr val="4ADE80"/>
                 </a:solidFill>
-                <a:latin typeface="Arial"/>
-              </a:defRPr>
-            </a:pPr>
-            <a:r>
+                <a:latin typeface="Pretendard"/>
+                <a:ea typeface="Pretendard"/>
+                <a:cs typeface="Pretendard"/>
+              </a:defRPr>
+            </a:pPr>
+            <a:r>
+              <a:rPr lang="ko-KR" spc="-70" dirty="0">
+                <a:latin typeface="Pretendard"/>
+                <a:ea typeface="Pretendard"/>
+                <a:cs typeface="Pretendard"/>
+              </a:rPr>
               <a:t>2</a:t>
             </a:r>
           </a:p>
@@ -5730,8 +6567,8 @@
         </p:nvSpPr>
         <p:spPr>
           <a:xfrm>
-            <a:off x="3039871" y="2834640"/>
-            <a:ext cx="1518919" cy="365760"/>
+            <a:off x="3246120" y="2971800"/>
+            <a:ext cx="1417320" cy="355600"/>
           </a:xfrm>
           <a:prstGeom prst="rect">
             <a:avLst/>
@@ -5739,20 +6576,27 @@
           <a:noFill/>
         </p:spPr>
         <p:txBody>
-          <a:bodyPr wrap="square">
-            <a:spAutoFit/>
+          <a:bodyPr wrap="square" lIns="0" tIns="0" rIns="0" bIns="0" anchor="t">
+            <a:noAutofit/>
           </a:bodyPr>
           <a:lstStyle/>
           <a:p>
             <a:pPr algn="l">
-              <a:defRPr sz="1600" b="1">
+              <a:defRPr sz="1600" b="1" spc="-24">
                 <a:solidFill>
                   <a:srgbClr val="F5F5F5"/>
                 </a:solidFill>
-                <a:latin typeface="Arial"/>
-              </a:defRPr>
-            </a:pPr>
-            <a:r>
+                <a:latin typeface="Pretendard"/>
+                <a:ea typeface="Pretendard"/>
+                <a:cs typeface="Pretendard"/>
+              </a:defRPr>
+            </a:pPr>
+            <a:r>
+              <a:rPr lang="ko-KR" spc="-24" dirty="0">
+                <a:latin typeface="Pretendard"/>
+                <a:ea typeface="Pretendard"/>
+                <a:cs typeface="Pretendard"/>
+              </a:rPr>
               <a:t>회의 연결</a:t>
             </a:r>
           </a:p>
@@ -5766,8 +6610,8 @@
         </p:nvSpPr>
         <p:spPr>
           <a:xfrm>
-            <a:off x="3039871" y="3200400"/>
-            <a:ext cx="1518919" cy="822960"/>
+            <a:off x="3246120" y="3403600"/>
+            <a:ext cx="1417320" cy="609600"/>
           </a:xfrm>
           <a:prstGeom prst="rect">
             <a:avLst/>
@@ -5775,24 +6619,39 @@
           <a:noFill/>
         </p:spPr>
         <p:txBody>
-          <a:bodyPr wrap="square">
-            <a:spAutoFit/>
+          <a:bodyPr wrap="square" lIns="0" tIns="0" rIns="0" bIns="0" anchor="t">
+            <a:noAutofit/>
           </a:bodyPr>
           <a:lstStyle/>
           <a:p>
             <a:pPr algn="l">
-              <a:defRPr sz="1150" b="0">
+              <a:lnSpc>
+                <a:spcPct val="140000"/>
+              </a:lnSpc>
+              <a:defRPr sz="1400" b="0" spc="-21">
                 <a:solidFill>
                   <a:srgbClr val="999999"/>
                 </a:solidFill>
-                <a:latin typeface="Arial"/>
-              </a:defRPr>
-            </a:pPr>
-            <a:r>
+                <a:latin typeface="Pretendard"/>
+                <a:ea typeface="Pretendard"/>
+                <a:cs typeface="Pretendard"/>
+              </a:defRPr>
+            </a:pPr>
+            <a:r>
+              <a:rPr lang="ko-KR" sz="1400" spc="-21" dirty="0">
+                <a:latin typeface="Pretendard"/>
+                <a:ea typeface="Pretendard"/>
+                <a:cs typeface="Pretendard"/>
+              </a:rPr>
               <a:t>이전 회의와 묶기</a:t>
             </a:r>
             <a:br/>
             <a:r>
+              <a:rPr lang="ko-KR" sz="1400" spc="-21" dirty="0">
+                <a:latin typeface="Pretendard"/>
+                <a:ea typeface="Pretendard"/>
+                <a:cs typeface="Pretendard"/>
+              </a:rPr>
               <a:t>기존 액션 이어 추적</a:t>
             </a:r>
           </a:p>
@@ -5806,8 +6665,8 @@
         </p:nvSpPr>
         <p:spPr>
           <a:xfrm>
-            <a:off x="4736590" y="2926080"/>
-            <a:ext cx="256032" cy="365760"/>
+            <a:off x="4866640" y="3022600"/>
+            <a:ext cx="304800" cy="355600"/>
           </a:xfrm>
           <a:prstGeom prst="rect">
             <a:avLst/>
@@ -5815,20 +6674,27 @@
           <a:noFill/>
         </p:spPr>
         <p:txBody>
-          <a:bodyPr wrap="square">
-            <a:spAutoFit/>
+          <a:bodyPr wrap="square" lIns="0" tIns="0" rIns="0" bIns="0" anchor="ctr">
+            <a:noAutofit/>
           </a:bodyPr>
           <a:lstStyle/>
           <a:p>
             <a:pPr algn="ctr">
-              <a:defRPr sz="2000" b="0">
+              <a:defRPr sz="2000" b="0" spc="-30">
                 <a:solidFill>
                   <a:srgbClr val="666666"/>
                 </a:solidFill>
-                <a:latin typeface="Arial"/>
-              </a:defRPr>
-            </a:pPr>
-            <a:r>
+                <a:latin typeface="Pretendard"/>
+                <a:ea typeface="Pretendard"/>
+                <a:cs typeface="Pretendard"/>
+              </a:defRPr>
+            </a:pPr>
+            <a:r>
+              <a:rPr lang="ko-KR" spc="-30" dirty="0">
+                <a:latin typeface="Pretendard"/>
+                <a:ea typeface="Pretendard"/>
+                <a:cs typeface="Pretendard"/>
+              </a:rPr>
               <a:t>→</a:t>
             </a:r>
           </a:p>
@@ -5842,10 +6708,10 @@
         </p:nvSpPr>
         <p:spPr>
           <a:xfrm>
-            <a:off x="4992622" y="2286000"/>
-            <a:ext cx="1874519" cy="1828800"/>
-          </a:xfrm>
-          <a:prstGeom prst="roundRect">
+            <a:off x="5171440" y="2286000"/>
+            <a:ext cx="1823720" cy="1828800"/>
+          </a:xfrm>
+          <a:prstGeom prst="rect">
             <a:avLst/>
           </a:prstGeom>
           <a:solidFill>
@@ -5875,6 +6741,11 @@
           <a:lstStyle/>
           <a:p>
             <a:pPr algn="ctr"/>
+            <a:endParaRPr spc="-27">
+              <a:latin typeface="Pretendard"/>
+              <a:ea typeface="Pretendard"/>
+              <a:cs typeface="Pretendard"/>
+            </a:endParaRPr>
           </a:p>
         </p:txBody>
       </p:sp>
@@ -5886,8 +6757,8 @@
         </p:nvSpPr>
         <p:spPr>
           <a:xfrm>
-            <a:off x="5170422" y="2377440"/>
-            <a:ext cx="457200" cy="365760"/>
+            <a:off x="5374640" y="2540000"/>
+            <a:ext cx="1417320" cy="381000"/>
           </a:xfrm>
           <a:prstGeom prst="rect">
             <a:avLst/>
@@ -5895,20 +6766,27 @@
           <a:noFill/>
         </p:spPr>
         <p:txBody>
-          <a:bodyPr wrap="square">
-            <a:spAutoFit/>
+          <a:bodyPr wrap="square" lIns="0" tIns="0" rIns="0" bIns="0" anchor="t">
+            <a:noAutofit/>
           </a:bodyPr>
           <a:lstStyle/>
           <a:p>
             <a:pPr algn="l">
-              <a:defRPr sz="2800" b="1">
+              <a:defRPr sz="2800" b="1" spc="-70">
                 <a:solidFill>
                   <a:srgbClr val="4ADE80"/>
                 </a:solidFill>
-                <a:latin typeface="Arial"/>
-              </a:defRPr>
-            </a:pPr>
-            <a:r>
+                <a:latin typeface="Pretendard"/>
+                <a:ea typeface="Pretendard"/>
+                <a:cs typeface="Pretendard"/>
+              </a:defRPr>
+            </a:pPr>
+            <a:r>
+              <a:rPr lang="ko-KR" spc="-70" dirty="0">
+                <a:latin typeface="Pretendard"/>
+                <a:ea typeface="Pretendard"/>
+                <a:cs typeface="Pretendard"/>
+              </a:rPr>
               <a:t>3</a:t>
             </a:r>
           </a:p>
@@ -5922,8 +6800,8 @@
         </p:nvSpPr>
         <p:spPr>
           <a:xfrm>
-            <a:off x="5170422" y="2834640"/>
-            <a:ext cx="1518919" cy="365760"/>
+            <a:off x="5374640" y="2971800"/>
+            <a:ext cx="1417320" cy="355600"/>
           </a:xfrm>
           <a:prstGeom prst="rect">
             <a:avLst/>
@@ -5931,20 +6809,27 @@
           <a:noFill/>
         </p:spPr>
         <p:txBody>
-          <a:bodyPr wrap="square">
-            <a:spAutoFit/>
+          <a:bodyPr wrap="square" lIns="0" tIns="0" rIns="0" bIns="0" anchor="t">
+            <a:noAutofit/>
           </a:bodyPr>
           <a:lstStyle/>
           <a:p>
             <a:pPr algn="l">
-              <a:defRPr sz="1600" b="1">
+              <a:defRPr sz="1600" b="1" spc="-24">
                 <a:solidFill>
                   <a:srgbClr val="F5F5F5"/>
                 </a:solidFill>
-                <a:latin typeface="Arial"/>
-              </a:defRPr>
-            </a:pPr>
-            <a:r>
+                <a:latin typeface="Pretendard"/>
+                <a:ea typeface="Pretendard"/>
+                <a:cs typeface="Pretendard"/>
+              </a:defRPr>
+            </a:pPr>
+            <a:r>
+              <a:rPr lang="ko-KR" spc="-24" dirty="0">
+                <a:latin typeface="Pretendard"/>
+                <a:ea typeface="Pretendard"/>
+                <a:cs typeface="Pretendard"/>
+              </a:rPr>
               <a:t>액션 · R&amp;R</a:t>
             </a:r>
           </a:p>
@@ -5958,8 +6843,8 @@
         </p:nvSpPr>
         <p:spPr>
           <a:xfrm>
-            <a:off x="5170422" y="3200400"/>
-            <a:ext cx="1518919" cy="822960"/>
+            <a:off x="5374640" y="3403600"/>
+            <a:ext cx="1417320" cy="609600"/>
           </a:xfrm>
           <a:prstGeom prst="rect">
             <a:avLst/>
@@ -5967,24 +6852,39 @@
           <a:noFill/>
         </p:spPr>
         <p:txBody>
-          <a:bodyPr wrap="square">
-            <a:spAutoFit/>
+          <a:bodyPr wrap="square" lIns="0" tIns="0" rIns="0" bIns="0" anchor="t">
+            <a:noAutofit/>
           </a:bodyPr>
           <a:lstStyle/>
           <a:p>
             <a:pPr algn="l">
-              <a:defRPr sz="1150" b="0">
+              <a:lnSpc>
+                <a:spcPct val="140000"/>
+              </a:lnSpc>
+              <a:defRPr sz="1400" b="0" spc="-21">
                 <a:solidFill>
                   <a:srgbClr val="999999"/>
                 </a:solidFill>
-                <a:latin typeface="Arial"/>
-              </a:defRPr>
-            </a:pPr>
-            <a:r>
+                <a:latin typeface="Pretendard"/>
+                <a:ea typeface="Pretendard"/>
+                <a:cs typeface="Pretendard"/>
+              </a:defRPr>
+            </a:pPr>
+            <a:r>
+              <a:rPr lang="ko-KR" sz="1400" spc="-21" dirty="0">
+                <a:latin typeface="Pretendard"/>
+                <a:ea typeface="Pretendard"/>
+                <a:cs typeface="Pretendard"/>
+              </a:rPr>
               <a:t>액션 추출·R&amp;R 추천</a:t>
             </a:r>
             <a:br/>
             <a:r>
+              <a:rPr lang="ko-KR" sz="1400" spc="-21" dirty="0">
+                <a:latin typeface="Pretendard"/>
+                <a:ea typeface="Pretendard"/>
+                <a:cs typeface="Pretendard"/>
+              </a:rPr>
               <a:t>모호하면 HITL 확인</a:t>
             </a:r>
           </a:p>
@@ -5998,8 +6898,8 @@
         </p:nvSpPr>
         <p:spPr>
           <a:xfrm>
-            <a:off x="6867141" y="2926080"/>
-            <a:ext cx="256032" cy="365760"/>
+            <a:off x="6995160" y="3022600"/>
+            <a:ext cx="304800" cy="355600"/>
           </a:xfrm>
           <a:prstGeom prst="rect">
             <a:avLst/>
@@ -6007,20 +6907,27 @@
           <a:noFill/>
         </p:spPr>
         <p:txBody>
-          <a:bodyPr wrap="square">
-            <a:spAutoFit/>
+          <a:bodyPr wrap="square" lIns="0" tIns="0" rIns="0" bIns="0" anchor="ctr">
+            <a:noAutofit/>
           </a:bodyPr>
           <a:lstStyle/>
           <a:p>
             <a:pPr algn="ctr">
-              <a:defRPr sz="2000" b="0">
+              <a:defRPr sz="2000" b="0" spc="-30">
                 <a:solidFill>
                   <a:srgbClr val="666666"/>
                 </a:solidFill>
-                <a:latin typeface="Arial"/>
-              </a:defRPr>
-            </a:pPr>
-            <a:r>
+                <a:latin typeface="Pretendard"/>
+                <a:ea typeface="Pretendard"/>
+                <a:cs typeface="Pretendard"/>
+              </a:defRPr>
+            </a:pPr>
+            <a:r>
+              <a:rPr lang="ko-KR" spc="-30" dirty="0">
+                <a:latin typeface="Pretendard"/>
+                <a:ea typeface="Pretendard"/>
+                <a:cs typeface="Pretendard"/>
+              </a:rPr>
               <a:t>→</a:t>
             </a:r>
           </a:p>
@@ -6034,10 +6941,10 @@
         </p:nvSpPr>
         <p:spPr>
           <a:xfrm>
-            <a:off x="7123173" y="2286000"/>
-            <a:ext cx="1874519" cy="1828800"/>
-          </a:xfrm>
-          <a:prstGeom prst="roundRect">
+            <a:off x="7299960" y="2286000"/>
+            <a:ext cx="1823720" cy="1828800"/>
+          </a:xfrm>
+          <a:prstGeom prst="rect">
             <a:avLst/>
           </a:prstGeom>
           <a:solidFill>
@@ -6067,6 +6974,11 @@
           <a:lstStyle/>
           <a:p>
             <a:pPr algn="ctr"/>
+            <a:endParaRPr spc="-27">
+              <a:latin typeface="Pretendard"/>
+              <a:ea typeface="Pretendard"/>
+              <a:cs typeface="Pretendard"/>
+            </a:endParaRPr>
           </a:p>
         </p:txBody>
       </p:sp>
@@ -6078,8 +6990,8 @@
         </p:nvSpPr>
         <p:spPr>
           <a:xfrm>
-            <a:off x="7300973" y="2377440"/>
-            <a:ext cx="457200" cy="365760"/>
+            <a:off x="7503160" y="2540000"/>
+            <a:ext cx="1417320" cy="381000"/>
           </a:xfrm>
           <a:prstGeom prst="rect">
             <a:avLst/>
@@ -6087,20 +6999,27 @@
           <a:noFill/>
         </p:spPr>
         <p:txBody>
-          <a:bodyPr wrap="square">
-            <a:spAutoFit/>
+          <a:bodyPr wrap="square" lIns="0" tIns="0" rIns="0" bIns="0" anchor="t">
+            <a:noAutofit/>
           </a:bodyPr>
           <a:lstStyle/>
           <a:p>
             <a:pPr algn="l">
-              <a:defRPr sz="2800" b="1">
+              <a:defRPr sz="2800" b="1" spc="-70">
                 <a:solidFill>
                   <a:srgbClr val="4ADE80"/>
                 </a:solidFill>
-                <a:latin typeface="Arial"/>
-              </a:defRPr>
-            </a:pPr>
-            <a:r>
+                <a:latin typeface="Pretendard"/>
+                <a:ea typeface="Pretendard"/>
+                <a:cs typeface="Pretendard"/>
+              </a:defRPr>
+            </a:pPr>
+            <a:r>
+              <a:rPr lang="ko-KR" spc="-70" dirty="0">
+                <a:latin typeface="Pretendard"/>
+                <a:ea typeface="Pretendard"/>
+                <a:cs typeface="Pretendard"/>
+              </a:rPr>
               <a:t>4</a:t>
             </a:r>
           </a:p>
@@ -6114,8 +7033,8 @@
         </p:nvSpPr>
         <p:spPr>
           <a:xfrm>
-            <a:off x="7300973" y="2834640"/>
-            <a:ext cx="1518919" cy="365760"/>
+            <a:off x="7503160" y="2971800"/>
+            <a:ext cx="1417320" cy="355600"/>
           </a:xfrm>
           <a:prstGeom prst="rect">
             <a:avLst/>
@@ -6123,20 +7042,27 @@
           <a:noFill/>
         </p:spPr>
         <p:txBody>
-          <a:bodyPr wrap="square">
-            <a:spAutoFit/>
+          <a:bodyPr wrap="square" lIns="0" tIns="0" rIns="0" bIns="0" anchor="t">
+            <a:noAutofit/>
           </a:bodyPr>
           <a:lstStyle/>
           <a:p>
             <a:pPr algn="l">
-              <a:defRPr sz="1600" b="1">
+              <a:defRPr sz="1600" b="1" spc="-24">
                 <a:solidFill>
                   <a:srgbClr val="F5F5F5"/>
                 </a:solidFill>
-                <a:latin typeface="Arial"/>
-              </a:defRPr>
-            </a:pPr>
-            <a:r>
+                <a:latin typeface="Pretendard"/>
+                <a:ea typeface="Pretendard"/>
+                <a:cs typeface="Pretendard"/>
+              </a:defRPr>
+            </a:pPr>
+            <a:r>
+              <a:rPr lang="ko-KR" spc="-24" dirty="0">
+                <a:latin typeface="Pretendard"/>
+                <a:ea typeface="Pretendard"/>
+                <a:cs typeface="Pretendard"/>
+              </a:rPr>
               <a:t>타임라인</a:t>
             </a:r>
           </a:p>
@@ -6150,8 +7076,8 @@
         </p:nvSpPr>
         <p:spPr>
           <a:xfrm>
-            <a:off x="7300973" y="3200400"/>
-            <a:ext cx="1518919" cy="822960"/>
+            <a:off x="7503160" y="3403600"/>
+            <a:ext cx="1417320" cy="609600"/>
           </a:xfrm>
           <a:prstGeom prst="rect">
             <a:avLst/>
@@ -6159,24 +7085,39 @@
           <a:noFill/>
         </p:spPr>
         <p:txBody>
-          <a:bodyPr wrap="square">
-            <a:spAutoFit/>
+          <a:bodyPr wrap="square" lIns="0" tIns="0" rIns="0" bIns="0" anchor="t">
+            <a:noAutofit/>
           </a:bodyPr>
           <a:lstStyle/>
           <a:p>
             <a:pPr algn="l">
-              <a:defRPr sz="1150" b="0">
+              <a:lnSpc>
+                <a:spcPct val="140000"/>
+              </a:lnSpc>
+              <a:defRPr sz="1400" b="0" spc="-21">
                 <a:solidFill>
                   <a:srgbClr val="999999"/>
                 </a:solidFill>
-                <a:latin typeface="Arial"/>
-              </a:defRPr>
-            </a:pPr>
-            <a:r>
+                <a:latin typeface="Pretendard"/>
+                <a:ea typeface="Pretendard"/>
+                <a:cs typeface="Pretendard"/>
+              </a:defRPr>
+            </a:pPr>
+            <a:r>
+              <a:rPr lang="ko-KR" sz="1400" spc="-21" dirty="0">
+                <a:latin typeface="Pretendard"/>
+                <a:ea typeface="Pretendard"/>
+                <a:cs typeface="Pretendard"/>
+              </a:rPr>
               <a:t>기한·선행관계 역산</a:t>
             </a:r>
             <a:br/>
             <a:r>
+              <a:rPr lang="ko-KR" sz="1400" spc="-21" dirty="0">
+                <a:latin typeface="Pretendard"/>
+                <a:ea typeface="Pretendard"/>
+                <a:cs typeface="Pretendard"/>
+              </a:rPr>
               <a:t>변경사항 반영</a:t>
             </a:r>
           </a:p>
@@ -6190,8 +7131,8 @@
         </p:nvSpPr>
         <p:spPr>
           <a:xfrm>
-            <a:off x="8997692" y="2926080"/>
-            <a:ext cx="256032" cy="365760"/>
+            <a:off x="9123680" y="3022600"/>
+            <a:ext cx="304800" cy="355600"/>
           </a:xfrm>
           <a:prstGeom prst="rect">
             <a:avLst/>
@@ -6199,20 +7140,27 @@
           <a:noFill/>
         </p:spPr>
         <p:txBody>
-          <a:bodyPr wrap="square">
-            <a:spAutoFit/>
+          <a:bodyPr wrap="square" lIns="0" tIns="0" rIns="0" bIns="0" anchor="ctr">
+            <a:noAutofit/>
           </a:bodyPr>
           <a:lstStyle/>
           <a:p>
             <a:pPr algn="ctr">
-              <a:defRPr sz="2000" b="0">
+              <a:defRPr sz="2000" b="0" spc="-30">
                 <a:solidFill>
                   <a:srgbClr val="666666"/>
                 </a:solidFill>
-                <a:latin typeface="Arial"/>
-              </a:defRPr>
-            </a:pPr>
-            <a:r>
+                <a:latin typeface="Pretendard"/>
+                <a:ea typeface="Pretendard"/>
+                <a:cs typeface="Pretendard"/>
+              </a:defRPr>
+            </a:pPr>
+            <a:r>
+              <a:rPr lang="ko-KR" spc="-30" dirty="0">
+                <a:latin typeface="Pretendard"/>
+                <a:ea typeface="Pretendard"/>
+                <a:cs typeface="Pretendard"/>
+              </a:rPr>
               <a:t>→</a:t>
             </a:r>
           </a:p>
@@ -6226,10 +7174,10 @@
         </p:nvSpPr>
         <p:spPr>
           <a:xfrm>
-            <a:off x="9253724" y="2286000"/>
-            <a:ext cx="1874519" cy="1828800"/>
-          </a:xfrm>
-          <a:prstGeom prst="roundRect">
+            <a:off x="9428480" y="2286000"/>
+            <a:ext cx="1823720" cy="1828800"/>
+          </a:xfrm>
+          <a:prstGeom prst="rect">
             <a:avLst/>
           </a:prstGeom>
           <a:solidFill>
@@ -6259,6 +7207,11 @@
           <a:lstStyle/>
           <a:p>
             <a:pPr algn="ctr"/>
+            <a:endParaRPr spc="-27">
+              <a:latin typeface="Pretendard"/>
+              <a:ea typeface="Pretendard"/>
+              <a:cs typeface="Pretendard"/>
+            </a:endParaRPr>
           </a:p>
         </p:txBody>
       </p:sp>
@@ -6270,8 +7223,8 @@
         </p:nvSpPr>
         <p:spPr>
           <a:xfrm>
-            <a:off x="9431524" y="2377440"/>
-            <a:ext cx="457200" cy="365760"/>
+            <a:off x="9631680" y="2540000"/>
+            <a:ext cx="1417320" cy="381000"/>
           </a:xfrm>
           <a:prstGeom prst="rect">
             <a:avLst/>
@@ -6279,132 +7232,168 @@
           <a:noFill/>
         </p:spPr>
         <p:txBody>
-          <a:bodyPr wrap="square">
+          <a:bodyPr wrap="square" lIns="0" tIns="0" rIns="0" bIns="0" anchor="t">
+            <a:noAutofit/>
+          </a:bodyPr>
+          <a:lstStyle/>
+          <a:p>
+            <a:pPr algn="l">
+              <a:defRPr sz="2800" b="1" spc="-70">
+                <a:solidFill>
+                  <a:srgbClr val="4ADE80"/>
+                </a:solidFill>
+                <a:latin typeface="Pretendard"/>
+                <a:ea typeface="Pretendard"/>
+                <a:cs typeface="Pretendard"/>
+              </a:defRPr>
+            </a:pPr>
+            <a:r>
+              <a:rPr lang="ko-KR" spc="-70" dirty="0">
+                <a:latin typeface="Pretendard"/>
+                <a:ea typeface="Pretendard"/>
+                <a:cs typeface="Pretendard"/>
+              </a:rPr>
+              <a:t>5</a:t>
+            </a:r>
+          </a:p>
+        </p:txBody>
+      </p:sp>
+      <p:sp>
+        <p:nvSpPr>
+          <p:cNvPr id="26" name="TextBox 25"/>
+          <p:cNvSpPr txBox="1"/>
+          <p:nvPr/>
+        </p:nvSpPr>
+        <p:spPr>
+          <a:xfrm>
+            <a:off x="9631680" y="2971800"/>
+            <a:ext cx="1417320" cy="355600"/>
+          </a:xfrm>
+          <a:prstGeom prst="rect">
+            <a:avLst/>
+          </a:prstGeom>
+          <a:noFill/>
+        </p:spPr>
+        <p:txBody>
+          <a:bodyPr wrap="square" lIns="0" tIns="0" rIns="0" bIns="0" anchor="t">
+            <a:noAutofit/>
+          </a:bodyPr>
+          <a:lstStyle/>
+          <a:p>
+            <a:pPr algn="l">
+              <a:defRPr sz="1600" b="1" spc="-24">
+                <a:solidFill>
+                  <a:srgbClr val="F5F5F5"/>
+                </a:solidFill>
+                <a:latin typeface="Pretendard"/>
+                <a:ea typeface="Pretendard"/>
+                <a:cs typeface="Pretendard"/>
+              </a:defRPr>
+            </a:pPr>
+            <a:r>
+              <a:rPr lang="ko-KR" spc="-24" dirty="0">
+                <a:latin typeface="Pretendard"/>
+                <a:ea typeface="Pretendard"/>
+                <a:cs typeface="Pretendard"/>
+              </a:rPr>
+              <a:t>후속관리</a:t>
+            </a:r>
+          </a:p>
+        </p:txBody>
+      </p:sp>
+      <p:sp>
+        <p:nvSpPr>
+          <p:cNvPr id="27" name="TextBox 26"/>
+          <p:cNvSpPr txBox="1"/>
+          <p:nvPr/>
+        </p:nvSpPr>
+        <p:spPr>
+          <a:xfrm>
+            <a:off x="9631680" y="3403600"/>
+            <a:ext cx="1417320" cy="609600"/>
+          </a:xfrm>
+          <a:prstGeom prst="rect">
+            <a:avLst/>
+          </a:prstGeom>
+          <a:noFill/>
+        </p:spPr>
+        <p:txBody>
+          <a:bodyPr wrap="square" lIns="0" tIns="0" rIns="0" bIns="0" anchor="t">
+            <a:noAutofit/>
+          </a:bodyPr>
+          <a:lstStyle/>
+          <a:p>
+            <a:pPr algn="l">
+              <a:lnSpc>
+                <a:spcPct val="140000"/>
+              </a:lnSpc>
+              <a:defRPr sz="1400" b="0" spc="-21">
+                <a:solidFill>
+                  <a:srgbClr val="999999"/>
+                </a:solidFill>
+                <a:latin typeface="Pretendard"/>
+                <a:ea typeface="Pretendard"/>
+                <a:cs typeface="Pretendard"/>
+              </a:defRPr>
+            </a:pPr>
+            <a:r>
+              <a:rPr lang="ko-KR" sz="1400" spc="-21" dirty="0">
+                <a:latin typeface="Pretendard"/>
+                <a:ea typeface="Pretendard"/>
+                <a:cs typeface="Pretendard"/>
+              </a:rPr>
+              <a:t>진행 확인·답변 해석</a:t>
+            </a:r>
+            <a:br/>
+            <a:r>
+              <a:rPr lang="ko-KR" sz="1400" spc="-21" dirty="0">
+                <a:latin typeface="Pretendard"/>
+                <a:ea typeface="Pretendard"/>
+                <a:cs typeface="Pretendard"/>
+              </a:rPr>
+              <a:t>미완료 → 다음 안건</a:t>
+            </a:r>
+          </a:p>
+        </p:txBody>
+      </p:sp>
+      <p:sp>
+        <p:nvSpPr>
+          <p:cNvPr id="28" name="TextBox 27"/>
+          <p:cNvSpPr txBox="1"/>
+          <p:nvPr/>
+        </p:nvSpPr>
+        <p:spPr>
+          <a:xfrm>
+            <a:off x="2286000" y="4292600"/>
+            <a:ext cx="7589520" cy="365760"/>
+          </a:xfrm>
+          <a:prstGeom prst="rect">
+            <a:avLst/>
+          </a:prstGeom>
+          <a:noFill/>
+        </p:spPr>
+        <p:txBody>
+          <a:bodyPr wrap="square" lIns="0" rIns="0">
             <a:spAutoFit/>
           </a:bodyPr>
           <a:lstStyle/>
           <a:p>
-            <a:pPr algn="l">
-              <a:defRPr sz="2800" b="1">
+            <a:pPr algn="ctr">
+              <a:defRPr sz="1500" b="1" spc="-23">
                 <a:solidFill>
                   <a:srgbClr val="4ADE80"/>
                 </a:solidFill>
-                <a:latin typeface="Arial"/>
-              </a:defRPr>
-            </a:pPr>
-            <a:r>
-              <a:t>5</a:t>
-            </a:r>
-          </a:p>
-        </p:txBody>
-      </p:sp>
-      <p:sp>
-        <p:nvSpPr>
-          <p:cNvPr id="26" name="TextBox 25"/>
-          <p:cNvSpPr txBox="1"/>
-          <p:nvPr/>
-        </p:nvSpPr>
-        <p:spPr>
-          <a:xfrm>
-            <a:off x="9431524" y="2834640"/>
-            <a:ext cx="1518919" cy="365760"/>
-          </a:xfrm>
-          <a:prstGeom prst="rect">
-            <a:avLst/>
-          </a:prstGeom>
-          <a:noFill/>
-        </p:spPr>
-        <p:txBody>
-          <a:bodyPr wrap="square">
-            <a:spAutoFit/>
-          </a:bodyPr>
-          <a:lstStyle/>
-          <a:p>
-            <a:pPr algn="l">
-              <a:defRPr sz="1600" b="1">
-                <a:solidFill>
-                  <a:srgbClr val="F5F5F5"/>
-                </a:solidFill>
-                <a:latin typeface="Arial"/>
-              </a:defRPr>
-            </a:pPr>
-            <a:r>
-              <a:t>후속관리</a:t>
-            </a:r>
-          </a:p>
-        </p:txBody>
-      </p:sp>
-      <p:sp>
-        <p:nvSpPr>
-          <p:cNvPr id="27" name="TextBox 26"/>
-          <p:cNvSpPr txBox="1"/>
-          <p:nvPr/>
-        </p:nvSpPr>
-        <p:spPr>
-          <a:xfrm>
-            <a:off x="9431524" y="3200400"/>
-            <a:ext cx="1518919" cy="822960"/>
-          </a:xfrm>
-          <a:prstGeom prst="rect">
-            <a:avLst/>
-          </a:prstGeom>
-          <a:noFill/>
-        </p:spPr>
-        <p:txBody>
-          <a:bodyPr wrap="square">
-            <a:spAutoFit/>
-          </a:bodyPr>
-          <a:lstStyle/>
-          <a:p>
-            <a:pPr algn="l">
-              <a:defRPr sz="1150" b="0">
-                <a:solidFill>
-                  <a:srgbClr val="999999"/>
-                </a:solidFill>
-                <a:latin typeface="Arial"/>
-              </a:defRPr>
-            </a:pPr>
-            <a:r>
-              <a:t>진행 확인·답변 해석</a:t>
-            </a:r>
-            <a:br/>
-            <a:r>
-              <a:t>미완료 → 다음 안건</a:t>
-            </a:r>
-          </a:p>
-        </p:txBody>
-      </p:sp>
-      <p:sp>
-        <p:nvSpPr>
-          <p:cNvPr id="28" name="TextBox 27"/>
-          <p:cNvSpPr txBox="1"/>
-          <p:nvPr/>
-        </p:nvSpPr>
-        <p:spPr>
-          <a:xfrm>
-            <a:off x="2286000" y="4343400"/>
-            <a:ext cx="7589520" cy="365760"/>
-          </a:xfrm>
-          <a:prstGeom prst="rect">
-            <a:avLst/>
-          </a:prstGeom>
-          <a:noFill/>
-        </p:spPr>
-        <p:txBody>
-          <a:bodyPr wrap="square">
-            <a:spAutoFit/>
-          </a:bodyPr>
-          <a:lstStyle/>
-          <a:p>
-            <a:pPr algn="ctr">
-              <a:defRPr sz="1500" b="1">
-                <a:solidFill>
-                  <a:srgbClr val="4ADE80"/>
-                </a:solidFill>
-                <a:latin typeface="Arial"/>
-              </a:defRPr>
-            </a:pPr>
-            <a:r>
+                <a:latin typeface="Pretendard"/>
+                <a:ea typeface="Pretendard"/>
+                <a:cs typeface="Pretendard"/>
+              </a:defRPr>
+            </a:pPr>
+            <a:r>
+              <a:rPr lang="ko-KR" spc="-23" dirty="0">
+                <a:latin typeface="Pretendard"/>
+                <a:ea typeface="Pretendard"/>
+                <a:cs typeface="Pretendard"/>
+              </a:rPr>
               <a:t>↻  다음 회의 녹음 → 이전 회의·액션과 자동 연결  (closed loop)</a:t>
             </a:r>
           </a:p>
@@ -6418,7 +7407,7 @@
         </p:nvSpPr>
         <p:spPr>
           <a:xfrm>
-            <a:off x="914400" y="4937760"/>
+            <a:off x="914400" y="4800600"/>
             <a:ext cx="10332720" cy="12700"/>
           </a:xfrm>
           <a:prstGeom prst="rect">
@@ -6451,6 +7440,11 @@
           <a:lstStyle/>
           <a:p>
             <a:pPr algn="ctr"/>
+            <a:endParaRPr spc="-27">
+              <a:latin typeface="Pretendard"/>
+              <a:ea typeface="Pretendard"/>
+              <a:cs typeface="Pretendard"/>
+            </a:endParaRPr>
           </a:p>
         </p:txBody>
       </p:sp>
@@ -6462,7 +7456,7 @@
         </p:nvSpPr>
         <p:spPr>
           <a:xfrm>
-            <a:off x="914400" y="5166360"/>
+            <a:off x="914400" y="5003800"/>
             <a:ext cx="5486400" cy="274320"/>
           </a:xfrm>
           <a:prstGeom prst="rect">
@@ -6471,20 +7465,27 @@
           <a:noFill/>
         </p:spPr>
         <p:txBody>
-          <a:bodyPr wrap="square">
+          <a:bodyPr wrap="square" lIns="0" rIns="0">
             <a:spAutoFit/>
           </a:bodyPr>
           <a:lstStyle/>
           <a:p>
             <a:pPr algn="l">
-              <a:defRPr sz="1400" b="1">
+              <a:defRPr sz="1500" b="1" spc="-23">
                 <a:solidFill>
                   <a:srgbClr val="F5F5F5"/>
                 </a:solidFill>
-                <a:latin typeface="Arial"/>
-              </a:defRPr>
-            </a:pPr>
-            <a:r>
+                <a:latin typeface="Pretendard"/>
+                <a:ea typeface="Pretendard"/>
+                <a:cs typeface="Pretendard"/>
+              </a:defRPr>
+            </a:pPr>
+            <a:r>
+              <a:rPr lang="ko-KR" sz="1500" spc="-23" dirty="0">
+                <a:latin typeface="Pretendard"/>
+                <a:ea typeface="Pretendard"/>
+                <a:cs typeface="Pretendard"/>
+              </a:rPr>
               <a:t>왜 AI여야 하는가 (규칙으로는 불가능한 3가지)</a:t>
             </a:r>
           </a:p>
@@ -6498,8 +7499,8 @@
         </p:nvSpPr>
         <p:spPr>
           <a:xfrm>
-            <a:off x="914400" y="5532120"/>
-            <a:ext cx="10515600" cy="1097280"/>
+            <a:off x="914400" y="5384800"/>
+            <a:ext cx="10515600" cy="995144"/>
           </a:xfrm>
           <a:prstGeom prst="rect">
             <a:avLst/>
@@ -6507,7 +7508,7 @@
           <a:noFill/>
         </p:spPr>
         <p:txBody>
-          <a:bodyPr wrap="square">
+          <a:bodyPr wrap="square" lIns="0" rIns="0">
             <a:spAutoFit/>
           </a:bodyPr>
           <a:lstStyle/>
@@ -6516,14 +7517,21 @@
               <a:spcAft>
                 <a:spcPts val="1000"/>
               </a:spcAft>
-              <a:defRPr sz="1300" b="0">
+              <a:defRPr sz="1400" b="0" spc="-21">
                 <a:solidFill>
                   <a:srgbClr val="999999"/>
                 </a:solidFill>
-                <a:latin typeface="Arial"/>
-              </a:defRPr>
-            </a:pPr>
-            <a:r>
+                <a:latin typeface="Pretendard"/>
+                <a:ea typeface="Pretendard"/>
+                <a:cs typeface="Pretendard"/>
+              </a:defRPr>
+            </a:pPr>
+            <a:r>
+              <a:rPr lang="ko-KR" sz="1400" spc="-21" dirty="0">
+                <a:latin typeface="Pretendard"/>
+                <a:ea typeface="Pretendard"/>
+                <a:cs typeface="Pretendard"/>
+              </a:rPr>
               <a:t>“그건 제가 한번 볼게요”  →  액션아이템 판단 (한국어 화법 맥락)</a:t>
             </a:r>
           </a:p>
@@ -6532,15 +7540,38 @@
               <a:spcAft>
                 <a:spcPts val="1000"/>
               </a:spcAft>
-              <a:defRPr sz="1300" b="0">
+              <a:defRPr sz="1400" b="0" spc="-21">
                 <a:solidFill>
                   <a:srgbClr val="999999"/>
                 </a:solidFill>
-                <a:latin typeface="Arial"/>
-              </a:defRPr>
-            </a:pPr>
-            <a:r>
-              <a:t>“중간발표 전까지는 돼야죠”  →  암묵적 기한을 실제 날짜로 변환</a:t>
+                <a:latin typeface="Pretendard"/>
+                <a:ea typeface="Pretendard"/>
+                <a:cs typeface="Pretendard"/>
+              </a:defRPr>
+            </a:pPr>
+            <a:r>
+              <a:rPr lang="ko-KR" sz="1400" spc="-21" dirty="0">
+                <a:latin typeface="Pretendard"/>
+                <a:ea typeface="Pretendard"/>
+                <a:cs typeface="Pretendard"/>
+              </a:rPr>
+              <a:t>“</a:t>
+            </a:r>
+            <a:r>
+              <a:rPr lang="ko-KR" altLang="en-US" sz="1400" spc="-21" dirty="0">
+                <a:latin typeface="Pretendard"/>
+                <a:ea typeface="Pretendard"/>
+                <a:cs typeface="Pretendard"/>
+              </a:rPr>
+              <a:t>다음 보고</a:t>
+            </a:r>
+            <a:r>
+              <a:rPr lang="ko-KR" sz="1400" spc="-21" dirty="0">
+                <a:latin typeface="Pretendard"/>
+                <a:ea typeface="Pretendard"/>
+                <a:cs typeface="Pretendard"/>
+              </a:rPr>
+              <a:t> 전까지는 돼야죠”  →  암묵적 기한을 실제 날짜로 변환</a:t>
             </a:r>
           </a:p>
           <a:p>
@@ -6548,14 +7579,21 @@
               <a:spcAft>
                 <a:spcPts val="1000"/>
               </a:spcAft>
-              <a:defRPr sz="1300" b="0">
+              <a:defRPr sz="1400" b="0" spc="-21">
                 <a:solidFill>
                   <a:srgbClr val="999999"/>
                 </a:solidFill>
-                <a:latin typeface="Arial"/>
-              </a:defRPr>
-            </a:pPr>
-            <a:r>
+                <a:latin typeface="Pretendard"/>
+                <a:ea typeface="Pretendard"/>
+                <a:cs typeface="Pretendard"/>
+              </a:defRPr>
+            </a:pPr>
+            <a:r>
+              <a:rPr lang="ko-KR" sz="1400" spc="-21" dirty="0">
+                <a:latin typeface="Pretendard"/>
+                <a:ea typeface="Pretendard"/>
+                <a:cs typeface="Pretendard"/>
+              </a:rPr>
               <a:t>“자료가 아직 안 와서요”  →  막힘(blocker) 상태 자동 분류</a:t>
             </a:r>
           </a:p>
@@ -6569,7 +7607,7 @@
         </p:nvSpPr>
         <p:spPr>
           <a:xfrm>
-            <a:off x="11430000" y="6446520"/>
+            <a:off x="10706100" y="6350000"/>
             <a:ext cx="548640" cy="274320"/>
           </a:xfrm>
           <a:prstGeom prst="rect">
@@ -6578,26 +7616,38 @@
           <a:noFill/>
         </p:spPr>
         <p:txBody>
-          <a:bodyPr wrap="square">
+          <a:bodyPr wrap="square" lIns="0" rIns="0">
             <a:spAutoFit/>
           </a:bodyPr>
           <a:lstStyle/>
           <a:p>
             <a:pPr algn="r">
-              <a:defRPr sz="1000" b="0">
+              <a:defRPr sz="1000" b="0" spc="-10">
                 <a:solidFill>
                   <a:srgbClr val="666666"/>
                 </a:solidFill>
-                <a:latin typeface="Arial"/>
-              </a:defRPr>
-            </a:pPr>
-            <a:r>
+                <a:latin typeface="Pretendard"/>
+                <a:ea typeface="Pretendard"/>
+                <a:cs typeface="Pretendard"/>
+              </a:defRPr>
+            </a:pPr>
+            <a:r>
+              <a:rPr lang="ko-KR" spc="-10" dirty="0">
+                <a:latin typeface="Pretendard"/>
+                <a:ea typeface="Pretendard"/>
+                <a:cs typeface="Pretendard"/>
+              </a:rPr>
               <a:t>4</a:t>
             </a:r>
           </a:p>
         </p:txBody>
       </p:sp>
     </p:spTree>
+    <p:extLst>
+      <p:ext uri="{BB962C8B-B14F-4D97-AF65-F5344CB8AC3E}">
+        <p14:creationId xmlns:p14="http://schemas.microsoft.com/office/powerpoint/2010/main" val="97497589"/>
+      </p:ext>
+    </p:extLst>
   </p:cSld>
   <p:clrMapOvr>
     <a:masterClrMapping/>
@@ -6606,7 +7656,7 @@
 </file>
 
 <file path=ppt/slides/slide5.xml><?xml version="1.0" encoding="utf-8"?>
-<p:sld xmlns:a="http://schemas.openxmlformats.org/drawingml/2006/main" xmlns:p="http://schemas.openxmlformats.org/presentationml/2006/main" xmlns:r="http://schemas.openxmlformats.org/officeDocument/2006/relationships">
+<p:sld xmlns:a="http://schemas.openxmlformats.org/drawingml/2006/main" xmlns:r="http://schemas.openxmlformats.org/officeDocument/2006/relationships" xmlns:p="http://schemas.openxmlformats.org/presentationml/2006/main">
   <p:cSld>
     <p:bg>
       <p:bgPr>
@@ -6622,7 +7672,14 @@
         <p:cNvGrpSpPr/>
         <p:nvPr/>
       </p:nvGrpSpPr>
-      <p:grpSpPr/>
+      <p:grpSpPr>
+        <a:xfrm>
+          <a:off x="0" y="0"/>
+          <a:ext cx="0" cy="0"/>
+          <a:chOff x="0" y="0"/>
+          <a:chExt cx="0" cy="0"/>
+        </a:xfrm>
+      </p:grpSpPr>
       <p:sp>
         <p:nvSpPr>
           <p:cNvPr id="2" name="Rounded Rectangle 1"/>
@@ -6634,7 +7691,7 @@
             <a:off x="914400" y="640080"/>
             <a:ext cx="1270000" cy="355600"/>
           </a:xfrm>
-          <a:prstGeom prst="roundRect">
+          <a:prstGeom prst="rect">
             <a:avLst/>
           </a:prstGeom>
           <a:solidFill>
@@ -6660,18 +7717,25 @@
           </a:fontRef>
         </p:style>
         <p:txBody>
-          <a:bodyPr rtlCol="0" anchor="ctr" wrap="none" lIns="127000" rIns="127000" tIns="25400" bIns="25400"/>
+          <a:bodyPr wrap="none" lIns="127000" tIns="25400" rIns="127000" bIns="25400" rtlCol="0" anchor="ctr"/>
           <a:lstStyle/>
           <a:p>
             <a:pPr algn="ctr">
-              <a:defRPr sz="1100" b="1">
+              <a:defRPr sz="1100" b="1" spc="-11">
                 <a:solidFill>
                   <a:srgbClr val="0F0F0F"/>
                 </a:solidFill>
-                <a:latin typeface="Arial"/>
-              </a:defRPr>
-            </a:pPr>
-            <a:r>
+                <a:latin typeface="Pretendard"/>
+                <a:ea typeface="Pretendard"/>
+                <a:cs typeface="Pretendard"/>
+              </a:defRPr>
+            </a:pPr>
+            <a:r>
+              <a:rPr lang="ko-KR" spc="-11" dirty="0">
+                <a:latin typeface="Pretendard"/>
+                <a:ea typeface="Pretendard"/>
+                <a:cs typeface="Pretendard"/>
+              </a:rPr>
               <a:t>성공 기준</a:t>
             </a:r>
           </a:p>
@@ -6694,261 +7758,28 @@
           <a:noFill/>
         </p:spPr>
         <p:txBody>
-          <a:bodyPr wrap="square">
+          <a:bodyPr wrap="square" lIns="0" rIns="0">
             <a:spAutoFit/>
           </a:bodyPr>
           <a:lstStyle/>
           <a:p>
             <a:pPr algn="l">
-              <a:defRPr sz="4000" b="1">
+              <a:defRPr sz="4000" b="1" spc="-100">
                 <a:solidFill>
                   <a:srgbClr val="F5F5F5"/>
                 </a:solidFill>
-                <a:latin typeface="Arial"/>
-              </a:defRPr>
-            </a:pPr>
-            <a:r>
+                <a:latin typeface="Pretendard"/>
+                <a:ea typeface="Pretendard"/>
+                <a:cs typeface="Pretendard"/>
+              </a:defRPr>
+            </a:pPr>
+            <a:r>
+              <a:rPr lang="ko-KR" spc="-100" dirty="0">
+                <a:latin typeface="Pretendard"/>
+                <a:ea typeface="Pretendard"/>
+                <a:cs typeface="Pretendard"/>
+              </a:rPr>
               <a:t>회의 이후, 사람이 챙기는 부담이 줄었는가</a:t>
-            </a:r>
-          </a:p>
-        </p:txBody>
-      </p:sp>
-      <p:sp>
-        <p:nvSpPr>
-          <p:cNvPr id="4" name="Rounded Rectangle 3"/>
-          <p:cNvSpPr/>
-          <p:nvPr/>
-        </p:nvSpPr>
-        <p:spPr>
-          <a:xfrm>
-            <a:off x="914400" y="2194560"/>
-            <a:ext cx="5074920" cy="822960"/>
-          </a:xfrm>
-          <a:prstGeom prst="roundRect">
-            <a:avLst/>
-          </a:prstGeom>
-          <a:solidFill>
-            <a:srgbClr val="222222"/>
-          </a:solidFill>
-          <a:ln>
-            <a:noFill/>
-          </a:ln>
-          <a:effectLst/>
-        </p:spPr>
-        <p:style>
-          <a:lnRef idx="1">
-            <a:schemeClr val="accent1"/>
-          </a:lnRef>
-          <a:fillRef idx="3">
-            <a:schemeClr val="accent1"/>
-          </a:fillRef>
-          <a:effectRef idx="2">
-            <a:schemeClr val="accent1"/>
-          </a:effectRef>
-          <a:fontRef idx="minor">
-            <a:schemeClr val="lt1"/>
-          </a:fontRef>
-        </p:style>
-        <p:txBody>
-          <a:bodyPr rtlCol="0" anchor="ctr"/>
-          <a:lstStyle/>
-          <a:p>
-            <a:pPr algn="ctr"/>
-          </a:p>
-        </p:txBody>
-      </p:sp>
-      <p:sp>
-        <p:nvSpPr>
-          <p:cNvPr id="5" name="TextBox 4"/>
-          <p:cNvSpPr txBox="1"/>
-          <p:nvPr/>
-        </p:nvSpPr>
-        <p:spPr>
-          <a:xfrm>
-            <a:off x="1188720" y="2304288"/>
-            <a:ext cx="1463040" cy="320040"/>
-          </a:xfrm>
-          <a:prstGeom prst="rect">
-            <a:avLst/>
-          </a:prstGeom>
-          <a:noFill/>
-        </p:spPr>
-        <p:txBody>
-          <a:bodyPr wrap="square">
-            <a:spAutoFit/>
-          </a:bodyPr>
-          <a:lstStyle/>
-          <a:p>
-            <a:pPr algn="l">
-              <a:defRPr sz="1500" b="1">
-                <a:solidFill>
-                  <a:srgbClr val="4ADE80"/>
-                </a:solidFill>
-                <a:latin typeface="Arial"/>
-              </a:defRPr>
-            </a:pPr>
-            <a:r>
-              <a:t>① 구현 성공</a:t>
-            </a:r>
-          </a:p>
-        </p:txBody>
-      </p:sp>
-      <p:sp>
-        <p:nvSpPr>
-          <p:cNvPr id="6" name="TextBox 5"/>
-          <p:cNvSpPr txBox="1"/>
-          <p:nvPr/>
-        </p:nvSpPr>
-        <p:spPr>
-          <a:xfrm>
-            <a:off x="2651760" y="2304288"/>
-            <a:ext cx="3200400" cy="640080"/>
-          </a:xfrm>
-          <a:prstGeom prst="rect">
-            <a:avLst/>
-          </a:prstGeom>
-          <a:noFill/>
-        </p:spPr>
-        <p:txBody>
-          <a:bodyPr wrap="square">
-            <a:spAutoFit/>
-          </a:bodyPr>
-          <a:lstStyle/>
-          <a:p>
-            <a:pPr algn="l">
-              <a:defRPr sz="1150" b="0">
-                <a:solidFill>
-                  <a:srgbClr val="999999"/>
-                </a:solidFill>
-                <a:latin typeface="Arial"/>
-              </a:defRPr>
-            </a:pPr>
-            <a:r>
-              <a:t>회의 가져오기 → 이전 회의 연결 → 액션 확인</a:t>
-            </a:r>
-            <a:br/>
-            <a:r>
-              <a:t>→ 후속관리가 실제로 작동하는가</a:t>
-            </a:r>
-          </a:p>
-        </p:txBody>
-      </p:sp>
-      <p:sp>
-        <p:nvSpPr>
-          <p:cNvPr id="7" name="Rounded Rectangle 6"/>
-          <p:cNvSpPr/>
-          <p:nvPr/>
-        </p:nvSpPr>
-        <p:spPr>
-          <a:xfrm>
-            <a:off x="6172200" y="2194560"/>
-            <a:ext cx="5074920" cy="822960"/>
-          </a:xfrm>
-          <a:prstGeom prst="roundRect">
-            <a:avLst/>
-          </a:prstGeom>
-          <a:solidFill>
-            <a:srgbClr val="222222"/>
-          </a:solidFill>
-          <a:ln>
-            <a:noFill/>
-          </a:ln>
-          <a:effectLst/>
-        </p:spPr>
-        <p:style>
-          <a:lnRef idx="1">
-            <a:schemeClr val="accent1"/>
-          </a:lnRef>
-          <a:fillRef idx="3">
-            <a:schemeClr val="accent1"/>
-          </a:fillRef>
-          <a:effectRef idx="2">
-            <a:schemeClr val="accent1"/>
-          </a:effectRef>
-          <a:fontRef idx="minor">
-            <a:schemeClr val="lt1"/>
-          </a:fontRef>
-        </p:style>
-        <p:txBody>
-          <a:bodyPr rtlCol="0" anchor="ctr"/>
-          <a:lstStyle/>
-          <a:p>
-            <a:pPr algn="ctr"/>
-          </a:p>
-        </p:txBody>
-      </p:sp>
-      <p:sp>
-        <p:nvSpPr>
-          <p:cNvPr id="8" name="TextBox 7"/>
-          <p:cNvSpPr txBox="1"/>
-          <p:nvPr/>
-        </p:nvSpPr>
-        <p:spPr>
-          <a:xfrm>
-            <a:off x="6446520" y="2304288"/>
-            <a:ext cx="1463040" cy="320040"/>
-          </a:xfrm>
-          <a:prstGeom prst="rect">
-            <a:avLst/>
-          </a:prstGeom>
-          <a:noFill/>
-        </p:spPr>
-        <p:txBody>
-          <a:bodyPr wrap="square">
-            <a:spAutoFit/>
-          </a:bodyPr>
-          <a:lstStyle/>
-          <a:p>
-            <a:pPr algn="l">
-              <a:defRPr sz="1500" b="1">
-                <a:solidFill>
-                  <a:srgbClr val="4ADE80"/>
-                </a:solidFill>
-                <a:latin typeface="Arial"/>
-              </a:defRPr>
-            </a:pPr>
-            <a:r>
-              <a:t>② 사용 성공</a:t>
-            </a:r>
-          </a:p>
-        </p:txBody>
-      </p:sp>
-      <p:sp>
-        <p:nvSpPr>
-          <p:cNvPr id="9" name="TextBox 8"/>
-          <p:cNvSpPr txBox="1"/>
-          <p:nvPr/>
-        </p:nvSpPr>
-        <p:spPr>
-          <a:xfrm>
-            <a:off x="7909560" y="2304288"/>
-            <a:ext cx="3200400" cy="640080"/>
-          </a:xfrm>
-          <a:prstGeom prst="rect">
-            <a:avLst/>
-          </a:prstGeom>
-          <a:noFill/>
-        </p:spPr>
-        <p:txBody>
-          <a:bodyPr wrap="square">
-            <a:spAutoFit/>
-          </a:bodyPr>
-          <a:lstStyle/>
-          <a:p>
-            <a:pPr algn="l">
-              <a:defRPr sz="1150" b="0">
-                <a:solidFill>
-                  <a:srgbClr val="999999"/>
-                </a:solidFill>
-                <a:latin typeface="Arial"/>
-              </a:defRPr>
-            </a:pPr>
-            <a:r>
-              <a:t>쓰면서 오류·누락이 줄고, 사람이 직접</a:t>
-            </a:r>
-            <a:br/>
-            <a:r>
-              <a:t>챙기는 시간과 부담이 줄었는가</a:t>
             </a:r>
           </a:p>
         </p:txBody>
@@ -6961,10 +7792,10 @@
         </p:nvSpPr>
         <p:spPr>
           <a:xfrm>
-            <a:off x="914400" y="3291840"/>
-            <a:ext cx="3291840" cy="1920240"/>
-          </a:xfrm>
-          <a:prstGeom prst="roundRect">
+            <a:off x="914400" y="2235200"/>
+            <a:ext cx="3259667" cy="2997200"/>
+          </a:xfrm>
+          <a:prstGeom prst="rect">
             <a:avLst/>
           </a:prstGeom>
           <a:solidFill>
@@ -6994,6 +7825,11 @@
           <a:lstStyle/>
           <a:p>
             <a:pPr algn="ctr"/>
+            <a:endParaRPr spc="-27">
+              <a:latin typeface="Pretendard"/>
+              <a:ea typeface="Pretendard"/>
+              <a:cs typeface="Pretendard"/>
+            </a:endParaRPr>
           </a:p>
         </p:txBody>
       </p:sp>
@@ -7005,8 +7841,8 @@
         </p:nvSpPr>
         <p:spPr>
           <a:xfrm>
-            <a:off x="1168400" y="3429000"/>
-            <a:ext cx="2743200" cy="365760"/>
+            <a:off x="1270000" y="2616200"/>
+            <a:ext cx="2548467" cy="431800"/>
           </a:xfrm>
           <a:prstGeom prst="rect">
             <a:avLst/>
@@ -7014,20 +7850,30 @@
           <a:noFill/>
         </p:spPr>
         <p:txBody>
-          <a:bodyPr wrap="square">
-            <a:spAutoFit/>
+          <a:bodyPr wrap="square" lIns="0" tIns="0" rIns="0" bIns="0" anchor="t">
+            <a:noAutofit/>
           </a:bodyPr>
           <a:lstStyle/>
           <a:p>
             <a:pPr algn="l">
-              <a:defRPr sz="1900" b="1">
+              <a:defRPr sz="2400" b="1" spc="-60">
                 <a:solidFill>
                   <a:srgbClr val="4ADE80"/>
                 </a:solidFill>
-                <a:latin typeface="Arial"/>
-              </a:defRPr>
-            </a:pPr>
-            <a:r>
+                <a:latin typeface="Pretendard"/>
+                <a:ea typeface="Pretendard"/>
+                <a:cs typeface="Pretendard"/>
+              </a:defRPr>
+            </a:pPr>
+            <a:r>
+              <a:rPr lang="ko-KR" sz="2400" b="1" spc="-60" dirty="0">
+                <a:solidFill>
+                  <a:srgbClr val="4ADE80"/>
+                </a:solidFill>
+                <a:latin typeface="Pretendard"/>
+                <a:ea typeface="Pretendard"/>
+                <a:cs typeface="Pretendard"/>
+              </a:rPr>
               <a:t>추적 정확성</a:t>
             </a:r>
           </a:p>
@@ -7041,8 +7887,8 @@
         </p:nvSpPr>
         <p:spPr>
           <a:xfrm>
-            <a:off x="1168400" y="3794760"/>
-            <a:ext cx="2834640" cy="502920"/>
+            <a:off x="1270000" y="3149600"/>
+            <a:ext cx="2548467" cy="609600"/>
           </a:xfrm>
           <a:prstGeom prst="rect">
             <a:avLst/>
@@ -7050,24 +7896,45 @@
           <a:noFill/>
         </p:spPr>
         <p:txBody>
-          <a:bodyPr wrap="square">
-            <a:spAutoFit/>
+          <a:bodyPr wrap="square" lIns="0" tIns="0" rIns="0" bIns="0" anchor="t">
+            <a:noAutofit/>
           </a:bodyPr>
           <a:lstStyle/>
           <a:p>
             <a:pPr algn="l">
-              <a:defRPr sz="1150" b="0">
+              <a:lnSpc>
+                <a:spcPct val="140000"/>
+              </a:lnSpc>
+              <a:defRPr sz="1500" b="0" spc="-23">
                 <a:solidFill>
                   <a:srgbClr val="999999"/>
                 </a:solidFill>
-                <a:latin typeface="Arial"/>
-              </a:defRPr>
-            </a:pPr>
-            <a:r>
+                <a:latin typeface="Pretendard"/>
+                <a:ea typeface="Pretendard"/>
+                <a:cs typeface="Pretendard"/>
+              </a:defRPr>
+            </a:pPr>
+            <a:r>
+              <a:rPr lang="ko-KR" sz="1500" b="0" spc="-23" dirty="0">
+                <a:solidFill>
+                  <a:srgbClr val="999999"/>
+                </a:solidFill>
+                <a:latin typeface="Pretendard"/>
+                <a:ea typeface="Pretendard"/>
+                <a:cs typeface="Pretendard"/>
+              </a:rPr>
               <a:t>연결된 회의의 액션을</a:t>
             </a:r>
             <a:br/>
             <a:r>
+              <a:rPr lang="ko-KR" sz="1500" b="0" spc="-23" dirty="0">
+                <a:solidFill>
+                  <a:srgbClr val="999999"/>
+                </a:solidFill>
+                <a:latin typeface="Pretendard"/>
+                <a:ea typeface="Pretendard"/>
+                <a:cs typeface="Pretendard"/>
+              </a:rPr>
               <a:t>빠짐없이 잇는가</a:t>
             </a:r>
           </a:p>
@@ -7081,8 +7948,8 @@
         </p:nvSpPr>
         <p:spPr>
           <a:xfrm>
-            <a:off x="1168400" y="4343400"/>
-            <a:ext cx="2560320" cy="12700"/>
+            <a:off x="1270000" y="3987800"/>
+            <a:ext cx="2548467" cy="12700"/>
           </a:xfrm>
           <a:prstGeom prst="rect">
             <a:avLst/>
@@ -7114,6 +7981,11 @@
           <a:lstStyle/>
           <a:p>
             <a:pPr algn="ctr"/>
+            <a:endParaRPr spc="-27">
+              <a:latin typeface="Pretendard"/>
+              <a:ea typeface="Pretendard"/>
+              <a:cs typeface="Pretendard"/>
+            </a:endParaRPr>
           </a:p>
         </p:txBody>
       </p:sp>
@@ -7125,8 +7997,8 @@
         </p:nvSpPr>
         <p:spPr>
           <a:xfrm>
-            <a:off x="1168400" y="4480560"/>
-            <a:ext cx="2834640" cy="731520"/>
+            <a:off x="1270000" y="4216400"/>
+            <a:ext cx="2548467" cy="787400"/>
           </a:xfrm>
           <a:prstGeom prst="rect">
             <a:avLst/>
@@ -7134,41 +8006,164 @@
           <a:noFill/>
         </p:spPr>
         <p:txBody>
-          <a:bodyPr wrap="square">
-            <a:spAutoFit/>
+          <a:bodyPr wrap="square" lIns="0" tIns="0" rIns="0" bIns="0" anchor="t">
+            <a:noAutofit/>
           </a:bodyPr>
           <a:lstStyle/>
           <a:p>
             <a:pPr algn="l">
               <a:spcAft>
-                <a:spcPts val="839"/>
+                <a:spcPts val="1000"/>
               </a:spcAft>
-              <a:defRPr sz="1300" b="0">
+              <a:defRPr sz="1600" b="0" spc="-24">
                 <a:solidFill>
                   <a:srgbClr val="F5F5F5"/>
                 </a:solidFill>
-                <a:latin typeface="Arial"/>
-              </a:defRPr>
-            </a:pPr>
-            <a:r>
-              <a:t>액션 누락 · 중복 건수</a:t>
-            </a:r>
+                <a:latin typeface="Pretendard"/>
+                <a:ea typeface="Pretendard"/>
+                <a:cs typeface="Pretendard"/>
+              </a:defRPr>
+            </a:pPr>
+            <a:r>
+              <a:rPr sz="1600" spc="-24" dirty="0" err="1">
+                <a:latin typeface="Pretendard"/>
+                <a:ea typeface="Pretendard"/>
+                <a:cs typeface="Pretendard"/>
+              </a:rPr>
+              <a:t>액션</a:t>
+            </a:r>
+            <a:r>
+              <a:rPr sz="1600" spc="-24" dirty="0">
+                <a:latin typeface="Pretendard"/>
+                <a:ea typeface="Pretendard"/>
+                <a:cs typeface="Pretendard"/>
+              </a:rPr>
+              <a:t> </a:t>
+            </a:r>
+            <a:r>
+              <a:rPr sz="1600" spc="-24" dirty="0" err="1">
+                <a:latin typeface="Pretendard"/>
+                <a:ea typeface="Pretendard"/>
+                <a:cs typeface="Pretendard"/>
+              </a:rPr>
+              <a:t>누락</a:t>
+            </a:r>
+            <a:r>
+              <a:rPr sz="1600" spc="-24" dirty="0">
+                <a:latin typeface="Pretendard"/>
+                <a:ea typeface="Pretendard"/>
+                <a:cs typeface="Pretendard"/>
+              </a:rPr>
+              <a:t> · </a:t>
+            </a:r>
+            <a:r>
+              <a:rPr sz="1600" spc="-24" dirty="0" err="1">
+                <a:latin typeface="Pretendard"/>
+                <a:ea typeface="Pretendard"/>
+                <a:cs typeface="Pretendard"/>
+              </a:rPr>
+              <a:t>중복</a:t>
+            </a:r>
+            <a:r>
+              <a:rPr sz="1600" spc="-24" dirty="0">
+                <a:latin typeface="Pretendard"/>
+                <a:ea typeface="Pretendard"/>
+                <a:cs typeface="Pretendard"/>
+              </a:rPr>
+              <a:t> </a:t>
+            </a:r>
+            <a:r>
+              <a:rPr lang="ko-KR" altLang="en-US" sz="1600" spc="-24" dirty="0" err="1">
+                <a:solidFill>
+                  <a:srgbClr val="F5F5F5"/>
+                </a:solidFill>
+                <a:latin typeface="Pretendard"/>
+                <a:ea typeface="Pretendard"/>
+                <a:cs typeface="Pretendard"/>
+              </a:rPr>
+              <a:t>절감율</a:t>
+            </a:r>
+            <a:endParaRPr spc="-24" dirty="0">
+              <a:latin typeface="Pretendard"/>
+              <a:ea typeface="Pretendard"/>
+              <a:cs typeface="Pretendard"/>
+            </a:endParaRPr>
           </a:p>
           <a:p>
             <a:pPr algn="l">
               <a:spcAft>
-                <a:spcPts val="839"/>
+                <a:spcPts val="1000"/>
               </a:spcAft>
-              <a:defRPr sz="1300" b="0">
+              <a:defRPr sz="1600" b="0" spc="-24">
                 <a:solidFill>
                   <a:srgbClr val="F5F5F5"/>
                 </a:solidFill>
-                <a:latin typeface="Arial"/>
-              </a:defRPr>
-            </a:pPr>
-            <a:r>
-              <a:t>담당자 · 기한 수정 건수</a:t>
-            </a:r>
+                <a:latin typeface="Pretendard"/>
+                <a:ea typeface="Pretendard"/>
+                <a:cs typeface="Pretendard"/>
+              </a:defRPr>
+            </a:pPr>
+            <a:r>
+              <a:rPr sz="1600" spc="-24" dirty="0" err="1">
+                <a:latin typeface="Pretendard"/>
+                <a:ea typeface="Pretendard"/>
+                <a:cs typeface="Pretendard"/>
+              </a:rPr>
+              <a:t>담당자</a:t>
+            </a:r>
+            <a:r>
+              <a:rPr sz="1600" spc="-24" dirty="0">
+                <a:latin typeface="Pretendard"/>
+                <a:ea typeface="Pretendard"/>
+                <a:cs typeface="Pretendard"/>
+              </a:rPr>
+              <a:t> · </a:t>
+            </a:r>
+            <a:r>
+              <a:rPr sz="1600" spc="-24" dirty="0" err="1">
+                <a:latin typeface="Pretendard"/>
+                <a:ea typeface="Pretendard"/>
+                <a:cs typeface="Pretendard"/>
+              </a:rPr>
+              <a:t>기한</a:t>
+            </a:r>
+            <a:r>
+              <a:rPr sz="1600" spc="-24" dirty="0">
+                <a:latin typeface="Pretendard"/>
+                <a:ea typeface="Pretendard"/>
+                <a:cs typeface="Pretendard"/>
+              </a:rPr>
+              <a:t> </a:t>
+            </a:r>
+            <a:r>
+              <a:rPr sz="1600" spc="-24" dirty="0" err="1">
+                <a:latin typeface="Pretendard"/>
+                <a:ea typeface="Pretendard"/>
+                <a:cs typeface="Pretendard"/>
+              </a:rPr>
+              <a:t>수정</a:t>
+            </a:r>
+            <a:r>
+              <a:rPr sz="1600" spc="-24" dirty="0">
+                <a:latin typeface="Pretendard"/>
+                <a:ea typeface="Pretendard"/>
+                <a:cs typeface="Pretendard"/>
+              </a:rPr>
+              <a:t> </a:t>
+            </a:r>
+            <a:r>
+              <a:rPr lang="ko-KR" altLang="en-US" sz="1600" spc="-24" dirty="0" err="1">
+                <a:latin typeface="Pretendard"/>
+                <a:ea typeface="Pretendard"/>
+                <a:cs typeface="Pretendard"/>
+              </a:rPr>
+              <a:t>절감율</a:t>
+            </a:r>
+            <a:endParaRPr spc="-24" dirty="0">
+              <a:latin typeface="Pretendard"/>
+              <a:ea typeface="Pretendard"/>
+              <a:cs typeface="Pretendard"/>
+            </a:endParaRPr>
           </a:p>
         </p:txBody>
       </p:sp>
@@ -7180,10 +8175,10 @@
         </p:nvSpPr>
         <p:spPr>
           <a:xfrm>
-            <a:off x="4480560" y="3291840"/>
-            <a:ext cx="3291840" cy="1920240"/>
-          </a:xfrm>
-          <a:prstGeom prst="roundRect">
+            <a:off x="4453467" y="2235200"/>
+            <a:ext cx="3259667" cy="2997200"/>
+          </a:xfrm>
+          <a:prstGeom prst="rect">
             <a:avLst/>
           </a:prstGeom>
           <a:solidFill>
@@ -7213,6 +8208,11 @@
           <a:lstStyle/>
           <a:p>
             <a:pPr algn="ctr"/>
+            <a:endParaRPr spc="-27">
+              <a:latin typeface="Pretendard"/>
+              <a:ea typeface="Pretendard"/>
+              <a:cs typeface="Pretendard"/>
+            </a:endParaRPr>
           </a:p>
         </p:txBody>
       </p:sp>
@@ -7224,8 +8224,8 @@
         </p:nvSpPr>
         <p:spPr>
           <a:xfrm>
-            <a:off x="4734560" y="3429000"/>
-            <a:ext cx="2743200" cy="365760"/>
+            <a:off x="4809067" y="2616200"/>
+            <a:ext cx="2548467" cy="431800"/>
           </a:xfrm>
           <a:prstGeom prst="rect">
             <a:avLst/>
@@ -7233,20 +8233,30 @@
           <a:noFill/>
         </p:spPr>
         <p:txBody>
-          <a:bodyPr wrap="square">
-            <a:spAutoFit/>
+          <a:bodyPr wrap="square" lIns="0" tIns="0" rIns="0" bIns="0" anchor="t">
+            <a:noAutofit/>
           </a:bodyPr>
           <a:lstStyle/>
           <a:p>
             <a:pPr algn="l">
-              <a:defRPr sz="1900" b="1">
+              <a:defRPr sz="2400" b="1" spc="-60">
                 <a:solidFill>
                   <a:srgbClr val="4ADE80"/>
                 </a:solidFill>
-                <a:latin typeface="Arial"/>
-              </a:defRPr>
-            </a:pPr>
-            <a:r>
+                <a:latin typeface="Pretendard"/>
+                <a:ea typeface="Pretendard"/>
+                <a:cs typeface="Pretendard"/>
+              </a:defRPr>
+            </a:pPr>
+            <a:r>
+              <a:rPr lang="ko-KR" sz="2400" b="1" spc="-60" dirty="0">
+                <a:solidFill>
+                  <a:srgbClr val="4ADE80"/>
+                </a:solidFill>
+                <a:latin typeface="Pretendard"/>
+                <a:ea typeface="Pretendard"/>
+                <a:cs typeface="Pretendard"/>
+              </a:rPr>
               <a:t>후속관리 신뢰성</a:t>
             </a:r>
           </a:p>
@@ -7260,8 +8270,8 @@
         </p:nvSpPr>
         <p:spPr>
           <a:xfrm>
-            <a:off x="4734560" y="3794760"/>
-            <a:ext cx="2834640" cy="502920"/>
+            <a:off x="4809067" y="3149600"/>
+            <a:ext cx="2548467" cy="609600"/>
           </a:xfrm>
           <a:prstGeom prst="rect">
             <a:avLst/>
@@ -7269,24 +8279,45 @@
           <a:noFill/>
         </p:spPr>
         <p:txBody>
-          <a:bodyPr wrap="square">
-            <a:spAutoFit/>
+          <a:bodyPr wrap="square" lIns="0" tIns="0" rIns="0" bIns="0" anchor="t">
+            <a:noAutofit/>
           </a:bodyPr>
           <a:lstStyle/>
           <a:p>
             <a:pPr algn="l">
-              <a:defRPr sz="1150" b="0">
+              <a:lnSpc>
+                <a:spcPct val="140000"/>
+              </a:lnSpc>
+              <a:defRPr sz="1500" b="0" spc="-23">
                 <a:solidFill>
                   <a:srgbClr val="999999"/>
                 </a:solidFill>
-                <a:latin typeface="Arial"/>
-              </a:defRPr>
-            </a:pPr>
-            <a:r>
+                <a:latin typeface="Pretendard"/>
+                <a:ea typeface="Pretendard"/>
+                <a:cs typeface="Pretendard"/>
+              </a:defRPr>
+            </a:pPr>
+            <a:r>
+              <a:rPr lang="ko-KR" sz="1500" b="0" spc="-23" dirty="0">
+                <a:solidFill>
+                  <a:srgbClr val="999999"/>
+                </a:solidFill>
+                <a:latin typeface="Pretendard"/>
+                <a:ea typeface="Pretendard"/>
+                <a:cs typeface="Pretendard"/>
+              </a:rPr>
               <a:t>제때 확인하고,</a:t>
             </a:r>
             <a:br/>
             <a:r>
+              <a:rPr lang="ko-KR" sz="1500" b="0" spc="-23" dirty="0">
+                <a:solidFill>
+                  <a:srgbClr val="999999"/>
+                </a:solidFill>
+                <a:latin typeface="Pretendard"/>
+                <a:ea typeface="Pretendard"/>
+                <a:cs typeface="Pretendard"/>
+              </a:rPr>
               <a:t>제대로 반영하는가</a:t>
             </a:r>
           </a:p>
@@ -7300,8 +8331,8 @@
         </p:nvSpPr>
         <p:spPr>
           <a:xfrm>
-            <a:off x="4734560" y="4343400"/>
-            <a:ext cx="2560320" cy="12700"/>
+            <a:off x="4809067" y="3987800"/>
+            <a:ext cx="2548467" cy="12700"/>
           </a:xfrm>
           <a:prstGeom prst="rect">
             <a:avLst/>
@@ -7333,6 +8364,11 @@
           <a:lstStyle/>
           <a:p>
             <a:pPr algn="ctr"/>
+            <a:endParaRPr spc="-27">
+              <a:latin typeface="Pretendard"/>
+              <a:ea typeface="Pretendard"/>
+              <a:cs typeface="Pretendard"/>
+            </a:endParaRPr>
           </a:p>
         </p:txBody>
       </p:sp>
@@ -7344,8 +8380,8 @@
         </p:nvSpPr>
         <p:spPr>
           <a:xfrm>
-            <a:off x="4734560" y="4480560"/>
-            <a:ext cx="2834640" cy="731520"/>
+            <a:off x="4809067" y="4216400"/>
+            <a:ext cx="2548467" cy="787400"/>
           </a:xfrm>
           <a:prstGeom prst="rect">
             <a:avLst/>
@@ -7353,39 +8389,59 @@
           <a:noFill/>
         </p:spPr>
         <p:txBody>
-          <a:bodyPr wrap="square">
-            <a:spAutoFit/>
+          <a:bodyPr wrap="square" lIns="0" tIns="0" rIns="0" bIns="0" anchor="t">
+            <a:noAutofit/>
           </a:bodyPr>
           <a:lstStyle/>
           <a:p>
             <a:pPr algn="l">
               <a:spcAft>
-                <a:spcPts val="839"/>
+                <a:spcPts val="1000"/>
               </a:spcAft>
-              <a:defRPr sz="1300" b="0">
+              <a:defRPr sz="1600" b="0" spc="-24">
                 <a:solidFill>
                   <a:srgbClr val="F5F5F5"/>
                 </a:solidFill>
-                <a:latin typeface="Arial"/>
-              </a:defRPr>
-            </a:pPr>
-            <a:r>
+                <a:latin typeface="Pretendard"/>
+                <a:ea typeface="Pretendard"/>
+                <a:cs typeface="Pretendard"/>
+              </a:defRPr>
+            </a:pPr>
+            <a:r>
+              <a:rPr lang="ko-KR" sz="1600" b="0" spc="-24" dirty="0">
+                <a:solidFill>
+                  <a:srgbClr val="F5F5F5"/>
+                </a:solidFill>
+                <a:latin typeface="Pretendard"/>
+                <a:ea typeface="Pretendard"/>
+                <a:cs typeface="Pretendard"/>
+              </a:rPr>
               <a:t>예정된 F/U 정상 처리율</a:t>
             </a:r>
           </a:p>
           <a:p>
             <a:pPr algn="l">
               <a:spcAft>
-                <a:spcPts val="839"/>
+                <a:spcPts val="1000"/>
               </a:spcAft>
-              <a:defRPr sz="1300" b="0">
+              <a:defRPr sz="1600" b="0" spc="-24">
                 <a:solidFill>
                   <a:srgbClr val="F5F5F5"/>
                 </a:solidFill>
-                <a:latin typeface="Arial"/>
-              </a:defRPr>
-            </a:pPr>
-            <a:r>
+                <a:latin typeface="Pretendard"/>
+                <a:ea typeface="Pretendard"/>
+                <a:cs typeface="Pretendard"/>
+              </a:defRPr>
+            </a:pPr>
+            <a:r>
+              <a:rPr lang="ko-KR" sz="1600" b="0" spc="-24" dirty="0">
+                <a:solidFill>
+                  <a:srgbClr val="F5F5F5"/>
+                </a:solidFill>
+                <a:latin typeface="Pretendard"/>
+                <a:ea typeface="Pretendard"/>
+                <a:cs typeface="Pretendard"/>
+              </a:rPr>
               <a:t>누락 · 불필요 알림 건수</a:t>
             </a:r>
           </a:p>
@@ -7399,10 +8455,10 @@
         </p:nvSpPr>
         <p:spPr>
           <a:xfrm>
-            <a:off x="8046720" y="3291840"/>
-            <a:ext cx="3291840" cy="1920240"/>
-          </a:xfrm>
-          <a:prstGeom prst="roundRect">
+            <a:off x="7992533" y="2235200"/>
+            <a:ext cx="3259667" cy="2997200"/>
+          </a:xfrm>
+          <a:prstGeom prst="rect">
             <a:avLst/>
           </a:prstGeom>
           <a:solidFill>
@@ -7432,6 +8488,11 @@
           <a:lstStyle/>
           <a:p>
             <a:pPr algn="ctr"/>
+            <a:endParaRPr spc="-27">
+              <a:latin typeface="Pretendard"/>
+              <a:ea typeface="Pretendard"/>
+              <a:cs typeface="Pretendard"/>
+            </a:endParaRPr>
           </a:p>
         </p:txBody>
       </p:sp>
@@ -7443,8 +8504,8 @@
         </p:nvSpPr>
         <p:spPr>
           <a:xfrm>
-            <a:off x="8300720" y="3429000"/>
-            <a:ext cx="2743200" cy="365760"/>
+            <a:off x="8348133" y="2616200"/>
+            <a:ext cx="2548467" cy="431800"/>
           </a:xfrm>
           <a:prstGeom prst="rect">
             <a:avLst/>
@@ -7452,20 +8513,30 @@
           <a:noFill/>
         </p:spPr>
         <p:txBody>
-          <a:bodyPr wrap="square">
-            <a:spAutoFit/>
+          <a:bodyPr wrap="square" lIns="0" tIns="0" rIns="0" bIns="0" anchor="t">
+            <a:noAutofit/>
           </a:bodyPr>
           <a:lstStyle/>
           <a:p>
             <a:pPr algn="l">
-              <a:defRPr sz="1900" b="1">
+              <a:defRPr sz="2400" b="1" spc="-60">
                 <a:solidFill>
                   <a:srgbClr val="4ADE80"/>
                 </a:solidFill>
-                <a:latin typeface="Arial"/>
-              </a:defRPr>
-            </a:pPr>
-            <a:r>
+                <a:latin typeface="Pretendard"/>
+                <a:ea typeface="Pretendard"/>
+                <a:cs typeface="Pretendard"/>
+              </a:defRPr>
+            </a:pPr>
+            <a:r>
+              <a:rPr lang="ko-KR" sz="2400" b="1" spc="-60" dirty="0">
+                <a:solidFill>
+                  <a:srgbClr val="4ADE80"/>
+                </a:solidFill>
+                <a:latin typeface="Pretendard"/>
+                <a:ea typeface="Pretendard"/>
+                <a:cs typeface="Pretendard"/>
+              </a:rPr>
               <a:t>실제 사용 가치</a:t>
             </a:r>
           </a:p>
@@ -7479,8 +8550,8 @@
         </p:nvSpPr>
         <p:spPr>
           <a:xfrm>
-            <a:off x="8300720" y="3794760"/>
-            <a:ext cx="2834640" cy="502920"/>
+            <a:off x="8348133" y="3149600"/>
+            <a:ext cx="2548467" cy="609600"/>
           </a:xfrm>
           <a:prstGeom prst="rect">
             <a:avLst/>
@@ -7488,24 +8559,45 @@
           <a:noFill/>
         </p:spPr>
         <p:txBody>
-          <a:bodyPr wrap="square">
-            <a:spAutoFit/>
+          <a:bodyPr wrap="square" lIns="0" tIns="0" rIns="0" bIns="0" anchor="t">
+            <a:noAutofit/>
           </a:bodyPr>
           <a:lstStyle/>
           <a:p>
             <a:pPr algn="l">
-              <a:defRPr sz="1150" b="0">
+              <a:lnSpc>
+                <a:spcPct val="140000"/>
+              </a:lnSpc>
+              <a:defRPr sz="1500" b="0" spc="-23">
                 <a:solidFill>
                   <a:srgbClr val="999999"/>
                 </a:solidFill>
-                <a:latin typeface="Arial"/>
-              </a:defRPr>
-            </a:pPr>
-            <a:r>
+                <a:latin typeface="Pretendard"/>
+                <a:ea typeface="Pretendard"/>
+                <a:cs typeface="Pretendard"/>
+              </a:defRPr>
+            </a:pPr>
+            <a:r>
+              <a:rPr lang="ko-KR" sz="1500" b="0" spc="-23" dirty="0">
+                <a:solidFill>
+                  <a:srgbClr val="999999"/>
+                </a:solidFill>
+                <a:latin typeface="Pretendard"/>
+                <a:ea typeface="Pretendard"/>
+                <a:cs typeface="Pretendard"/>
+              </a:rPr>
               <a:t>도움이 되고,</a:t>
             </a:r>
             <a:br/>
             <a:r>
+              <a:rPr lang="ko-KR" sz="1500" b="0" spc="-23" dirty="0">
+                <a:solidFill>
+                  <a:srgbClr val="999999"/>
+                </a:solidFill>
+                <a:latin typeface="Pretendard"/>
+                <a:ea typeface="Pretendard"/>
+                <a:cs typeface="Pretendard"/>
+              </a:rPr>
               <a:t>계속 쓰고 싶은가</a:t>
             </a:r>
           </a:p>
@@ -7519,8 +8611,8 @@
         </p:nvSpPr>
         <p:spPr>
           <a:xfrm>
-            <a:off x="8300720" y="4343400"/>
-            <a:ext cx="2560320" cy="12700"/>
+            <a:off x="8348133" y="3987800"/>
+            <a:ext cx="2548467" cy="12700"/>
           </a:xfrm>
           <a:prstGeom prst="rect">
             <a:avLst/>
@@ -7552,6 +8644,11 @@
           <a:lstStyle/>
           <a:p>
             <a:pPr algn="ctr"/>
+            <a:endParaRPr spc="-27">
+              <a:latin typeface="Pretendard"/>
+              <a:ea typeface="Pretendard"/>
+              <a:cs typeface="Pretendard"/>
+            </a:endParaRPr>
           </a:p>
         </p:txBody>
       </p:sp>
@@ -7563,8 +8660,8 @@
         </p:nvSpPr>
         <p:spPr>
           <a:xfrm>
-            <a:off x="8300720" y="4480560"/>
-            <a:ext cx="2834640" cy="731520"/>
+            <a:off x="8348133" y="4216400"/>
+            <a:ext cx="2548467" cy="787400"/>
           </a:xfrm>
           <a:prstGeom prst="rect">
             <a:avLst/>
@@ -7572,39 +8669,59 @@
           <a:noFill/>
         </p:spPr>
         <p:txBody>
-          <a:bodyPr wrap="square">
-            <a:spAutoFit/>
+          <a:bodyPr wrap="square" lIns="0" tIns="0" rIns="0" bIns="0" anchor="t">
+            <a:noAutofit/>
           </a:bodyPr>
           <a:lstStyle/>
           <a:p>
             <a:pPr algn="l">
               <a:spcAft>
-                <a:spcPts val="839"/>
+                <a:spcPts val="1000"/>
               </a:spcAft>
-              <a:defRPr sz="1300" b="0">
+              <a:defRPr sz="1600" b="0" spc="-24">
                 <a:solidFill>
                   <a:srgbClr val="F5F5F5"/>
                 </a:solidFill>
-                <a:latin typeface="Arial"/>
-              </a:defRPr>
-            </a:pPr>
-            <a:r>
+                <a:latin typeface="Pretendard"/>
+                <a:ea typeface="Pretendard"/>
+                <a:cs typeface="Pretendard"/>
+              </a:defRPr>
+            </a:pPr>
+            <a:r>
+              <a:rPr lang="ko-KR" sz="1600" b="0" spc="-24" dirty="0">
+                <a:solidFill>
+                  <a:srgbClr val="F5F5F5"/>
+                </a:solidFill>
+                <a:latin typeface="Pretendard"/>
+                <a:ea typeface="Pretendard"/>
+                <a:cs typeface="Pretendard"/>
+              </a:rPr>
               <a:t>기한 내 완료율 변화</a:t>
             </a:r>
           </a:p>
           <a:p>
             <a:pPr algn="l">
               <a:spcAft>
-                <a:spcPts val="839"/>
+                <a:spcPts val="1000"/>
               </a:spcAft>
-              <a:defRPr sz="1300" b="0">
+              <a:defRPr sz="1600" b="0" spc="-24">
                 <a:solidFill>
                   <a:srgbClr val="F5F5F5"/>
                 </a:solidFill>
-                <a:latin typeface="Arial"/>
-              </a:defRPr>
-            </a:pPr>
-            <a:r>
+                <a:latin typeface="Pretendard"/>
+                <a:ea typeface="Pretendard"/>
+                <a:cs typeface="Pretendard"/>
+              </a:defRPr>
+            </a:pPr>
+            <a:r>
+              <a:rPr lang="ko-KR" sz="1600" b="0" spc="-24" dirty="0">
+                <a:solidFill>
+                  <a:srgbClr val="F5F5F5"/>
+                </a:solidFill>
+                <a:latin typeface="Pretendard"/>
+                <a:ea typeface="Pretendard"/>
+                <a:cs typeface="Pretendard"/>
+              </a:rPr>
               <a:t>유용성 · 지속 사용 의향</a:t>
             </a:r>
           </a:p>
@@ -7651,6 +8768,11 @@
           <a:lstStyle/>
           <a:p>
             <a:pPr algn="ctr"/>
+            <a:endParaRPr spc="-27">
+              <a:latin typeface="Pretendard"/>
+              <a:ea typeface="Pretendard"/>
+              <a:cs typeface="Pretendard"/>
+            </a:endParaRPr>
           </a:p>
         </p:txBody>
       </p:sp>
@@ -7671,7 +8793,7 @@
           <a:noFill/>
         </p:spPr>
         <p:txBody>
-          <a:bodyPr wrap="square">
+          <a:bodyPr wrap="square" lIns="0" rIns="0">
             <a:spAutoFit/>
           </a:bodyPr>
           <a:lstStyle/>
@@ -7680,14 +8802,21 @@
               <a:spcAft>
                 <a:spcPts val="680"/>
               </a:spcAft>
-              <a:defRPr sz="1300" b="0">
+              <a:defRPr sz="1300" b="0" spc="-13">
                 <a:solidFill>
                   <a:srgbClr val="999999"/>
                 </a:solidFill>
-                <a:latin typeface="Arial"/>
-              </a:defRPr>
-            </a:pPr>
-            <a:r>
+                <a:latin typeface="Pretendard"/>
+                <a:ea typeface="Pretendard"/>
+                <a:cs typeface="Pretendard"/>
+              </a:defRPr>
+            </a:pPr>
+            <a:r>
+              <a:rPr lang="ko-KR" spc="-13" dirty="0">
+                <a:latin typeface="Pretendard"/>
+                <a:ea typeface="Pretendard"/>
+                <a:cs typeface="Pretendard"/>
+              </a:rPr>
               <a:t>목표치는 초기 2주 실사용 결과를 보고 확정 (11/21)  ·  도입 전 수작업 관리 시간을 측정해 전후 비교</a:t>
             </a:r>
           </a:p>
@@ -7696,14 +8825,21 @@
               <a:spcAft>
                 <a:spcPts val="680"/>
               </a:spcAft>
-              <a:defRPr sz="1300" b="0">
+              <a:defRPr sz="1300" b="0" spc="-13">
                 <a:solidFill>
                   <a:srgbClr val="999999"/>
                 </a:solidFill>
-                <a:latin typeface="Arial"/>
-              </a:defRPr>
-            </a:pPr>
-            <a:r>
+                <a:latin typeface="Pretendard"/>
+                <a:ea typeface="Pretendard"/>
+                <a:cs typeface="Pretendard"/>
+              </a:defRPr>
+            </a:pPr>
+            <a:r>
+              <a:rPr lang="ko-KR" spc="-13" dirty="0">
+                <a:latin typeface="Pretendard"/>
+                <a:ea typeface="Pretendard"/>
+                <a:cs typeface="Pretendard"/>
+              </a:rPr>
               <a:t>교란 변수(학기말 압박) 인정 → “AI만 잡아낸 액션 수” 등 시기 무관 지표 병행</a:t>
             </a:r>
           </a:p>
@@ -7717,8 +8853,8 @@
         </p:nvSpPr>
         <p:spPr>
           <a:xfrm>
-            <a:off x="11430000" y="6446520"/>
-            <a:ext cx="548640" cy="274320"/>
+            <a:off x="10706100" y="6350000"/>
+            <a:ext cx="546100" cy="274320"/>
           </a:xfrm>
           <a:prstGeom prst="rect">
             <a:avLst/>
@@ -7726,26 +8862,38 @@
           <a:noFill/>
         </p:spPr>
         <p:txBody>
-          <a:bodyPr wrap="square">
+          <a:bodyPr wrap="square" lIns="0" rIns="0">
             <a:spAutoFit/>
           </a:bodyPr>
           <a:lstStyle/>
           <a:p>
             <a:pPr algn="r">
-              <a:defRPr sz="1000" b="0">
+              <a:defRPr sz="1000" b="0" spc="-10">
                 <a:solidFill>
                   <a:srgbClr val="666666"/>
                 </a:solidFill>
-                <a:latin typeface="Arial"/>
-              </a:defRPr>
-            </a:pPr>
-            <a:r>
+                <a:latin typeface="Pretendard"/>
+                <a:ea typeface="Pretendard"/>
+                <a:cs typeface="Pretendard"/>
+              </a:defRPr>
+            </a:pPr>
+            <a:r>
+              <a:rPr lang="ko-KR" spc="-10" dirty="0">
+                <a:latin typeface="Pretendard"/>
+                <a:ea typeface="Pretendard"/>
+                <a:cs typeface="Pretendard"/>
+              </a:rPr>
               <a:t>5</a:t>
             </a:r>
           </a:p>
         </p:txBody>
       </p:sp>
     </p:spTree>
+    <p:extLst>
+      <p:ext uri="{BB962C8B-B14F-4D97-AF65-F5344CB8AC3E}">
+        <p14:creationId xmlns:p14="http://schemas.microsoft.com/office/powerpoint/2010/main" val="3817167331"/>
+      </p:ext>
+    </p:extLst>
   </p:cSld>
   <p:clrMapOvr>
     <a:masterClrMapping/>
@@ -7754,7 +8902,7 @@
 </file>
 
 <file path=ppt/slides/slide6.xml><?xml version="1.0" encoding="utf-8"?>
-<p:sld xmlns:a="http://schemas.openxmlformats.org/drawingml/2006/main" xmlns:p="http://schemas.openxmlformats.org/presentationml/2006/main" xmlns:r="http://schemas.openxmlformats.org/officeDocument/2006/relationships">
+<p:sld xmlns:a="http://schemas.openxmlformats.org/drawingml/2006/main" xmlns:r="http://schemas.openxmlformats.org/officeDocument/2006/relationships" xmlns:p="http://schemas.openxmlformats.org/presentationml/2006/main">
   <p:cSld>
     <p:bg>
       <p:bgPr>
@@ -7770,7 +8918,14 @@
         <p:cNvGrpSpPr/>
         <p:nvPr/>
       </p:nvGrpSpPr>
-      <p:grpSpPr/>
+      <p:grpSpPr>
+        <a:xfrm>
+          <a:off x="0" y="0"/>
+          <a:ext cx="0" cy="0"/>
+          <a:chOff x="0" y="0"/>
+          <a:chExt cx="0" cy="0"/>
+        </a:xfrm>
+      </p:grpSpPr>
       <p:sp>
         <p:nvSpPr>
           <p:cNvPr id="2" name="Rounded Rectangle 1"/>
@@ -7782,7 +8937,7 @@
             <a:off x="914400" y="640080"/>
             <a:ext cx="1270000" cy="355600"/>
           </a:xfrm>
-          <a:prstGeom prst="roundRect">
+          <a:prstGeom prst="rect">
             <a:avLst/>
           </a:prstGeom>
           <a:solidFill>
@@ -7808,18 +8963,25 @@
           </a:fontRef>
         </p:style>
         <p:txBody>
-          <a:bodyPr rtlCol="0" anchor="ctr" wrap="none" lIns="127000" rIns="127000" tIns="25400" bIns="25400"/>
+          <a:bodyPr wrap="none" lIns="127000" tIns="25400" rIns="127000" bIns="25400" rtlCol="0" anchor="ctr"/>
           <a:lstStyle/>
           <a:p>
             <a:pPr algn="ctr">
-              <a:defRPr sz="1100" b="1">
+              <a:defRPr sz="1100" b="1" spc="-11">
                 <a:solidFill>
                   <a:srgbClr val="0F0F0F"/>
                 </a:solidFill>
-                <a:latin typeface="Arial"/>
-              </a:defRPr>
-            </a:pPr>
-            <a:r>
+                <a:latin typeface="Pretendard"/>
+                <a:ea typeface="Pretendard"/>
+                <a:cs typeface="Pretendard"/>
+              </a:defRPr>
+            </a:pPr>
+            <a:r>
+              <a:rPr lang="ko-KR" spc="-11" dirty="0">
+                <a:latin typeface="Pretendard"/>
+                <a:ea typeface="Pretendard"/>
+                <a:cs typeface="Pretendard"/>
+              </a:rPr>
               <a:t>수행 계획</a:t>
             </a:r>
           </a:p>
@@ -7842,20 +9004,27 @@
           <a:noFill/>
         </p:spPr>
         <p:txBody>
-          <a:bodyPr wrap="square">
+          <a:bodyPr wrap="square" lIns="0" rIns="0">
             <a:spAutoFit/>
           </a:bodyPr>
           <a:lstStyle/>
           <a:p>
             <a:pPr algn="l">
-              <a:defRPr sz="4000" b="1">
+              <a:defRPr sz="4000" b="1" spc="-100">
                 <a:solidFill>
                   <a:srgbClr val="F5F5F5"/>
                 </a:solidFill>
-                <a:latin typeface="Arial"/>
-              </a:defRPr>
-            </a:pPr>
-            <a:r>
+                <a:latin typeface="Pretendard"/>
+                <a:ea typeface="Pretendard"/>
+                <a:cs typeface="Pretendard"/>
+              </a:defRPr>
+            </a:pPr>
+            <a:r>
+              <a:rPr lang="ko-KR" spc="-100" dirty="0">
+                <a:latin typeface="Pretendard"/>
+                <a:ea typeface="Pretendard"/>
+                <a:cs typeface="Pretendard"/>
+              </a:rPr>
               <a:t>작게 전체 루프를 돌리고, 쓰면서 완성한다</a:t>
             </a:r>
           </a:p>
@@ -7902,6 +9071,11 @@
           <a:lstStyle/>
           <a:p>
             <a:pPr algn="ctr"/>
+            <a:endParaRPr spc="-27">
+              <a:latin typeface="Pretendard"/>
+              <a:ea typeface="Pretendard"/>
+              <a:cs typeface="Pretendard"/>
+            </a:endParaRPr>
           </a:p>
         </p:txBody>
       </p:sp>
@@ -7946,6 +9120,11 @@
           <a:lstStyle/>
           <a:p>
             <a:pPr algn="ctr"/>
+            <a:endParaRPr spc="-27">
+              <a:latin typeface="Pretendard"/>
+              <a:ea typeface="Pretendard"/>
+              <a:cs typeface="Pretendard"/>
+            </a:endParaRPr>
           </a:p>
         </p:txBody>
       </p:sp>
@@ -7966,20 +9145,27 @@
           <a:noFill/>
         </p:spPr>
         <p:txBody>
-          <a:bodyPr wrap="square">
+          <a:bodyPr wrap="square" lIns="0" rIns="0">
             <a:spAutoFit/>
           </a:bodyPr>
           <a:lstStyle/>
           <a:p>
             <a:pPr algn="l">
-              <a:defRPr sz="1300" b="0">
+              <a:defRPr sz="1400" b="0" spc="-21">
                 <a:solidFill>
                   <a:srgbClr val="999999"/>
                 </a:solidFill>
-                <a:latin typeface="Arial"/>
-              </a:defRPr>
-            </a:pPr>
-            <a:r>
+                <a:latin typeface="Pretendard"/>
+                <a:ea typeface="Pretendard"/>
+                <a:cs typeface="Pretendard"/>
+              </a:defRPr>
+            </a:pPr>
+            <a:r>
+              <a:rPr lang="ko-KR" sz="1400" spc="-21" dirty="0">
+                <a:latin typeface="Pretendard"/>
+                <a:ea typeface="Pretendard"/>
+                <a:cs typeface="Pretendard"/>
+              </a:rPr>
               <a:t>10/24</a:t>
             </a:r>
           </a:p>
@@ -8002,20 +9188,27 @@
           <a:noFill/>
         </p:spPr>
         <p:txBody>
-          <a:bodyPr wrap="square">
+          <a:bodyPr wrap="square" lIns="0" rIns="0">
             <a:spAutoFit/>
           </a:bodyPr>
           <a:lstStyle/>
           <a:p>
             <a:pPr algn="l">
-              <a:defRPr sz="1500" b="1">
+              <a:defRPr sz="1600" b="1" spc="-24">
                 <a:solidFill>
                   <a:srgbClr val="4ADE80"/>
                 </a:solidFill>
-                <a:latin typeface="Arial"/>
-              </a:defRPr>
-            </a:pPr>
-            <a:r>
+                <a:latin typeface="Pretendard"/>
+                <a:ea typeface="Pretendard"/>
+                <a:cs typeface="Pretendard"/>
+              </a:defRPr>
+            </a:pPr>
+            <a:r>
+              <a:rPr lang="ko-KR" sz="1600" spc="-24" dirty="0">
+                <a:latin typeface="Pretendard"/>
+                <a:ea typeface="Pretendard"/>
+                <a:cs typeface="Pretendard"/>
+              </a:rPr>
               <a:t>중간 발표</a:t>
             </a:r>
           </a:p>
@@ -8029,8 +9222,8 @@
         </p:nvSpPr>
         <p:spPr>
           <a:xfrm>
-            <a:off x="6949440" y="2286000"/>
-            <a:ext cx="4846320" cy="320040"/>
+            <a:off x="6502400" y="2286000"/>
+            <a:ext cx="4749800" cy="320040"/>
           </a:xfrm>
           <a:prstGeom prst="rect">
             <a:avLst/>
@@ -8038,20 +9231,27 @@
           <a:noFill/>
         </p:spPr>
         <p:txBody>
-          <a:bodyPr wrap="square">
+          <a:bodyPr wrap="square" lIns="0" rIns="0">
             <a:spAutoFit/>
           </a:bodyPr>
           <a:lstStyle/>
           <a:p>
             <a:pPr algn="l">
-              <a:defRPr sz="1250" b="0">
+              <a:defRPr sz="1350" b="0" spc="-20">
                 <a:solidFill>
                   <a:srgbClr val="999999"/>
                 </a:solidFill>
-                <a:latin typeface="Arial"/>
-              </a:defRPr>
-            </a:pPr>
-            <a:r>
+                <a:latin typeface="Pretendard"/>
+                <a:ea typeface="Pretendard"/>
+                <a:cs typeface="Pretendard"/>
+              </a:defRPr>
+            </a:pPr>
+            <a:r>
+              <a:rPr lang="ko-KR" sz="1350" spc="-20" dirty="0">
+                <a:latin typeface="Pretendard"/>
+                <a:ea typeface="Pretendard"/>
+                <a:cs typeface="Pretendard"/>
+              </a:rPr>
               <a:t>문제 정의 + 설계 발표</a:t>
             </a:r>
           </a:p>
@@ -8098,6 +9298,11 @@
           <a:lstStyle/>
           <a:p>
             <a:pPr algn="ctr"/>
+            <a:endParaRPr spc="-27">
+              <a:latin typeface="Pretendard"/>
+              <a:ea typeface="Pretendard"/>
+              <a:cs typeface="Pretendard"/>
+            </a:endParaRPr>
           </a:p>
         </p:txBody>
       </p:sp>
@@ -8142,6 +9347,11 @@
           <a:lstStyle/>
           <a:p>
             <a:pPr algn="ctr"/>
+            <a:endParaRPr spc="-27">
+              <a:latin typeface="Pretendard"/>
+              <a:ea typeface="Pretendard"/>
+              <a:cs typeface="Pretendard"/>
+            </a:endParaRPr>
           </a:p>
         </p:txBody>
       </p:sp>
@@ -8162,20 +9372,27 @@
           <a:noFill/>
         </p:spPr>
         <p:txBody>
-          <a:bodyPr wrap="square">
+          <a:bodyPr wrap="square" lIns="0" rIns="0">
             <a:spAutoFit/>
           </a:bodyPr>
           <a:lstStyle/>
           <a:p>
             <a:pPr algn="l">
-              <a:defRPr sz="1300" b="0">
+              <a:defRPr sz="1400" b="0" spc="-21">
                 <a:solidFill>
                   <a:srgbClr val="999999"/>
                 </a:solidFill>
-                <a:latin typeface="Arial"/>
-              </a:defRPr>
-            </a:pPr>
-            <a:r>
+                <a:latin typeface="Pretendard"/>
+                <a:ea typeface="Pretendard"/>
+                <a:cs typeface="Pretendard"/>
+              </a:defRPr>
+            </a:pPr>
+            <a:r>
+              <a:rPr lang="ko-KR" sz="1400" spc="-21" dirty="0">
+                <a:latin typeface="Pretendard"/>
+                <a:ea typeface="Pretendard"/>
+                <a:cs typeface="Pretendard"/>
+              </a:rPr>
               <a:t>10/25 ~ 11/7</a:t>
             </a:r>
           </a:p>
@@ -8198,20 +9415,27 @@
           <a:noFill/>
         </p:spPr>
         <p:txBody>
-          <a:bodyPr wrap="square">
+          <a:bodyPr wrap="square" lIns="0" rIns="0">
             <a:spAutoFit/>
           </a:bodyPr>
           <a:lstStyle/>
           <a:p>
             <a:pPr algn="l">
-              <a:defRPr sz="1500" b="1">
+              <a:defRPr sz="1600" b="1" spc="-24">
                 <a:solidFill>
                   <a:srgbClr val="F5F5F5"/>
                 </a:solidFill>
-                <a:latin typeface="Arial"/>
-              </a:defRPr>
-            </a:pPr>
-            <a:r>
+                <a:latin typeface="Pretendard"/>
+                <a:ea typeface="Pretendard"/>
+                <a:cs typeface="Pretendard"/>
+              </a:defRPr>
+            </a:pPr>
+            <a:r>
+              <a:rPr lang="ko-KR" sz="1600" spc="-24" dirty="0">
+                <a:latin typeface="Pretendard"/>
+                <a:ea typeface="Pretendard"/>
+                <a:cs typeface="Pretendard"/>
+              </a:rPr>
               <a:t>최소 기능 구현</a:t>
             </a:r>
           </a:p>
@@ -8225,8 +9449,8 @@
         </p:nvSpPr>
         <p:spPr>
           <a:xfrm>
-            <a:off x="6949440" y="2852928"/>
-            <a:ext cx="4846320" cy="320040"/>
+            <a:off x="6502400" y="2852928"/>
+            <a:ext cx="4749800" cy="320040"/>
           </a:xfrm>
           <a:prstGeom prst="rect">
             <a:avLst/>
@@ -8234,20 +9458,27 @@
           <a:noFill/>
         </p:spPr>
         <p:txBody>
-          <a:bodyPr wrap="square">
+          <a:bodyPr wrap="square" lIns="0" rIns="0">
             <a:spAutoFit/>
           </a:bodyPr>
           <a:lstStyle/>
           <a:p>
             <a:pPr algn="l">
-              <a:defRPr sz="1250" b="0">
+              <a:defRPr sz="1350" b="0" spc="-20">
                 <a:solidFill>
                   <a:srgbClr val="999999"/>
                 </a:solidFill>
-                <a:latin typeface="Arial"/>
-              </a:defRPr>
-            </a:pPr>
-            <a:r>
+                <a:latin typeface="Pretendard"/>
+                <a:ea typeface="Pretendard"/>
+                <a:cs typeface="Pretendard"/>
+              </a:defRPr>
+            </a:pPr>
+            <a:r>
+              <a:rPr lang="ko-KR" sz="1350" spc="-20" dirty="0">
+                <a:latin typeface="Pretendard"/>
+                <a:ea typeface="Pretendard"/>
+                <a:cs typeface="Pretendard"/>
+              </a:rPr>
               <a:t>녹음앱 1개 연결 · 회의 묶음 선택 · 액션 확인 · 기본 팔로업</a:t>
             </a:r>
           </a:p>
@@ -8294,6 +9525,11 @@
           <a:lstStyle/>
           <a:p>
             <a:pPr algn="ctr"/>
+            <a:endParaRPr spc="-27">
+              <a:latin typeface="Pretendard"/>
+              <a:ea typeface="Pretendard"/>
+              <a:cs typeface="Pretendard"/>
+            </a:endParaRPr>
           </a:p>
         </p:txBody>
       </p:sp>
@@ -8338,6 +9574,11 @@
           <a:lstStyle/>
           <a:p>
             <a:pPr algn="ctr"/>
+            <a:endParaRPr spc="-27">
+              <a:latin typeface="Pretendard"/>
+              <a:ea typeface="Pretendard"/>
+              <a:cs typeface="Pretendard"/>
+            </a:endParaRPr>
           </a:p>
         </p:txBody>
       </p:sp>
@@ -8358,20 +9599,27 @@
           <a:noFill/>
         </p:spPr>
         <p:txBody>
-          <a:bodyPr wrap="square">
+          <a:bodyPr wrap="square" lIns="0" rIns="0">
             <a:spAutoFit/>
           </a:bodyPr>
           <a:lstStyle/>
           <a:p>
             <a:pPr algn="l">
-              <a:defRPr sz="1300" b="0">
+              <a:defRPr sz="1400" b="0" spc="-21">
                 <a:solidFill>
                   <a:srgbClr val="999999"/>
                 </a:solidFill>
-                <a:latin typeface="Arial"/>
-              </a:defRPr>
-            </a:pPr>
-            <a:r>
+                <a:latin typeface="Pretendard"/>
+                <a:ea typeface="Pretendard"/>
+                <a:cs typeface="Pretendard"/>
+              </a:defRPr>
+            </a:pPr>
+            <a:r>
+              <a:rPr lang="ko-KR" sz="1400" spc="-21" dirty="0">
+                <a:latin typeface="Pretendard"/>
+                <a:ea typeface="Pretendard"/>
+                <a:cs typeface="Pretendard"/>
+              </a:rPr>
               <a:t>11/8 ~ 11/21</a:t>
             </a:r>
           </a:p>
@@ -8394,22 +9642,42 @@
           <a:noFill/>
         </p:spPr>
         <p:txBody>
-          <a:bodyPr wrap="square">
+          <a:bodyPr wrap="square" lIns="0" rIns="0">
             <a:spAutoFit/>
           </a:bodyPr>
           <a:lstStyle/>
           <a:p>
             <a:pPr algn="l">
-              <a:defRPr sz="1500" b="1">
+              <a:defRPr sz="1600" b="1" spc="-24">
                 <a:solidFill>
                   <a:srgbClr val="F5F5F5"/>
                 </a:solidFill>
-                <a:latin typeface="Arial"/>
-              </a:defRPr>
-            </a:pPr>
-            <a:r>
-              <a:t>실제 사용 시작</a:t>
-            </a:r>
+                <a:latin typeface="Pretendard"/>
+                <a:ea typeface="Pretendard"/>
+                <a:cs typeface="Pretendard"/>
+              </a:defRPr>
+            </a:pPr>
+            <a:r>
+              <a:rPr lang="en-US" sz="1600" spc="-24" dirty="0">
+                <a:latin typeface="Pretendard"/>
+                <a:ea typeface="Pretendard"/>
+                <a:cs typeface="Pretendard"/>
+              </a:rPr>
+              <a:t>MVP</a:t>
+            </a:r>
+            <a:r>
+              <a:rPr lang="ko-KR" altLang="en-US" sz="1600" spc="-24" dirty="0">
+                <a:latin typeface="Pretendard"/>
+                <a:ea typeface="Pretendard"/>
+                <a:cs typeface="Pretendard"/>
+              </a:rPr>
+              <a:t> 사용 시작</a:t>
+            </a:r>
+            <a:endParaRPr sz="1600" spc="-24" dirty="0">
+              <a:latin typeface="Pretendard"/>
+              <a:ea typeface="Pretendard"/>
+              <a:cs typeface="Pretendard"/>
+            </a:endParaRPr>
           </a:p>
         </p:txBody>
       </p:sp>
@@ -8421,8 +9689,8 @@
         </p:nvSpPr>
         <p:spPr>
           <a:xfrm>
-            <a:off x="6949440" y="3419856"/>
-            <a:ext cx="4846320" cy="320040"/>
+            <a:off x="6502400" y="3419856"/>
+            <a:ext cx="4749800" cy="320040"/>
           </a:xfrm>
           <a:prstGeom prst="rect">
             <a:avLst/>
@@ -8430,20 +9698,27 @@
           <a:noFill/>
         </p:spPr>
         <p:txBody>
-          <a:bodyPr wrap="square">
+          <a:bodyPr wrap="square" lIns="0" rIns="0">
             <a:spAutoFit/>
           </a:bodyPr>
           <a:lstStyle/>
           <a:p>
             <a:pPr algn="l">
-              <a:defRPr sz="1250" b="0">
+              <a:defRPr sz="1350" b="0" spc="-20">
                 <a:solidFill>
                   <a:srgbClr val="999999"/>
                 </a:solidFill>
-                <a:latin typeface="Arial"/>
-              </a:defRPr>
-            </a:pPr>
-            <a:r>
+                <a:latin typeface="Pretendard"/>
+                <a:ea typeface="Pretendard"/>
+                <a:cs typeface="Pretendard"/>
+              </a:defRPr>
+            </a:pPr>
+            <a:r>
+              <a:rPr lang="ko-KR" sz="1350" spc="-20" dirty="0">
+                <a:latin typeface="Pretendard"/>
+                <a:ea typeface="Pretendard"/>
+                <a:cs typeface="Pretendard"/>
+              </a:rPr>
               <a:t>팀 회의 적용 · 회의 연결 추천 · R&amp;R·일정 보완 · 목표치 확정</a:t>
             </a:r>
           </a:p>
@@ -8490,6 +9765,11 @@
           <a:lstStyle/>
           <a:p>
             <a:pPr algn="ctr"/>
+            <a:endParaRPr spc="-27">
+              <a:latin typeface="Pretendard"/>
+              <a:ea typeface="Pretendard"/>
+              <a:cs typeface="Pretendard"/>
+            </a:endParaRPr>
           </a:p>
         </p:txBody>
       </p:sp>
@@ -8534,6 +9814,11 @@
           <a:lstStyle/>
           <a:p>
             <a:pPr algn="ctr"/>
+            <a:endParaRPr spc="-27">
+              <a:latin typeface="Pretendard"/>
+              <a:ea typeface="Pretendard"/>
+              <a:cs typeface="Pretendard"/>
+            </a:endParaRPr>
           </a:p>
         </p:txBody>
       </p:sp>
@@ -8554,20 +9839,27 @@
           <a:noFill/>
         </p:spPr>
         <p:txBody>
-          <a:bodyPr wrap="square">
+          <a:bodyPr wrap="square" lIns="0" rIns="0">
             <a:spAutoFit/>
           </a:bodyPr>
           <a:lstStyle/>
           <a:p>
             <a:pPr algn="l">
-              <a:defRPr sz="1300" b="0">
+              <a:defRPr sz="1400" b="0" spc="-21">
                 <a:solidFill>
                   <a:srgbClr val="999999"/>
                 </a:solidFill>
-                <a:latin typeface="Arial"/>
-              </a:defRPr>
-            </a:pPr>
-            <a:r>
+                <a:latin typeface="Pretendard"/>
+                <a:ea typeface="Pretendard"/>
+                <a:cs typeface="Pretendard"/>
+              </a:defRPr>
+            </a:pPr>
+            <a:r>
+              <a:rPr lang="ko-KR" sz="1400" spc="-21" dirty="0">
+                <a:latin typeface="Pretendard"/>
+                <a:ea typeface="Pretendard"/>
+                <a:cs typeface="Pretendard"/>
+              </a:rPr>
               <a:t>11/22 ~ 12/5</a:t>
             </a:r>
           </a:p>
@@ -8590,22 +9882,50 @@
           <a:noFill/>
         </p:spPr>
         <p:txBody>
-          <a:bodyPr wrap="square">
+          <a:bodyPr wrap="square" lIns="0" rIns="0">
             <a:spAutoFit/>
           </a:bodyPr>
           <a:lstStyle/>
           <a:p>
             <a:pPr algn="l">
-              <a:defRPr sz="1500" b="1">
+              <a:defRPr sz="1600" b="1" spc="-24">
                 <a:solidFill>
                   <a:srgbClr val="F5F5F5"/>
                 </a:solidFill>
-                <a:latin typeface="Arial"/>
-              </a:defRPr>
-            </a:pPr>
-            <a:r>
-              <a:t>사용하면서 개선</a:t>
-            </a:r>
+                <a:latin typeface="Pretendard"/>
+                <a:ea typeface="Pretendard"/>
+                <a:cs typeface="Pretendard"/>
+              </a:defRPr>
+            </a:pPr>
+            <a:r>
+              <a:rPr lang="ko-KR" altLang="en-US" sz="1600" spc="-24" dirty="0">
+                <a:latin typeface="Pretendard"/>
+                <a:ea typeface="Pretendard"/>
+                <a:cs typeface="Pretendard"/>
+              </a:rPr>
+              <a:t>서비스 개선</a:t>
+            </a:r>
+            <a:r>
+              <a:rPr lang="en-US" altLang="ko-KR" sz="1600" spc="-24" dirty="0">
+                <a:latin typeface="Pretendard"/>
+                <a:ea typeface="Pretendard"/>
+                <a:cs typeface="Pretendard"/>
+              </a:rPr>
+              <a:t>/</a:t>
+            </a:r>
+            <a:r>
+              <a:rPr lang="ko-KR" altLang="en-US" sz="1600" spc="-24" dirty="0">
+                <a:latin typeface="Pretendard"/>
+                <a:ea typeface="Pretendard"/>
+                <a:cs typeface="Pretendard"/>
+              </a:rPr>
+              <a:t>보완</a:t>
+            </a:r>
+            <a:endParaRPr sz="1600" spc="-24" dirty="0">
+              <a:latin typeface="Pretendard"/>
+              <a:ea typeface="Pretendard"/>
+              <a:cs typeface="Pretendard"/>
+            </a:endParaRPr>
           </a:p>
         </p:txBody>
       </p:sp>
@@ -8617,8 +9937,8 @@
         </p:nvSpPr>
         <p:spPr>
           <a:xfrm>
-            <a:off x="6949440" y="3986784"/>
-            <a:ext cx="4846320" cy="320040"/>
+            <a:off x="6502400" y="3986784"/>
+            <a:ext cx="4749800" cy="320040"/>
           </a:xfrm>
           <a:prstGeom prst="rect">
             <a:avLst/>
@@ -8626,20 +9946,27 @@
           <a:noFill/>
         </p:spPr>
         <p:txBody>
-          <a:bodyPr wrap="square">
+          <a:bodyPr wrap="square" lIns="0" rIns="0">
             <a:spAutoFit/>
           </a:bodyPr>
           <a:lstStyle/>
           <a:p>
             <a:pPr algn="l">
-              <a:defRPr sz="1250" b="0">
+              <a:defRPr sz="1350" b="0" spc="-20">
                 <a:solidFill>
                   <a:srgbClr val="999999"/>
                 </a:solidFill>
-                <a:latin typeface="Arial"/>
-              </a:defRPr>
-            </a:pPr>
-            <a:r>
+                <a:latin typeface="Pretendard"/>
+                <a:ea typeface="Pretendard"/>
+                <a:cs typeface="Pretendard"/>
+              </a:defRPr>
+            </a:pPr>
+            <a:r>
+              <a:rPr lang="ko-KR" sz="1350" spc="-20" dirty="0">
+                <a:latin typeface="Pretendard"/>
+                <a:ea typeface="Pretendard"/>
+                <a:cs typeface="Pretendard"/>
+              </a:rPr>
               <a:t>답변 해석 · 막힘 파악 · 이전 업무 업데이트 · 안건 연결</a:t>
             </a:r>
           </a:p>
@@ -8686,6 +10013,11 @@
           <a:lstStyle/>
           <a:p>
             <a:pPr algn="ctr"/>
+            <a:endParaRPr spc="-27">
+              <a:latin typeface="Pretendard"/>
+              <a:ea typeface="Pretendard"/>
+              <a:cs typeface="Pretendard"/>
+            </a:endParaRPr>
           </a:p>
         </p:txBody>
       </p:sp>
@@ -8730,6 +10062,11 @@
           <a:lstStyle/>
           <a:p>
             <a:pPr algn="ctr"/>
+            <a:endParaRPr spc="-27">
+              <a:latin typeface="Pretendard"/>
+              <a:ea typeface="Pretendard"/>
+              <a:cs typeface="Pretendard"/>
+            </a:endParaRPr>
           </a:p>
         </p:txBody>
       </p:sp>
@@ -8750,20 +10087,27 @@
           <a:noFill/>
         </p:spPr>
         <p:txBody>
-          <a:bodyPr wrap="square">
+          <a:bodyPr wrap="square" lIns="0" rIns="0">
             <a:spAutoFit/>
           </a:bodyPr>
           <a:lstStyle/>
           <a:p>
             <a:pPr algn="l">
-              <a:defRPr sz="1300" b="0">
+              <a:defRPr sz="1400" b="0" spc="-21">
                 <a:solidFill>
                   <a:srgbClr val="999999"/>
                 </a:solidFill>
-                <a:latin typeface="Arial"/>
-              </a:defRPr>
-            </a:pPr>
-            <a:r>
+                <a:latin typeface="Pretendard"/>
+                <a:ea typeface="Pretendard"/>
+                <a:cs typeface="Pretendard"/>
+              </a:defRPr>
+            </a:pPr>
+            <a:r>
+              <a:rPr lang="ko-KR" sz="1400" spc="-21" dirty="0">
+                <a:latin typeface="Pretendard"/>
+                <a:ea typeface="Pretendard"/>
+                <a:cs typeface="Pretendard"/>
+              </a:rPr>
               <a:t>12/6 ~ 12/18</a:t>
             </a:r>
           </a:p>
@@ -8786,20 +10130,27 @@
           <a:noFill/>
         </p:spPr>
         <p:txBody>
-          <a:bodyPr wrap="square">
+          <a:bodyPr wrap="square" lIns="0" rIns="0">
             <a:spAutoFit/>
           </a:bodyPr>
           <a:lstStyle/>
           <a:p>
             <a:pPr algn="l">
-              <a:defRPr sz="1500" b="1">
+              <a:defRPr sz="1600" b="1" spc="-24">
                 <a:solidFill>
                   <a:srgbClr val="F5F5F5"/>
                 </a:solidFill>
-                <a:latin typeface="Arial"/>
-              </a:defRPr>
-            </a:pPr>
-            <a:r>
+                <a:latin typeface="Pretendard"/>
+                <a:ea typeface="Pretendard"/>
+                <a:cs typeface="Pretendard"/>
+              </a:defRPr>
+            </a:pPr>
+            <a:r>
+              <a:rPr lang="ko-KR" sz="1600" spc="-24" dirty="0">
+                <a:latin typeface="Pretendard"/>
+                <a:ea typeface="Pretendard"/>
+                <a:cs typeface="Pretendard"/>
+              </a:rPr>
               <a:t>최종 검증 · 분석</a:t>
             </a:r>
           </a:p>
@@ -8813,8 +10164,8 @@
         </p:nvSpPr>
         <p:spPr>
           <a:xfrm>
-            <a:off x="6949440" y="4553712"/>
-            <a:ext cx="4846320" cy="320040"/>
+            <a:off x="6502400" y="4553712"/>
+            <a:ext cx="4749800" cy="320040"/>
           </a:xfrm>
           <a:prstGeom prst="rect">
             <a:avLst/>
@@ -8822,20 +10173,27 @@
           <a:noFill/>
         </p:spPr>
         <p:txBody>
-          <a:bodyPr wrap="square">
+          <a:bodyPr wrap="square" lIns="0" rIns="0">
             <a:spAutoFit/>
           </a:bodyPr>
           <a:lstStyle/>
           <a:p>
             <a:pPr algn="l">
-              <a:defRPr sz="1250" b="0">
+              <a:defRPr sz="1350" b="0" spc="-20">
                 <a:solidFill>
                   <a:srgbClr val="999999"/>
                 </a:solidFill>
-                <a:latin typeface="Arial"/>
-              </a:defRPr>
-            </a:pPr>
-            <a:r>
+                <a:latin typeface="Pretendard"/>
+                <a:ea typeface="Pretendard"/>
+                <a:cs typeface="Pretendard"/>
+              </a:defRPr>
+            </a:pPr>
+            <a:r>
+              <a:rPr lang="ko-KR" sz="1350" spc="-20" dirty="0">
+                <a:latin typeface="Pretendard"/>
+                <a:ea typeface="Pretendard"/>
+                <a:cs typeface="Pretendard"/>
+              </a:rPr>
               <a:t>관리 시간 · 추적 오류 · F/U 정상 처리율 · 팀원 평가 정리</a:t>
             </a:r>
           </a:p>
@@ -8882,6 +10240,11 @@
           <a:lstStyle/>
           <a:p>
             <a:pPr algn="ctr"/>
+            <a:endParaRPr spc="-27">
+              <a:latin typeface="Pretendard"/>
+              <a:ea typeface="Pretendard"/>
+              <a:cs typeface="Pretendard"/>
+            </a:endParaRPr>
           </a:p>
         </p:txBody>
       </p:sp>
@@ -8902,20 +10265,27 @@
           <a:noFill/>
         </p:spPr>
         <p:txBody>
-          <a:bodyPr wrap="square">
+          <a:bodyPr wrap="square" lIns="0" rIns="0">
             <a:spAutoFit/>
           </a:bodyPr>
           <a:lstStyle/>
           <a:p>
             <a:pPr algn="l">
-              <a:defRPr sz="1300" b="0">
+              <a:defRPr sz="1400" b="0" spc="-21">
                 <a:solidFill>
                   <a:srgbClr val="999999"/>
                 </a:solidFill>
-                <a:latin typeface="Arial"/>
-              </a:defRPr>
-            </a:pPr>
-            <a:r>
+                <a:latin typeface="Pretendard"/>
+                <a:ea typeface="Pretendard"/>
+                <a:cs typeface="Pretendard"/>
+              </a:defRPr>
+            </a:pPr>
+            <a:r>
+              <a:rPr lang="ko-KR" sz="1400" spc="-21" dirty="0">
+                <a:latin typeface="Pretendard"/>
+                <a:ea typeface="Pretendard"/>
+                <a:cs typeface="Pretendard"/>
+              </a:rPr>
               <a:t>12/19</a:t>
             </a:r>
           </a:p>
@@ -8938,22 +10308,50 @@
           <a:noFill/>
         </p:spPr>
         <p:txBody>
-          <a:bodyPr wrap="square">
+          <a:bodyPr wrap="square" lIns="0" rIns="0">
             <a:spAutoFit/>
           </a:bodyPr>
           <a:lstStyle/>
           <a:p>
             <a:pPr algn="l">
-              <a:defRPr sz="1500" b="1">
+              <a:defRPr sz="1600" b="1" spc="-24">
                 <a:solidFill>
                   <a:srgbClr val="4ADE80"/>
                 </a:solidFill>
-                <a:latin typeface="Arial"/>
-              </a:defRPr>
-            </a:pPr>
-            <a:r>
-              <a:t>기말 발표</a:t>
-            </a:r>
+                <a:latin typeface="Pretendard"/>
+                <a:ea typeface="Pretendard"/>
+                <a:cs typeface="Pretendard"/>
+              </a:defRPr>
+            </a:pPr>
+            <a:r>
+              <a:rPr sz="1600" spc="-24" dirty="0" err="1">
+                <a:latin typeface="Pretendard"/>
+                <a:ea typeface="Pretendard"/>
+                <a:cs typeface="Pretendard"/>
+              </a:rPr>
+              <a:t>기말</a:t>
+            </a:r>
+            <a:r>
+              <a:rPr sz="1600" spc="-24" dirty="0">
+                <a:latin typeface="Pretendard"/>
+                <a:ea typeface="Pretendard"/>
+                <a:cs typeface="Pretendard"/>
+              </a:rPr>
+              <a:t> </a:t>
+            </a:r>
+            <a:r>
+              <a:rPr sz="1600" spc="-24" dirty="0" err="1">
+                <a:latin typeface="Pretendard"/>
+                <a:ea typeface="Pretendard"/>
+                <a:cs typeface="Pretendard"/>
+              </a:rPr>
+              <a:t>발표</a:t>
+            </a:r>
+            <a:endParaRPr sz="1600" spc="-24" dirty="0">
+              <a:latin typeface="Pretendard"/>
+              <a:ea typeface="Pretendard"/>
+              <a:cs typeface="Pretendard"/>
+            </a:endParaRPr>
           </a:p>
         </p:txBody>
       </p:sp>
@@ -8965,8 +10363,8 @@
         </p:nvSpPr>
         <p:spPr>
           <a:xfrm>
-            <a:off x="6949440" y="5120640"/>
-            <a:ext cx="4846320" cy="320040"/>
+            <a:off x="6502400" y="5120640"/>
+            <a:ext cx="4749800" cy="320040"/>
           </a:xfrm>
           <a:prstGeom prst="rect">
             <a:avLst/>
@@ -8974,20 +10372,27 @@
           <a:noFill/>
         </p:spPr>
         <p:txBody>
-          <a:bodyPr wrap="square">
+          <a:bodyPr wrap="square" lIns="0" rIns="0">
             <a:spAutoFit/>
           </a:bodyPr>
           <a:lstStyle/>
           <a:p>
             <a:pPr algn="l">
-              <a:defRPr sz="1250" b="0">
+              <a:defRPr sz="1350" b="0" spc="-20">
                 <a:solidFill>
                   <a:srgbClr val="999999"/>
                 </a:solidFill>
-                <a:latin typeface="Arial"/>
-              </a:defRPr>
-            </a:pPr>
-            <a:r>
+                <a:latin typeface="Pretendard"/>
+                <a:ea typeface="Pretendard"/>
+                <a:cs typeface="Pretendard"/>
+              </a:defRPr>
+            </a:pPr>
+            <a:r>
+              <a:rPr lang="ko-KR" sz="1350" spc="-20" dirty="0">
+                <a:latin typeface="Pretendard"/>
+                <a:ea typeface="Pretendard"/>
+                <a:cs typeface="Pretendard"/>
+              </a:rPr>
               <a:t>라이브 데모 + 실제 사용 결과 + 개선 사례</a:t>
             </a:r>
           </a:p>
@@ -9010,20 +10415,27 @@
           <a:noFill/>
         </p:spPr>
         <p:txBody>
-          <a:bodyPr wrap="square">
+          <a:bodyPr wrap="square" lIns="0" rIns="0">
             <a:spAutoFit/>
           </a:bodyPr>
           <a:lstStyle/>
           <a:p>
             <a:pPr algn="l">
-              <a:defRPr sz="1700" b="1">
+              <a:defRPr sz="1700" b="1" spc="-26">
                 <a:solidFill>
                   <a:srgbClr val="4ADE80"/>
                 </a:solidFill>
-                <a:latin typeface="Arial"/>
-              </a:defRPr>
-            </a:pPr>
-            <a:r>
+                <a:latin typeface="Pretendard"/>
+                <a:ea typeface="Pretendard"/>
+                <a:cs typeface="Pretendard"/>
+              </a:defRPr>
+            </a:pPr>
+            <a:r>
+              <a:rPr lang="ko-KR" spc="-26" dirty="0">
+                <a:latin typeface="Pretendard"/>
+                <a:ea typeface="Pretendard"/>
+                <a:cs typeface="Pretendard"/>
+              </a:rPr>
               <a:t>11월 초부터 최소 기능을 팀 회의에 적용 → 사용·개선을 병행하며 기말까지 효과 검증</a:t>
             </a:r>
           </a:p>
@@ -9037,7 +10449,7 @@
         </p:nvSpPr>
         <p:spPr>
           <a:xfrm>
-            <a:off x="11430000" y="6446520"/>
+            <a:off x="10706100" y="6350000"/>
             <a:ext cx="548640" cy="274320"/>
           </a:xfrm>
           <a:prstGeom prst="rect">
@@ -9046,26 +10458,38 @@
           <a:noFill/>
         </p:spPr>
         <p:txBody>
-          <a:bodyPr wrap="square">
+          <a:bodyPr wrap="square" lIns="0" rIns="0">
             <a:spAutoFit/>
           </a:bodyPr>
           <a:lstStyle/>
           <a:p>
             <a:pPr algn="r">
-              <a:defRPr sz="1000" b="0">
+              <a:defRPr sz="1000" b="0" spc="-10">
                 <a:solidFill>
                   <a:srgbClr val="666666"/>
                 </a:solidFill>
-                <a:latin typeface="Arial"/>
-              </a:defRPr>
-            </a:pPr>
-            <a:r>
+                <a:latin typeface="Pretendard"/>
+                <a:ea typeface="Pretendard"/>
+                <a:cs typeface="Pretendard"/>
+              </a:defRPr>
+            </a:pPr>
+            <a:r>
+              <a:rPr lang="ko-KR" spc="-10" dirty="0">
+                <a:latin typeface="Pretendard"/>
+                <a:ea typeface="Pretendard"/>
+                <a:cs typeface="Pretendard"/>
+              </a:rPr>
               <a:t>6</a:t>
             </a:r>
           </a:p>
         </p:txBody>
       </p:sp>
     </p:spTree>
+    <p:extLst>
+      <p:ext uri="{BB962C8B-B14F-4D97-AF65-F5344CB8AC3E}">
+        <p14:creationId xmlns:p14="http://schemas.microsoft.com/office/powerpoint/2010/main" val="860161247"/>
+      </p:ext>
+    </p:extLst>
   </p:cSld>
   <p:clrMapOvr>
     <a:masterClrMapping/>
@@ -9074,7 +10498,7 @@
 </file>
 
 <file path=ppt/slides/slide7.xml><?xml version="1.0" encoding="utf-8"?>
-<p:sld xmlns:a="http://schemas.openxmlformats.org/drawingml/2006/main" xmlns:p="http://schemas.openxmlformats.org/presentationml/2006/main" xmlns:r="http://schemas.openxmlformats.org/officeDocument/2006/relationships">
+<p:sld xmlns:a="http://schemas.openxmlformats.org/drawingml/2006/main" xmlns:r="http://schemas.openxmlformats.org/officeDocument/2006/relationships" xmlns:p="http://schemas.openxmlformats.org/presentationml/2006/main">
   <p:cSld>
     <p:bg>
       <p:bgPr>
@@ -9090,7 +10514,14 @@
         <p:cNvGrpSpPr/>
         <p:nvPr/>
       </p:nvGrpSpPr>
-      <p:grpSpPr/>
+      <p:grpSpPr>
+        <a:xfrm>
+          <a:off x="0" y="0"/>
+          <a:ext cx="0" cy="0"/>
+          <a:chOff x="0" y="0"/>
+          <a:chExt cx="0" cy="0"/>
+        </a:xfrm>
+      </p:grpSpPr>
       <p:sp>
         <p:nvSpPr>
           <p:cNvPr id="2" name="TextBox 1"/>
@@ -9099,7 +10530,7 @@
         </p:nvSpPr>
         <p:spPr>
           <a:xfrm>
-            <a:off x="914400" y="2011680"/>
+            <a:off x="914400" y="1830705"/>
             <a:ext cx="10058400" cy="1645920"/>
           </a:xfrm>
           <a:prstGeom prst="rect">
@@ -9108,24 +10539,39 @@
           <a:noFill/>
         </p:spPr>
         <p:txBody>
-          <a:bodyPr wrap="square">
+          <a:bodyPr wrap="square" lIns="0" rIns="0">
             <a:spAutoFit/>
           </a:bodyPr>
           <a:lstStyle/>
           <a:p>
             <a:pPr algn="l">
-              <a:defRPr sz="4600" b="1">
+              <a:lnSpc>
+                <a:spcPct val="102000"/>
+              </a:lnSpc>
+              <a:defRPr sz="4600" b="1" spc="-115">
                 <a:solidFill>
                   <a:srgbClr val="999999"/>
                 </a:solidFill>
-                <a:latin typeface="Arial"/>
-              </a:defRPr>
-            </a:pPr>
-            <a:r>
+                <a:latin typeface="Pretendard"/>
+                <a:ea typeface="Pretendard"/>
+                <a:cs typeface="Pretendard"/>
+              </a:defRPr>
+            </a:pPr>
+            <a:r>
+              <a:rPr lang="ko-KR" spc="-115" dirty="0">
+                <a:latin typeface="Pretendard"/>
+                <a:ea typeface="Pretendard"/>
+                <a:cs typeface="Pretendard"/>
+              </a:rPr>
               <a:t>기존 도구는</a:t>
             </a:r>
             <a:br/>
             <a:r>
+              <a:rPr lang="ko-KR" spc="-115" dirty="0">
+                <a:latin typeface="Pretendard"/>
+                <a:ea typeface="Pretendard"/>
+                <a:cs typeface="Pretendard"/>
+              </a:rPr>
               <a:t>회의를 기록합니다.</a:t>
             </a:r>
           </a:p>
@@ -9139,7 +10585,7 @@
         </p:nvSpPr>
         <p:spPr>
           <a:xfrm>
-            <a:off x="914400" y="3840480"/>
+            <a:off x="914400" y="3659505"/>
             <a:ext cx="10058400" cy="914400"/>
           </a:xfrm>
           <a:prstGeom prst="rect">
@@ -9148,20 +10594,27 @@
           <a:noFill/>
         </p:spPr>
         <p:txBody>
-          <a:bodyPr wrap="square">
+          <a:bodyPr wrap="square" lIns="0" rIns="0">
             <a:spAutoFit/>
           </a:bodyPr>
           <a:lstStyle/>
           <a:p>
             <a:pPr algn="l">
-              <a:defRPr sz="4600" b="1">
+              <a:defRPr sz="4600" b="1" spc="-115">
                 <a:solidFill>
                   <a:srgbClr val="F5F5F5"/>
                 </a:solidFill>
-                <a:latin typeface="Arial"/>
-              </a:defRPr>
-            </a:pPr>
-            <a:r>
+                <a:latin typeface="Pretendard"/>
+                <a:ea typeface="Pretendard"/>
+                <a:cs typeface="Pretendard"/>
+              </a:defRPr>
+            </a:pPr>
+            <a:r>
+              <a:rPr lang="ko-KR" spc="-115" dirty="0">
+                <a:latin typeface="Pretendard"/>
+                <a:ea typeface="Pretendard"/>
+                <a:cs typeface="Pretendard"/>
+              </a:rPr>
               <a:t>우리는 회의를 완결합니다.</a:t>
             </a:r>
           </a:p>
@@ -9175,7 +10628,7 @@
         </p:nvSpPr>
         <p:spPr>
           <a:xfrm>
-            <a:off x="914400" y="5120640"/>
+            <a:off x="914400" y="4939665"/>
             <a:ext cx="2286000" cy="12700"/>
           </a:xfrm>
           <a:prstGeom prst="rect">
@@ -9208,6 +10661,11 @@
           <a:lstStyle/>
           <a:p>
             <a:pPr algn="ctr"/>
+            <a:endParaRPr spc="-27">
+              <a:latin typeface="Pretendard"/>
+              <a:ea typeface="Pretendard"/>
+              <a:cs typeface="Pretendard"/>
+            </a:endParaRPr>
           </a:p>
         </p:txBody>
       </p:sp>
@@ -9219,7 +10677,7 @@
         </p:nvSpPr>
         <p:spPr>
           <a:xfrm>
-            <a:off x="914400" y="5394960"/>
+            <a:off x="914400" y="5213985"/>
             <a:ext cx="5486400" cy="365760"/>
           </a:xfrm>
           <a:prstGeom prst="rect">
@@ -9228,20 +10686,27 @@
           <a:noFill/>
         </p:spPr>
         <p:txBody>
-          <a:bodyPr wrap="square">
+          <a:bodyPr wrap="square" lIns="0" rIns="0">
             <a:spAutoFit/>
           </a:bodyPr>
           <a:lstStyle/>
           <a:p>
             <a:pPr algn="l">
-              <a:defRPr sz="1800" b="1">
+              <a:defRPr sz="1800" b="1" spc="-27">
                 <a:solidFill>
                   <a:srgbClr val="4ADE80"/>
                 </a:solidFill>
-                <a:latin typeface="Arial"/>
-              </a:defRPr>
-            </a:pPr>
-            <a:r>
+                <a:latin typeface="Pretendard"/>
+                <a:ea typeface="Pretendard"/>
+                <a:cs typeface="Pretendard"/>
+              </a:defRPr>
+            </a:pPr>
+            <a:r>
+              <a:rPr lang="ko-KR" spc="-27" dirty="0">
+                <a:latin typeface="Pretendard"/>
+                <a:ea typeface="Pretendard"/>
+                <a:cs typeface="Pretendard"/>
+              </a:rPr>
               <a:t>FollowIt  ·  팔로잇</a:t>
             </a:r>
           </a:p>
@@ -9255,7 +10720,7 @@
         </p:nvSpPr>
         <p:spPr>
           <a:xfrm>
-            <a:off x="914400" y="5943600"/>
+            <a:off x="914400" y="5762625"/>
             <a:ext cx="4572000" cy="274320"/>
           </a:xfrm>
           <a:prstGeom prst="rect">
@@ -9264,20 +10729,27 @@
           <a:noFill/>
         </p:spPr>
         <p:txBody>
-          <a:bodyPr wrap="square">
+          <a:bodyPr wrap="square" lIns="0" rIns="0">
             <a:spAutoFit/>
           </a:bodyPr>
           <a:lstStyle/>
           <a:p>
             <a:pPr algn="l">
-              <a:defRPr sz="1600" b="0">
+              <a:defRPr sz="1600" b="0" spc="-24">
                 <a:solidFill>
                   <a:srgbClr val="666666"/>
                 </a:solidFill>
-                <a:latin typeface="Arial"/>
-              </a:defRPr>
-            </a:pPr>
-            <a:r>
+                <a:latin typeface="Pretendard"/>
+                <a:ea typeface="Pretendard"/>
+                <a:cs typeface="Pretendard"/>
+              </a:defRPr>
+            </a:pPr>
+            <a:r>
+              <a:rPr lang="ko-KR" spc="-24" dirty="0">
+                <a:latin typeface="Pretendard"/>
+                <a:ea typeface="Pretendard"/>
+                <a:cs typeface="Pretendard"/>
+              </a:rPr>
               <a:t>감사합니다</a:t>
             </a:r>
           </a:p>
@@ -9291,8 +10763,8 @@
         </p:nvSpPr>
         <p:spPr>
           <a:xfrm>
-            <a:off x="11430000" y="6446520"/>
-            <a:ext cx="548640" cy="274320"/>
+            <a:off x="10706100" y="6350000"/>
+            <a:ext cx="546100" cy="274320"/>
           </a:xfrm>
           <a:prstGeom prst="rect">
             <a:avLst/>
@@ -9300,26 +10772,38 @@
           <a:noFill/>
         </p:spPr>
         <p:txBody>
-          <a:bodyPr wrap="square">
+          <a:bodyPr wrap="square" lIns="0" rIns="0">
             <a:spAutoFit/>
           </a:bodyPr>
           <a:lstStyle/>
           <a:p>
             <a:pPr algn="r">
-              <a:defRPr sz="1000" b="0">
+              <a:defRPr sz="1000" b="0" spc="-10">
                 <a:solidFill>
                   <a:srgbClr val="666666"/>
                 </a:solidFill>
-                <a:latin typeface="Arial"/>
-              </a:defRPr>
-            </a:pPr>
-            <a:r>
+                <a:latin typeface="Pretendard"/>
+                <a:ea typeface="Pretendard"/>
+                <a:cs typeface="Pretendard"/>
+              </a:defRPr>
+            </a:pPr>
+            <a:r>
+              <a:rPr lang="ko-KR" spc="-10" dirty="0">
+                <a:latin typeface="Pretendard"/>
+                <a:ea typeface="Pretendard"/>
+                <a:cs typeface="Pretendard"/>
+              </a:rPr>
               <a:t>7</a:t>
             </a:r>
           </a:p>
         </p:txBody>
       </p:sp>
     </p:spTree>
+    <p:extLst>
+      <p:ext uri="{BB962C8B-B14F-4D97-AF65-F5344CB8AC3E}">
+        <p14:creationId xmlns:p14="http://schemas.microsoft.com/office/powerpoint/2010/main" val="1137104082"/>
+      </p:ext>
+    </p:extLst>
   </p:cSld>
   <p:clrMapOvr>
     <a:masterClrMapping/>
@@ -9328,7 +10812,7 @@
 </file>
 
 <file path=ppt/theme/theme1.xml><?xml version="1.0" encoding="utf-8"?>
-<a:theme xmlns:a="http://schemas.openxmlformats.org/drawingml/2006/main" name="Office Theme">
+<a:theme xmlns:a="http://schemas.openxmlformats.org/drawingml/2006/main" name="Office Theme [1792417622809]">
   <a:themeElements>
     <a:clrScheme name="Office">
       <a:dk1>
@@ -9370,11 +10854,11 @@
     </a:clrScheme>
     <a:fontScheme name="Office">
       <a:majorFont>
-        <a:latin typeface="Calibri"/>
-        <a:ea typeface=""/>
-        <a:cs typeface=""/>
+        <a:latin typeface="Pretendard"/>
+        <a:ea typeface="Pretendard"/>
+        <a:cs typeface="Pretendard"/>
         <a:font script="Jpan" typeface="ＭＳ Ｐゴシック"/>
-        <a:font script="Hang" typeface="맑은 고딕"/>
+        <a:font script="Hang" typeface="Pretendard"/>
         <a:font script="Hans" typeface="宋体"/>
         <a:font script="Hant" typeface="新細明體"/>
         <a:font script="Arab" typeface="Times New Roman"/>
@@ -9405,11 +10889,11 @@
         <a:font script="Geor" typeface="Sylfaen"/>
       </a:majorFont>
       <a:minorFont>
-        <a:latin typeface="Calibri"/>
-        <a:ea typeface=""/>
-        <a:cs typeface=""/>
+        <a:latin typeface="Pretendard"/>
+        <a:ea typeface="Pretendard"/>
+        <a:cs typeface="Pretendard"/>
         <a:font script="Jpan" typeface="ＭＳ Ｐゴシック"/>
-        <a:font script="Hang" typeface="맑은 고딕"/>
+        <a:font script="Hang" typeface="Pretendard"/>
         <a:font script="Hans" typeface="宋体"/>
         <a:font script="Hant" typeface="新細明體"/>
         <a:font script="Arab" typeface="Arial"/>
@@ -9645,4 +11129,26 @@
   </a:objectDefaults>
   <a:extraClrSchemeLst/>
 </a:theme>
+</file>
+
+<file path=ppt/webextensions/taskpanes.xml><?xml version="1.0" encoding="utf-8"?>
+<wetp:taskpanes xmlns:wetp="http://schemas.microsoft.com/office/webextensions/taskpanes/2010/11">
+  <wetp:taskpane dockstate="right" visibility="0" width="350" row="0">
+    <wetp:webextensionref xmlns:r="http://schemas.openxmlformats.org/officeDocument/2006/relationships" r:id="rId1"/>
+  </wetp:taskpane>
+</wetp:taskpanes>
+</file>
+
+<file path=ppt/webextensions/webextension1.xml><?xml version="1.0" encoding="utf-8"?>
+<we:webextension xmlns:we="http://schemas.microsoft.com/office/webextensions/webextension/2010/11" id="{E0FDAD40-2D34-A843-B5FA-559CC3C34E4C}">
+  <we:reference id="WA200010001" version="1.0.0.1" store="Omex" storeType="OMEX"/>
+  <we:alternateReferences>
+    <we:reference id="WA200010001" version="1.0.0.1" store="WA200010001" storeType="OMEX"/>
+  </we:alternateReferences>
+  <we:properties>
+    <we:property name="claude.fileId" value="&quot;53e6869a-fae0-48f4-8f20-fdb1915400e2&quot;"/>
+  </we:properties>
+  <we:bindings/>
+  <we:snapshot xmlns:r="http://schemas.openxmlformats.org/officeDocument/2006/relationships"/>
+</we:webextension>
 </file>